--- a/Seperated/Presentations/L5-Suni-Intellekt-ve-Innovasiya-Menecmenti.pptx
+++ b/Seperated/Presentations/L5-Suni-Intellekt-ve-Innovasiya-Menecmenti.pptx
@@ -30,6 +30,7 @@
     <p:sldId id="264" r:id="rId23"/>
     <p:sldId id="265" r:id="rId24"/>
     <p:sldId id="266" r:id="rId25"/>
+    <p:sldId id="267" r:id="rId26"/>
   </p:sldIdLst>
   <p:sldSz cx="14630400" cy="8229600"/>
   <p:notesSz cx="8229600" cy="14630400"/>
@@ -359,7 +360,7 @@
             <a:pPr indent="0" algn="r">
               <a:buNone/>
             </a:pPr>
-            <a:fld id="{B2773FD8-8D33-47D9-AB47-C2C88AB4324D}" type="slidenum">
+            <a:fld id="{9A8C9DCC-F79B-42EC-9260-DE3888AD5B32}" type="slidenum">
               <a:rPr b="0" lang="en-US" sz="1400" spc="-1" strike="noStrike">
                 <a:solidFill>
                   <a:srgbClr val="000000"/>
@@ -402,7 +403,7 @@
       </p:grpSpPr>
       <p:sp>
         <p:nvSpPr>
-          <p:cNvPr id="324" name="PlaceHolder 1"/>
+          <p:cNvPr id="327" name="PlaceHolder 1"/>
           <p:cNvSpPr>
             <a:spLocks noGrp="1"/>
           </p:cNvSpPr>
@@ -425,7 +426,7 @@
       </p:sp>
       <p:sp>
         <p:nvSpPr>
-          <p:cNvPr id="325" name="PlaceHolder 2"/>
+          <p:cNvPr id="328" name="PlaceHolder 2"/>
           <p:cNvSpPr>
             <a:spLocks noGrp="1"/>
           </p:cNvSpPr>
@@ -465,7 +466,7 @@
       </p:sp>
       <p:sp>
         <p:nvSpPr>
-          <p:cNvPr id="326" name="PlaceHolder 3"/>
+          <p:cNvPr id="329" name="PlaceHolder 3"/>
           <p:cNvSpPr>
             <a:spLocks noGrp="1"/>
           </p:cNvSpPr>
@@ -512,7 +513,7 @@
               </a:lnSpc>
               <a:buNone/>
             </a:pPr>
-            <a:fld id="{3C55E16A-BF55-4E5D-8E32-44452FC84A79}" type="slidenum">
+            <a:fld id="{E301C00A-08C0-43B4-B05B-6C986E9C691D}" type="slidenum">
               <a:rPr b="0" lang="en-US" sz="1800" spc="-1" strike="noStrike">
                 <a:solidFill>
                   <a:schemeClr val="dk1"/>
@@ -555,7 +556,7 @@
       </p:grpSpPr>
       <p:sp>
         <p:nvSpPr>
-          <p:cNvPr id="351" name="PlaceHolder 1"/>
+          <p:cNvPr id="354" name="PlaceHolder 1"/>
           <p:cNvSpPr>
             <a:spLocks noGrp="1"/>
           </p:cNvSpPr>
@@ -578,7 +579,7 @@
       </p:sp>
       <p:sp>
         <p:nvSpPr>
-          <p:cNvPr id="352" name="PlaceHolder 2"/>
+          <p:cNvPr id="355" name="PlaceHolder 2"/>
           <p:cNvSpPr>
             <a:spLocks noGrp="1"/>
           </p:cNvSpPr>
@@ -618,7 +619,7 @@
       </p:sp>
       <p:sp>
         <p:nvSpPr>
-          <p:cNvPr id="353" name="PlaceHolder 3"/>
+          <p:cNvPr id="356" name="PlaceHolder 3"/>
           <p:cNvSpPr>
             <a:spLocks noGrp="1"/>
           </p:cNvSpPr>
@@ -665,7 +666,7 @@
               </a:lnSpc>
               <a:buNone/>
             </a:pPr>
-            <a:fld id="{083C69B0-0745-4C64-9533-FAB52072B619}" type="slidenum">
+            <a:fld id="{EACBA740-3A77-42FF-804F-0FD1110E8B97}" type="slidenum">
               <a:rPr b="0" lang="en-US" sz="1800" spc="-1" strike="noStrike">
                 <a:solidFill>
                   <a:schemeClr val="dk1"/>
@@ -708,7 +709,7 @@
       </p:grpSpPr>
       <p:sp>
         <p:nvSpPr>
-          <p:cNvPr id="354" name="PlaceHolder 1"/>
+          <p:cNvPr id="357" name="PlaceHolder 1"/>
           <p:cNvSpPr>
             <a:spLocks noGrp="1"/>
           </p:cNvSpPr>
@@ -731,7 +732,7 @@
       </p:sp>
       <p:sp>
         <p:nvSpPr>
-          <p:cNvPr id="355" name="PlaceHolder 2"/>
+          <p:cNvPr id="358" name="PlaceHolder 2"/>
           <p:cNvSpPr>
             <a:spLocks noGrp="1"/>
           </p:cNvSpPr>
@@ -771,7 +772,7 @@
       </p:sp>
       <p:sp>
         <p:nvSpPr>
-          <p:cNvPr id="356" name="PlaceHolder 3"/>
+          <p:cNvPr id="359" name="PlaceHolder 3"/>
           <p:cNvSpPr>
             <a:spLocks noGrp="1"/>
           </p:cNvSpPr>
@@ -818,7 +819,7 @@
               </a:lnSpc>
               <a:buNone/>
             </a:pPr>
-            <a:fld id="{BB639750-471D-4A08-A300-D7ACB8BE7CAE}" type="slidenum">
+            <a:fld id="{4D043E1F-1B83-4470-95B1-F88126AE6C22}" type="slidenum">
               <a:rPr b="0" lang="en-US" sz="1800" spc="-1" strike="noStrike">
                 <a:solidFill>
                   <a:schemeClr val="dk1"/>
@@ -861,7 +862,7 @@
       </p:grpSpPr>
       <p:sp>
         <p:nvSpPr>
-          <p:cNvPr id="327" name="PlaceHolder 1"/>
+          <p:cNvPr id="330" name="PlaceHolder 1"/>
           <p:cNvSpPr>
             <a:spLocks noGrp="1"/>
           </p:cNvSpPr>
@@ -884,7 +885,7 @@
       </p:sp>
       <p:sp>
         <p:nvSpPr>
-          <p:cNvPr id="328" name="PlaceHolder 2"/>
+          <p:cNvPr id="331" name="PlaceHolder 2"/>
           <p:cNvSpPr>
             <a:spLocks noGrp="1"/>
           </p:cNvSpPr>
@@ -924,7 +925,7 @@
       </p:sp>
       <p:sp>
         <p:nvSpPr>
-          <p:cNvPr id="329" name="PlaceHolder 3"/>
+          <p:cNvPr id="332" name="PlaceHolder 3"/>
           <p:cNvSpPr>
             <a:spLocks noGrp="1"/>
           </p:cNvSpPr>
@@ -971,7 +972,7 @@
               </a:lnSpc>
               <a:buNone/>
             </a:pPr>
-            <a:fld id="{274A3CBF-F8A6-43CE-A461-D67EBD96D1B9}" type="slidenum">
+            <a:fld id="{F5CFB85C-3E19-4D4D-8813-5DA3981428D5}" type="slidenum">
               <a:rPr b="0" lang="en-US" sz="1800" spc="-1" strike="noStrike">
                 <a:solidFill>
                   <a:schemeClr val="dk1"/>
@@ -1014,7 +1015,7 @@
       </p:grpSpPr>
       <p:sp>
         <p:nvSpPr>
-          <p:cNvPr id="330" name="PlaceHolder 1"/>
+          <p:cNvPr id="333" name="PlaceHolder 1"/>
           <p:cNvSpPr>
             <a:spLocks noGrp="1"/>
           </p:cNvSpPr>
@@ -1037,7 +1038,7 @@
       </p:sp>
       <p:sp>
         <p:nvSpPr>
-          <p:cNvPr id="331" name="PlaceHolder 2"/>
+          <p:cNvPr id="334" name="PlaceHolder 2"/>
           <p:cNvSpPr>
             <a:spLocks noGrp="1"/>
           </p:cNvSpPr>
@@ -1077,7 +1078,7 @@
       </p:sp>
       <p:sp>
         <p:nvSpPr>
-          <p:cNvPr id="332" name="PlaceHolder 3"/>
+          <p:cNvPr id="335" name="PlaceHolder 3"/>
           <p:cNvSpPr>
             <a:spLocks noGrp="1"/>
           </p:cNvSpPr>
@@ -1124,7 +1125,7 @@
               </a:lnSpc>
               <a:buNone/>
             </a:pPr>
-            <a:fld id="{F8B7F1B3-A227-441B-B657-9AA377FDCBF2}" type="slidenum">
+            <a:fld id="{635548E3-C142-4364-A689-532BD31EBB35}" type="slidenum">
               <a:rPr b="0" lang="en-US" sz="1800" spc="-1" strike="noStrike">
                 <a:solidFill>
                   <a:schemeClr val="dk1"/>
@@ -1167,7 +1168,7 @@
       </p:grpSpPr>
       <p:sp>
         <p:nvSpPr>
-          <p:cNvPr id="333" name="PlaceHolder 1"/>
+          <p:cNvPr id="336" name="PlaceHolder 1"/>
           <p:cNvSpPr>
             <a:spLocks noGrp="1"/>
           </p:cNvSpPr>
@@ -1190,7 +1191,7 @@
       </p:sp>
       <p:sp>
         <p:nvSpPr>
-          <p:cNvPr id="334" name="PlaceHolder 2"/>
+          <p:cNvPr id="337" name="PlaceHolder 2"/>
           <p:cNvSpPr>
             <a:spLocks noGrp="1"/>
           </p:cNvSpPr>
@@ -1230,7 +1231,7 @@
       </p:sp>
       <p:sp>
         <p:nvSpPr>
-          <p:cNvPr id="335" name="PlaceHolder 3"/>
+          <p:cNvPr id="338" name="PlaceHolder 3"/>
           <p:cNvSpPr>
             <a:spLocks noGrp="1"/>
           </p:cNvSpPr>
@@ -1277,7 +1278,7 @@
               </a:lnSpc>
               <a:buNone/>
             </a:pPr>
-            <a:fld id="{A33D1714-C9B9-4DCD-AC98-73E0575E7167}" type="slidenum">
+            <a:fld id="{A24D5A8C-6024-4A4D-BF96-BFA4A3D2E05E}" type="slidenum">
               <a:rPr b="0" lang="en-US" sz="1800" spc="-1" strike="noStrike">
                 <a:solidFill>
                   <a:schemeClr val="dk1"/>
@@ -1320,7 +1321,7 @@
       </p:grpSpPr>
       <p:sp>
         <p:nvSpPr>
-          <p:cNvPr id="336" name="PlaceHolder 1"/>
+          <p:cNvPr id="339" name="PlaceHolder 1"/>
           <p:cNvSpPr>
             <a:spLocks noGrp="1"/>
           </p:cNvSpPr>
@@ -1343,7 +1344,7 @@
       </p:sp>
       <p:sp>
         <p:nvSpPr>
-          <p:cNvPr id="337" name="PlaceHolder 2"/>
+          <p:cNvPr id="340" name="PlaceHolder 2"/>
           <p:cNvSpPr>
             <a:spLocks noGrp="1"/>
           </p:cNvSpPr>
@@ -1383,7 +1384,7 @@
       </p:sp>
       <p:sp>
         <p:nvSpPr>
-          <p:cNvPr id="338" name="PlaceHolder 3"/>
+          <p:cNvPr id="341" name="PlaceHolder 3"/>
           <p:cNvSpPr>
             <a:spLocks noGrp="1"/>
           </p:cNvSpPr>
@@ -1430,7 +1431,7 @@
               </a:lnSpc>
               <a:buNone/>
             </a:pPr>
-            <a:fld id="{B41C7D8B-4745-410C-B951-909FC9B09A0B}" type="slidenum">
+            <a:fld id="{846271A1-66C9-4797-A0C1-E3910B9DA729}" type="slidenum">
               <a:rPr b="0" lang="en-US" sz="1800" spc="-1" strike="noStrike">
                 <a:solidFill>
                   <a:schemeClr val="dk1"/>
@@ -1473,7 +1474,7 @@
       </p:grpSpPr>
       <p:sp>
         <p:nvSpPr>
-          <p:cNvPr id="339" name="PlaceHolder 1"/>
+          <p:cNvPr id="342" name="PlaceHolder 1"/>
           <p:cNvSpPr>
             <a:spLocks noGrp="1"/>
           </p:cNvSpPr>
@@ -1496,7 +1497,7 @@
       </p:sp>
       <p:sp>
         <p:nvSpPr>
-          <p:cNvPr id="340" name="PlaceHolder 2"/>
+          <p:cNvPr id="343" name="PlaceHolder 2"/>
           <p:cNvSpPr>
             <a:spLocks noGrp="1"/>
           </p:cNvSpPr>
@@ -1536,7 +1537,7 @@
       </p:sp>
       <p:sp>
         <p:nvSpPr>
-          <p:cNvPr id="341" name="PlaceHolder 3"/>
+          <p:cNvPr id="344" name="PlaceHolder 3"/>
           <p:cNvSpPr>
             <a:spLocks noGrp="1"/>
           </p:cNvSpPr>
@@ -1583,7 +1584,7 @@
               </a:lnSpc>
               <a:buNone/>
             </a:pPr>
-            <a:fld id="{08CF74C5-20B8-489F-80E4-158C32B5229D}" type="slidenum">
+            <a:fld id="{74CF315A-DB98-4F59-8434-12E9BF84BAFA}" type="slidenum">
               <a:rPr b="0" lang="en-US" sz="1800" spc="-1" strike="noStrike">
                 <a:solidFill>
                   <a:schemeClr val="dk1"/>
@@ -1626,7 +1627,7 @@
       </p:grpSpPr>
       <p:sp>
         <p:nvSpPr>
-          <p:cNvPr id="342" name="PlaceHolder 1"/>
+          <p:cNvPr id="345" name="PlaceHolder 1"/>
           <p:cNvSpPr>
             <a:spLocks noGrp="1"/>
           </p:cNvSpPr>
@@ -1649,7 +1650,7 @@
       </p:sp>
       <p:sp>
         <p:nvSpPr>
-          <p:cNvPr id="343" name="PlaceHolder 2"/>
+          <p:cNvPr id="346" name="PlaceHolder 2"/>
           <p:cNvSpPr>
             <a:spLocks noGrp="1"/>
           </p:cNvSpPr>
@@ -1689,7 +1690,7 @@
       </p:sp>
       <p:sp>
         <p:nvSpPr>
-          <p:cNvPr id="344" name="PlaceHolder 3"/>
+          <p:cNvPr id="347" name="PlaceHolder 3"/>
           <p:cNvSpPr>
             <a:spLocks noGrp="1"/>
           </p:cNvSpPr>
@@ -1736,7 +1737,7 @@
               </a:lnSpc>
               <a:buNone/>
             </a:pPr>
-            <a:fld id="{3510D4F3-E939-40E4-96F5-AA548B313957}" type="slidenum">
+            <a:fld id="{23294747-809B-4AAD-BF70-A35568AB33DB}" type="slidenum">
               <a:rPr b="0" lang="en-US" sz="1800" spc="-1" strike="noStrike">
                 <a:solidFill>
                   <a:schemeClr val="dk1"/>
@@ -1779,7 +1780,7 @@
       </p:grpSpPr>
       <p:sp>
         <p:nvSpPr>
-          <p:cNvPr id="345" name="PlaceHolder 1"/>
+          <p:cNvPr id="348" name="PlaceHolder 1"/>
           <p:cNvSpPr>
             <a:spLocks noGrp="1"/>
           </p:cNvSpPr>
@@ -1802,7 +1803,7 @@
       </p:sp>
       <p:sp>
         <p:nvSpPr>
-          <p:cNvPr id="346" name="PlaceHolder 2"/>
+          <p:cNvPr id="349" name="PlaceHolder 2"/>
           <p:cNvSpPr>
             <a:spLocks noGrp="1"/>
           </p:cNvSpPr>
@@ -1842,7 +1843,7 @@
       </p:sp>
       <p:sp>
         <p:nvSpPr>
-          <p:cNvPr id="347" name="PlaceHolder 3"/>
+          <p:cNvPr id="350" name="PlaceHolder 3"/>
           <p:cNvSpPr>
             <a:spLocks noGrp="1"/>
           </p:cNvSpPr>
@@ -1889,7 +1890,7 @@
               </a:lnSpc>
               <a:buNone/>
             </a:pPr>
-            <a:fld id="{FC101977-B163-4AFE-B31E-C54409535B21}" type="slidenum">
+            <a:fld id="{59B71031-3563-42B6-BC7C-8EAFC9B69D68}" type="slidenum">
               <a:rPr b="0" lang="en-US" sz="1800" spc="-1" strike="noStrike">
                 <a:solidFill>
                   <a:schemeClr val="dk1"/>
@@ -1932,7 +1933,7 @@
       </p:grpSpPr>
       <p:sp>
         <p:nvSpPr>
-          <p:cNvPr id="348" name="PlaceHolder 1"/>
+          <p:cNvPr id="351" name="PlaceHolder 1"/>
           <p:cNvSpPr>
             <a:spLocks noGrp="1"/>
           </p:cNvSpPr>
@@ -1955,7 +1956,7 @@
       </p:sp>
       <p:sp>
         <p:nvSpPr>
-          <p:cNvPr id="349" name="PlaceHolder 2"/>
+          <p:cNvPr id="352" name="PlaceHolder 2"/>
           <p:cNvSpPr>
             <a:spLocks noGrp="1"/>
           </p:cNvSpPr>
@@ -1995,7 +1996,7 @@
       </p:sp>
       <p:sp>
         <p:nvSpPr>
-          <p:cNvPr id="350" name="PlaceHolder 3"/>
+          <p:cNvPr id="353" name="PlaceHolder 3"/>
           <p:cNvSpPr>
             <a:spLocks noGrp="1"/>
           </p:cNvSpPr>
@@ -2042,7 +2043,7 @@
               </a:lnSpc>
               <a:buNone/>
             </a:pPr>
-            <a:fld id="{8A83D9BF-83B8-44B1-AF98-EC5B7E5C9F4F}" type="slidenum">
+            <a:fld id="{C8BAA3D4-330F-4D3E-83FD-05A9B9AD1354}" type="slidenum">
               <a:rPr b="0" lang="en-US" sz="1800" spc="-1" strike="noStrike">
                 <a:solidFill>
                   <a:schemeClr val="dk1"/>
@@ -7170,10 +7171,10 @@
         </p:nvGrpSpPr>
         <p:grpSpPr>
           <a:xfrm>
-            <a:off x="312120" y="419400"/>
-            <a:ext cx="13995000" cy="7508520"/>
-            <a:chOff x="312120" y="419400"/>
-            <a:chExt cx="13995000" cy="7508520"/>
+            <a:off x="228600" y="228600"/>
+            <a:ext cx="14078520" cy="7699320"/>
+            <a:chOff x="228600" y="228600"/>
+            <a:chExt cx="14078520" cy="7699320"/>
           </a:xfrm>
         </p:grpSpPr>
         <p:sp>
@@ -7184,8 +7185,8 @@
           </p:nvSpPr>
           <p:spPr>
             <a:xfrm>
-              <a:off x="312120" y="419400"/>
-              <a:ext cx="5648040" cy="484200"/>
+              <a:off x="228600" y="228600"/>
+              <a:ext cx="5681880" cy="496440"/>
             </a:xfrm>
             <a:prstGeom prst="rect">
               <a:avLst/>
@@ -7241,8 +7242,8 @@
           </p:nvSpPr>
           <p:spPr>
             <a:xfrm>
-              <a:off x="312120" y="1112400"/>
-              <a:ext cx="13984200" cy="411840"/>
+              <a:off x="228600" y="939240"/>
+              <a:ext cx="14067720" cy="422280"/>
             </a:xfrm>
             <a:prstGeom prst="rect">
               <a:avLst/>
@@ -7298,8 +7299,8 @@
           </p:nvSpPr>
           <p:spPr>
             <a:xfrm>
-              <a:off x="312120" y="1641960"/>
-              <a:ext cx="4581720" cy="3115800"/>
+              <a:off x="228600" y="1482120"/>
+              <a:ext cx="4609080" cy="3195000"/>
             </a:xfrm>
             <a:prstGeom prst="roundRect">
               <a:avLst>
@@ -7346,8 +7347,8 @@
           </p:nvSpPr>
           <p:spPr>
             <a:xfrm>
-              <a:off x="506880" y="1812240"/>
-              <a:ext cx="585000" cy="511200"/>
+              <a:off x="424440" y="1656720"/>
+              <a:ext cx="588600" cy="524160"/>
             </a:xfrm>
             <a:prstGeom prst="roundRect">
               <a:avLst>
@@ -7404,8 +7405,8 @@
           </p:blipFill>
           <p:spPr>
             <a:xfrm>
-              <a:off x="667800" y="1953000"/>
-              <a:ext cx="262800" cy="229680"/>
+              <a:off x="586440" y="1801080"/>
+              <a:ext cx="264240" cy="235440"/>
             </a:xfrm>
             <a:prstGeom prst="rect">
               <a:avLst/>
@@ -7423,8 +7424,8 @@
           </p:nvSpPr>
           <p:spPr>
             <a:xfrm>
-              <a:off x="506880" y="2428200"/>
-              <a:ext cx="2216520" cy="241920"/>
+              <a:off x="424440" y="2288520"/>
+              <a:ext cx="2229840" cy="248040"/>
             </a:xfrm>
             <a:prstGeom prst="rect">
               <a:avLst/>
@@ -7480,8 +7481,8 @@
           </p:nvSpPr>
           <p:spPr>
             <a:xfrm>
-              <a:off x="506880" y="2733120"/>
-              <a:ext cx="4191840" cy="1235880"/>
+              <a:off x="424440" y="2601000"/>
+              <a:ext cx="4217040" cy="1267560"/>
             </a:xfrm>
             <a:prstGeom prst="rect">
               <a:avLst/>
@@ -7537,8 +7538,8 @@
           </p:nvSpPr>
           <p:spPr>
             <a:xfrm>
-              <a:off x="5013360" y="1641960"/>
-              <a:ext cx="4581720" cy="3115800"/>
+              <a:off x="4957920" y="1482120"/>
+              <a:ext cx="4609080" cy="3195000"/>
             </a:xfrm>
             <a:prstGeom prst="roundRect">
               <a:avLst>
@@ -7585,8 +7586,8 @@
           </p:nvSpPr>
           <p:spPr>
             <a:xfrm>
-              <a:off x="5208120" y="1812240"/>
-              <a:ext cx="585000" cy="511200"/>
+              <a:off x="5153760" y="1656720"/>
+              <a:ext cx="588600" cy="524160"/>
             </a:xfrm>
             <a:prstGeom prst="roundRect">
               <a:avLst>
@@ -7643,8 +7644,8 @@
           </p:blipFill>
           <p:spPr>
             <a:xfrm>
-              <a:off x="5369040" y="1953000"/>
-              <a:ext cx="262800" cy="229680"/>
+              <a:off x="5315760" y="1801080"/>
+              <a:ext cx="264240" cy="235440"/>
             </a:xfrm>
             <a:prstGeom prst="rect">
               <a:avLst/>
@@ -7662,8 +7663,8 @@
           </p:nvSpPr>
           <p:spPr>
             <a:xfrm>
-              <a:off x="5208120" y="2428200"/>
-              <a:ext cx="2902680" cy="241920"/>
+              <a:off x="5153760" y="2288520"/>
+              <a:ext cx="2919960" cy="248040"/>
             </a:xfrm>
             <a:prstGeom prst="rect">
               <a:avLst/>
@@ -7719,8 +7720,8 @@
           </p:nvSpPr>
           <p:spPr>
             <a:xfrm>
-              <a:off x="5208120" y="2733120"/>
-              <a:ext cx="4191840" cy="1854000"/>
+              <a:off x="5153760" y="2601000"/>
+              <a:ext cx="4217040" cy="1901160"/>
             </a:xfrm>
             <a:prstGeom prst="rect">
               <a:avLst/>
@@ -7776,8 +7777,8 @@
           </p:nvSpPr>
           <p:spPr>
             <a:xfrm>
-              <a:off x="9714600" y="1641960"/>
-              <a:ext cx="4581720" cy="3115800"/>
+              <a:off x="9687240" y="1482120"/>
+              <a:ext cx="4609080" cy="3195000"/>
             </a:xfrm>
             <a:prstGeom prst="roundRect">
               <a:avLst>
@@ -7824,8 +7825,8 @@
           </p:nvSpPr>
           <p:spPr>
             <a:xfrm>
-              <a:off x="9909720" y="1812240"/>
-              <a:ext cx="585000" cy="511200"/>
+              <a:off x="9883440" y="1656720"/>
+              <a:ext cx="588600" cy="524160"/>
             </a:xfrm>
             <a:prstGeom prst="roundRect">
               <a:avLst>
@@ -7882,8 +7883,8 @@
           </p:blipFill>
           <p:spPr>
             <a:xfrm>
-              <a:off x="10070280" y="1953000"/>
-              <a:ext cx="262800" cy="229680"/>
+              <a:off x="10045080" y="1801080"/>
+              <a:ext cx="264240" cy="235440"/>
             </a:xfrm>
             <a:prstGeom prst="rect">
               <a:avLst/>
@@ -7901,8 +7902,8 @@
           </p:nvSpPr>
           <p:spPr>
             <a:xfrm>
-              <a:off x="9909720" y="2428200"/>
-              <a:ext cx="2216520" cy="241920"/>
+              <a:off x="9883440" y="2288520"/>
+              <a:ext cx="2229840" cy="248040"/>
             </a:xfrm>
             <a:prstGeom prst="rect">
               <a:avLst/>
@@ -7958,8 +7959,8 @@
           </p:nvSpPr>
           <p:spPr>
             <a:xfrm>
-              <a:off x="9909720" y="2733120"/>
-              <a:ext cx="4191840" cy="1235880"/>
+              <a:off x="9883440" y="2601000"/>
+              <a:ext cx="4217040" cy="1267560"/>
             </a:xfrm>
             <a:prstGeom prst="rect">
               <a:avLst/>
@@ -8015,8 +8016,8 @@
           </p:nvSpPr>
           <p:spPr>
             <a:xfrm>
-              <a:off x="312120" y="4979520"/>
-              <a:ext cx="3556800" cy="241920"/>
+              <a:off x="228600" y="4904640"/>
+              <a:ext cx="3578040" cy="248040"/>
             </a:xfrm>
             <a:prstGeom prst="rect">
               <a:avLst/>
@@ -8072,8 +8073,8 @@
           </p:nvSpPr>
           <p:spPr>
             <a:xfrm>
-              <a:off x="312120" y="5325840"/>
-              <a:ext cx="9597240" cy="1091160"/>
+              <a:off x="228600" y="5259600"/>
+              <a:ext cx="9654480" cy="1118880"/>
             </a:xfrm>
             <a:prstGeom prst="rect">
               <a:avLst/>
@@ -8209,8 +8210,8 @@
           </p:nvSpPr>
           <p:spPr>
             <a:xfrm>
-              <a:off x="8999280" y="5077440"/>
-              <a:ext cx="5307840" cy="562320"/>
+              <a:off x="8967600" y="5005080"/>
+              <a:ext cx="5339520" cy="576360"/>
             </a:xfrm>
             <a:prstGeom prst="rect">
               <a:avLst/>
@@ -8266,8 +8267,8 @@
           </p:nvSpPr>
           <p:spPr>
             <a:xfrm>
-              <a:off x="10526040" y="5803560"/>
-              <a:ext cx="2254680" cy="241920"/>
+              <a:off x="10503360" y="5749560"/>
+              <a:ext cx="2268360" cy="248040"/>
             </a:xfrm>
             <a:prstGeom prst="rect">
               <a:avLst/>
@@ -8323,8 +8324,8 @@
           </p:nvSpPr>
           <p:spPr>
             <a:xfrm>
-              <a:off x="8999280" y="6150240"/>
-              <a:ext cx="5307840" cy="205560"/>
+              <a:off x="8967600" y="6105240"/>
+              <a:ext cx="5339520" cy="210600"/>
             </a:xfrm>
             <a:prstGeom prst="rect">
               <a:avLst/>
@@ -8380,8 +8381,8 @@
           </p:nvSpPr>
           <p:spPr>
             <a:xfrm>
-              <a:off x="8999280" y="6649920"/>
-              <a:ext cx="5307840" cy="562320"/>
+              <a:off x="8967600" y="6617520"/>
+              <a:ext cx="5339520" cy="576360"/>
             </a:xfrm>
             <a:prstGeom prst="rect">
               <a:avLst/>
@@ -8437,8 +8438,8 @@
           </p:nvSpPr>
           <p:spPr>
             <a:xfrm>
-              <a:off x="10537920" y="7375680"/>
-              <a:ext cx="2230560" cy="241920"/>
+              <a:off x="10515600" y="7361640"/>
+              <a:ext cx="2243520" cy="248040"/>
             </a:xfrm>
             <a:prstGeom prst="rect">
               <a:avLst/>
@@ -8494,8 +8495,8 @@
           </p:nvSpPr>
           <p:spPr>
             <a:xfrm>
-              <a:off x="8999280" y="7722360"/>
-              <a:ext cx="5307840" cy="205560"/>
+              <a:off x="8967600" y="7716960"/>
+              <a:ext cx="5339520" cy="210960"/>
             </a:xfrm>
             <a:prstGeom prst="rect">
               <a:avLst/>
@@ -11039,6 +11040,125 @@
           </p:txBody>
         </p:sp>
       </p:grpSp>
+      <p:pic>
+        <p:nvPicPr>
+          <p:cNvPr id="324" name="" descr=""/>
+          <p:cNvPicPr/>
+          <p:nvPr/>
+        </p:nvPicPr>
+        <p:blipFill>
+          <a:blip r:embed="rId2"/>
+          <a:stretch/>
+        </p:blipFill>
+        <p:spPr>
+          <a:xfrm>
+            <a:off x="457200" y="5715000"/>
+            <a:ext cx="1600200" cy="1600200"/>
+          </a:xfrm>
+          <a:prstGeom prst="rect">
+            <a:avLst/>
+          </a:prstGeom>
+          <a:ln w="0">
+            <a:noFill/>
+          </a:ln>
+        </p:spPr>
+      </p:pic>
+    </p:spTree>
+  </p:cSld>
+  <mc:AlternateContent>
+    <mc:Choice Requires="p14">
+      <p:transition spd="slow" p14:dur="2000"/>
+    </mc:Choice>
+    <mc:Fallback>
+      <p:transition spd="slow"/>
+    </mc:Fallback>
+  </mc:AlternateContent>
+</p:sld>
+</file>
+
+<file path=ppt/slides/slide12.xml><?xml version="1.0" encoding="utf-8"?>
+<p:sld xmlns:a="http://schemas.openxmlformats.org/drawingml/2006/main" xmlns:p="http://schemas.openxmlformats.org/presentationml/2006/main" xmlns:r="http://schemas.openxmlformats.org/officeDocument/2006/relationships" xmlns:p14="http://schemas.microsoft.com/office/powerpoint/2010/main" xmlns:p15="http://schemas.microsoft.com/office/powerpoint/2012/main" xmlns:mc="http://schemas.openxmlformats.org/markup-compatibility/2006">
+  <p:cSld>
+    <p:spTree>
+      <p:nvGrpSpPr>
+        <p:cNvPr id="1" name=""/>
+        <p:cNvGrpSpPr/>
+        <p:nvPr/>
+      </p:nvGrpSpPr>
+      <p:grpSpPr>
+        <a:xfrm>
+          <a:off x="0" y="0"/>
+          <a:ext cx="0" cy="0"/>
+          <a:chOff x="0" y="0"/>
+          <a:chExt cx="0" cy="0"/>
+        </a:xfrm>
+      </p:grpSpPr>
+      <p:pic>
+        <p:nvPicPr>
+          <p:cNvPr id="325" name="" descr=""/>
+          <p:cNvPicPr/>
+          <p:nvPr/>
+        </p:nvPicPr>
+        <p:blipFill>
+          <a:blip r:embed="rId1"/>
+          <a:stretch/>
+        </p:blipFill>
+        <p:spPr>
+          <a:xfrm>
+            <a:off x="4050000" y="958680"/>
+            <a:ext cx="5486400" cy="7134840"/>
+          </a:xfrm>
+          <a:prstGeom prst="rect">
+            <a:avLst/>
+          </a:prstGeom>
+          <a:ln w="0">
+            <a:noFill/>
+          </a:ln>
+        </p:spPr>
+      </p:pic>
+      <p:sp>
+        <p:nvSpPr>
+          <p:cNvPr id="326" name=""/>
+          <p:cNvSpPr txBox="1"/>
+          <p:nvPr/>
+        </p:nvSpPr>
+        <p:spPr>
+          <a:xfrm>
+            <a:off x="4998600" y="228600"/>
+            <a:ext cx="3200400" cy="601200"/>
+          </a:xfrm>
+          <a:prstGeom prst="rect">
+            <a:avLst/>
+          </a:prstGeom>
+          <a:noFill/>
+          <a:ln w="0">
+            <a:noFill/>
+          </a:ln>
+        </p:spPr>
+        <p:txBody>
+          <a:bodyPr lIns="90000" rIns="90000" tIns="45000" bIns="45000" anchor="t">
+            <a:noAutofit/>
+          </a:bodyPr>
+          <a:p>
+            <a:r>
+              <a:rPr b="1" lang="en-US" sz="2950" spc="-1" strike="noStrike">
+                <a:solidFill>
+                  <a:srgbClr val="ffffff"/>
+                </a:solidFill>
+                <a:latin typeface="Montserrat Bold"/>
+                <a:ea typeface="Montserrat Bold"/>
+              </a:rPr>
+              <a:t>Test Tapşirigı L5</a:t>
+            </a:r>
+            <a:endParaRPr b="0" lang="en-US" sz="2950" spc="-1" strike="noStrike">
+              <a:solidFill>
+                <a:srgbClr val="000000"/>
+              </a:solidFill>
+              <a:latin typeface="Arial"/>
+            </a:endParaRPr>
+          </a:p>
+        </p:txBody>
+      </p:sp>
     </p:spTree>
   </p:cSld>
   <mc:AlternateContent>
@@ -14752,7 +14872,7 @@
         <p:spPr>
           <a:xfrm>
             <a:off x="1506240" y="1687680"/>
-            <a:ext cx="11725560" cy="3234600"/>
+            <a:ext cx="11981160" cy="3234600"/>
           </a:xfrm>
           <a:prstGeom prst="rect">
             <a:avLst/>
@@ -14998,7 +15118,7 @@
         </p:nvSpPr>
         <p:spPr>
           <a:xfrm>
-            <a:off x="6472800" y="2781360"/>
+            <a:off x="6580800" y="2781360"/>
             <a:ext cx="1772280" cy="300240"/>
           </a:xfrm>
           <a:prstGeom prst="rect">
@@ -15055,7 +15175,7 @@
         </p:nvSpPr>
         <p:spPr>
           <a:xfrm>
-            <a:off x="6472800" y="3176280"/>
+            <a:off x="6580800" y="3176280"/>
             <a:ext cx="1772280" cy="474480"/>
           </a:xfrm>
           <a:prstGeom prst="rect">
@@ -15112,7 +15232,7 @@
         </p:nvSpPr>
         <p:spPr>
           <a:xfrm>
-            <a:off x="8503920" y="2720880"/>
+            <a:off x="8611920" y="2720880"/>
             <a:ext cx="1772280" cy="300240"/>
           </a:xfrm>
           <a:prstGeom prst="rect">
@@ -15169,7 +15289,7 @@
         </p:nvSpPr>
         <p:spPr>
           <a:xfrm>
-            <a:off x="8503920" y="3115800"/>
+            <a:off x="8647920" y="3115800"/>
             <a:ext cx="1772280" cy="712080"/>
           </a:xfrm>
           <a:prstGeom prst="rect">
@@ -15226,8 +15346,8 @@
         </p:nvSpPr>
         <p:spPr>
           <a:xfrm>
-            <a:off x="10546200" y="2781360"/>
-            <a:ext cx="1772280" cy="601200"/>
+            <a:off x="10744200" y="2889360"/>
+            <a:ext cx="1828800" cy="298440"/>
           </a:xfrm>
           <a:prstGeom prst="rect">
             <a:avLst/>
@@ -15248,25 +15368,25 @@
             <a:noAutofit/>
           </a:bodyPr>
           <a:p>
-            <a:pPr algn="ctr" defTabSz="914400">
+            <a:pPr defTabSz="914400">
               <a:lnSpc>
-                <a:spcPts val="1950"/>
+                <a:spcPts val="1899"/>
               </a:lnSpc>
               <a:tabLst>
                 <a:tab algn="l" pos="0"/>
               </a:tabLst>
             </a:pPr>
             <a:r>
-              <a:rPr b="1" lang="en-US" sz="1550" spc="-1" strike="noStrike">
-                <a:solidFill>
-                  <a:srgbClr val="ffffff"/>
+              <a:rPr b="1" lang="en-US" sz="1300" spc="-1" strike="noStrike">
+                <a:solidFill>
+                  <a:srgbClr val="e2e6e9"/>
                 </a:solidFill>
                 <a:latin typeface="Montserrat Bold"/>
                 <a:ea typeface="Montserrat Bold"/>
               </a:rPr>
-              <a:t>Böyükləşdirmə</a:t>
+              <a:t>Kommersiyalaşdırma</a:t>
             </a:r>
-            <a:endParaRPr b="0" lang="en-US" sz="1550" spc="-1" strike="noStrike">
+            <a:endParaRPr b="0" lang="en-US" sz="1300" spc="-1" strike="noStrike">
               <a:solidFill>
                 <a:srgbClr val="000000"/>
               </a:solidFill>
@@ -15283,7 +15403,7 @@
         </p:nvSpPr>
         <p:spPr>
           <a:xfrm>
-            <a:off x="10546200" y="3476880"/>
+            <a:off x="10762200" y="3404880"/>
             <a:ext cx="1772280" cy="474480"/>
           </a:xfrm>
           <a:prstGeom prst="rect">

--- a/Seperated/Presentations/L5-Suni-Intellekt-ve-Innovasiya-Menecmenti.pptx
+++ b/Seperated/Presentations/L5-Suni-Intellekt-ve-Innovasiya-Menecmenti.pptx
@@ -82,20 +82,21 @@
             <a:noAutofit/>
           </a:bodyPr>
           <a:p>
+            <a:pPr algn="ctr"/>
             <a:r>
-              <a:rPr b="0" lang="en-US" sz="1800" spc="-1" strike="noStrike">
-                <a:solidFill>
-                  <a:schemeClr val="dk1"/>
-                </a:solidFill>
-                <a:latin typeface="Calibri"/>
+              <a:rPr b="0" lang="en-US" sz="4400" spc="-1" strike="noStrike">
+                <a:solidFill>
+                  <a:srgbClr val="000000"/>
+                </a:solidFill>
+                <a:latin typeface="Arial"/>
               </a:rPr>
               <a:t>Click to move the slide</a:t>
             </a:r>
-            <a:endParaRPr b="0" lang="en-US" sz="1800" spc="-1" strike="noStrike">
+            <a:endParaRPr b="0" lang="en-US" sz="4400" spc="-1" strike="noStrike">
               <a:solidFill>
-                <a:schemeClr val="dk1"/>
+                <a:srgbClr val="000000"/>
               </a:solidFill>
-              <a:latin typeface="Calibri"/>
+              <a:latin typeface="Arial"/>
             </a:endParaRPr>
           </a:p>
         </p:txBody>
@@ -360,7 +361,7 @@
             <a:pPr indent="0" algn="r">
               <a:buNone/>
             </a:pPr>
-            <a:fld id="{9A8C9DCC-F79B-42EC-9260-DE3888AD5B32}" type="slidenum">
+            <a:fld id="{ADDCF383-B7A3-49A4-B3E3-D7A2D5902AF8}" type="slidenum">
               <a:rPr b="0" lang="en-US" sz="1400" spc="-1" strike="noStrike">
                 <a:solidFill>
                   <a:srgbClr val="000000"/>
@@ -492,11 +493,14 @@
             <a:noAutofit/>
           </a:bodyPr>
           <a:lstStyle>
-            <a:lvl1pPr indent="0" defTabSz="914400">
+            <a:lvl1pPr indent="0" algn="r" defTabSz="914400">
               <a:lnSpc>
                 <a:spcPct val="100000"/>
               </a:lnSpc>
               <a:buNone/>
+              <a:tabLst>
+                <a:tab algn="l" pos="0"/>
+              </a:tabLst>
               <a:defRPr b="0" lang="en-US" sz="1800" spc="-1" strike="noStrike">
                 <a:solidFill>
                   <a:schemeClr val="dk1"/>
@@ -507,13 +511,16 @@
             </a:lvl1pPr>
           </a:lstStyle>
           <a:p>
-            <a:pPr indent="0" defTabSz="914400">
+            <a:pPr indent="0" algn="r" defTabSz="914400">
               <a:lnSpc>
                 <a:spcPct val="100000"/>
               </a:lnSpc>
               <a:buNone/>
+              <a:tabLst>
+                <a:tab algn="l" pos="0"/>
+              </a:tabLst>
             </a:pPr>
-            <a:fld id="{E301C00A-08C0-43B4-B05B-6C986E9C691D}" type="slidenum">
+            <a:fld id="{B9B543E4-850A-42EA-AF14-4955362CF31E}" type="slidenum">
               <a:rPr b="0" lang="en-US" sz="1800" spc="-1" strike="noStrike">
                 <a:solidFill>
                   <a:schemeClr val="dk1"/>
@@ -645,11 +652,14 @@
             <a:noAutofit/>
           </a:bodyPr>
           <a:lstStyle>
-            <a:lvl1pPr indent="0" defTabSz="914400">
+            <a:lvl1pPr indent="0" algn="r" defTabSz="914400">
               <a:lnSpc>
                 <a:spcPct val="100000"/>
               </a:lnSpc>
               <a:buNone/>
+              <a:tabLst>
+                <a:tab algn="l" pos="0"/>
+              </a:tabLst>
               <a:defRPr b="0" lang="en-US" sz="1800" spc="-1" strike="noStrike">
                 <a:solidFill>
                   <a:schemeClr val="dk1"/>
@@ -660,13 +670,16 @@
             </a:lvl1pPr>
           </a:lstStyle>
           <a:p>
-            <a:pPr indent="0" defTabSz="914400">
+            <a:pPr indent="0" algn="r" defTabSz="914400">
               <a:lnSpc>
                 <a:spcPct val="100000"/>
               </a:lnSpc>
               <a:buNone/>
+              <a:tabLst>
+                <a:tab algn="l" pos="0"/>
+              </a:tabLst>
             </a:pPr>
-            <a:fld id="{EACBA740-3A77-42FF-804F-0FD1110E8B97}" type="slidenum">
+            <a:fld id="{3DC85132-E60C-4A0B-9FBF-F255B7AB93D3}" type="slidenum">
               <a:rPr b="0" lang="en-US" sz="1800" spc="-1" strike="noStrike">
                 <a:solidFill>
                   <a:schemeClr val="dk1"/>
@@ -798,11 +811,14 @@
             <a:noAutofit/>
           </a:bodyPr>
           <a:lstStyle>
-            <a:lvl1pPr indent="0" defTabSz="914400">
+            <a:lvl1pPr indent="0" algn="r" defTabSz="914400">
               <a:lnSpc>
                 <a:spcPct val="100000"/>
               </a:lnSpc>
               <a:buNone/>
+              <a:tabLst>
+                <a:tab algn="l" pos="0"/>
+              </a:tabLst>
               <a:defRPr b="0" lang="en-US" sz="1800" spc="-1" strike="noStrike">
                 <a:solidFill>
                   <a:schemeClr val="dk1"/>
@@ -813,13 +829,16 @@
             </a:lvl1pPr>
           </a:lstStyle>
           <a:p>
-            <a:pPr indent="0" defTabSz="914400">
+            <a:pPr indent="0" algn="r" defTabSz="914400">
               <a:lnSpc>
                 <a:spcPct val="100000"/>
               </a:lnSpc>
               <a:buNone/>
+              <a:tabLst>
+                <a:tab algn="l" pos="0"/>
+              </a:tabLst>
             </a:pPr>
-            <a:fld id="{4D043E1F-1B83-4470-95B1-F88126AE6C22}" type="slidenum">
+            <a:fld id="{52474238-7742-4F32-82B8-6B59A75EA0A3}" type="slidenum">
               <a:rPr b="0" lang="en-US" sz="1800" spc="-1" strike="noStrike">
                 <a:solidFill>
                   <a:schemeClr val="dk1"/>
@@ -951,11 +970,14 @@
             <a:noAutofit/>
           </a:bodyPr>
           <a:lstStyle>
-            <a:lvl1pPr indent="0" defTabSz="914400">
+            <a:lvl1pPr indent="0" algn="r" defTabSz="914400">
               <a:lnSpc>
                 <a:spcPct val="100000"/>
               </a:lnSpc>
               <a:buNone/>
+              <a:tabLst>
+                <a:tab algn="l" pos="0"/>
+              </a:tabLst>
               <a:defRPr b="0" lang="en-US" sz="1800" spc="-1" strike="noStrike">
                 <a:solidFill>
                   <a:schemeClr val="dk1"/>
@@ -966,13 +988,16 @@
             </a:lvl1pPr>
           </a:lstStyle>
           <a:p>
-            <a:pPr indent="0" defTabSz="914400">
+            <a:pPr indent="0" algn="r" defTabSz="914400">
               <a:lnSpc>
                 <a:spcPct val="100000"/>
               </a:lnSpc>
               <a:buNone/>
+              <a:tabLst>
+                <a:tab algn="l" pos="0"/>
+              </a:tabLst>
             </a:pPr>
-            <a:fld id="{F5CFB85C-3E19-4D4D-8813-5DA3981428D5}" type="slidenum">
+            <a:fld id="{A00EF454-7C78-46B8-8D5C-4948352E7B7D}" type="slidenum">
               <a:rPr b="0" lang="en-US" sz="1800" spc="-1" strike="noStrike">
                 <a:solidFill>
                   <a:schemeClr val="dk1"/>
@@ -1104,11 +1129,14 @@
             <a:noAutofit/>
           </a:bodyPr>
           <a:lstStyle>
-            <a:lvl1pPr indent="0" defTabSz="914400">
+            <a:lvl1pPr indent="0" algn="r" defTabSz="914400">
               <a:lnSpc>
                 <a:spcPct val="100000"/>
               </a:lnSpc>
               <a:buNone/>
+              <a:tabLst>
+                <a:tab algn="l" pos="0"/>
+              </a:tabLst>
               <a:defRPr b="0" lang="en-US" sz="1800" spc="-1" strike="noStrike">
                 <a:solidFill>
                   <a:schemeClr val="dk1"/>
@@ -1119,13 +1147,16 @@
             </a:lvl1pPr>
           </a:lstStyle>
           <a:p>
-            <a:pPr indent="0" defTabSz="914400">
+            <a:pPr indent="0" algn="r" defTabSz="914400">
               <a:lnSpc>
                 <a:spcPct val="100000"/>
               </a:lnSpc>
               <a:buNone/>
+              <a:tabLst>
+                <a:tab algn="l" pos="0"/>
+              </a:tabLst>
             </a:pPr>
-            <a:fld id="{635548E3-C142-4364-A689-532BD31EBB35}" type="slidenum">
+            <a:fld id="{316BF401-4582-4E16-8652-136E12067050}" type="slidenum">
               <a:rPr b="0" lang="en-US" sz="1800" spc="-1" strike="noStrike">
                 <a:solidFill>
                   <a:schemeClr val="dk1"/>
@@ -1257,11 +1288,14 @@
             <a:noAutofit/>
           </a:bodyPr>
           <a:lstStyle>
-            <a:lvl1pPr indent="0" defTabSz="914400">
+            <a:lvl1pPr indent="0" algn="r" defTabSz="914400">
               <a:lnSpc>
                 <a:spcPct val="100000"/>
               </a:lnSpc>
               <a:buNone/>
+              <a:tabLst>
+                <a:tab algn="l" pos="0"/>
+              </a:tabLst>
               <a:defRPr b="0" lang="en-US" sz="1800" spc="-1" strike="noStrike">
                 <a:solidFill>
                   <a:schemeClr val="dk1"/>
@@ -1272,13 +1306,16 @@
             </a:lvl1pPr>
           </a:lstStyle>
           <a:p>
-            <a:pPr indent="0" defTabSz="914400">
+            <a:pPr indent="0" algn="r" defTabSz="914400">
               <a:lnSpc>
                 <a:spcPct val="100000"/>
               </a:lnSpc>
               <a:buNone/>
+              <a:tabLst>
+                <a:tab algn="l" pos="0"/>
+              </a:tabLst>
             </a:pPr>
-            <a:fld id="{A24D5A8C-6024-4A4D-BF96-BFA4A3D2E05E}" type="slidenum">
+            <a:fld id="{EA1D8027-7C51-431C-BA25-51673137DAA6}" type="slidenum">
               <a:rPr b="0" lang="en-US" sz="1800" spc="-1" strike="noStrike">
                 <a:solidFill>
                   <a:schemeClr val="dk1"/>
@@ -1410,11 +1447,14 @@
             <a:noAutofit/>
           </a:bodyPr>
           <a:lstStyle>
-            <a:lvl1pPr indent="0" defTabSz="914400">
+            <a:lvl1pPr indent="0" algn="r" defTabSz="914400">
               <a:lnSpc>
                 <a:spcPct val="100000"/>
               </a:lnSpc>
               <a:buNone/>
+              <a:tabLst>
+                <a:tab algn="l" pos="0"/>
+              </a:tabLst>
               <a:defRPr b="0" lang="en-US" sz="1800" spc="-1" strike="noStrike">
                 <a:solidFill>
                   <a:schemeClr val="dk1"/>
@@ -1425,13 +1465,16 @@
             </a:lvl1pPr>
           </a:lstStyle>
           <a:p>
-            <a:pPr indent="0" defTabSz="914400">
+            <a:pPr indent="0" algn="r" defTabSz="914400">
               <a:lnSpc>
                 <a:spcPct val="100000"/>
               </a:lnSpc>
               <a:buNone/>
+              <a:tabLst>
+                <a:tab algn="l" pos="0"/>
+              </a:tabLst>
             </a:pPr>
-            <a:fld id="{846271A1-66C9-4797-A0C1-E3910B9DA729}" type="slidenum">
+            <a:fld id="{CE87EA02-B292-46BA-B9BC-A37327201984}" type="slidenum">
               <a:rPr b="0" lang="en-US" sz="1800" spc="-1" strike="noStrike">
                 <a:solidFill>
                   <a:schemeClr val="dk1"/>
@@ -1563,11 +1606,14 @@
             <a:noAutofit/>
           </a:bodyPr>
           <a:lstStyle>
-            <a:lvl1pPr indent="0" defTabSz="914400">
+            <a:lvl1pPr indent="0" algn="r" defTabSz="914400">
               <a:lnSpc>
                 <a:spcPct val="100000"/>
               </a:lnSpc>
               <a:buNone/>
+              <a:tabLst>
+                <a:tab algn="l" pos="0"/>
+              </a:tabLst>
               <a:defRPr b="0" lang="en-US" sz="1800" spc="-1" strike="noStrike">
                 <a:solidFill>
                   <a:schemeClr val="dk1"/>
@@ -1578,13 +1624,16 @@
             </a:lvl1pPr>
           </a:lstStyle>
           <a:p>
-            <a:pPr indent="0" defTabSz="914400">
+            <a:pPr indent="0" algn="r" defTabSz="914400">
               <a:lnSpc>
                 <a:spcPct val="100000"/>
               </a:lnSpc>
               <a:buNone/>
+              <a:tabLst>
+                <a:tab algn="l" pos="0"/>
+              </a:tabLst>
             </a:pPr>
-            <a:fld id="{74CF315A-DB98-4F59-8434-12E9BF84BAFA}" type="slidenum">
+            <a:fld id="{89020441-8F43-4FB9-AE00-7388029FED1F}" type="slidenum">
               <a:rPr b="0" lang="en-US" sz="1800" spc="-1" strike="noStrike">
                 <a:solidFill>
                   <a:schemeClr val="dk1"/>
@@ -1716,11 +1765,14 @@
             <a:noAutofit/>
           </a:bodyPr>
           <a:lstStyle>
-            <a:lvl1pPr indent="0" defTabSz="914400">
+            <a:lvl1pPr indent="0" algn="r" defTabSz="914400">
               <a:lnSpc>
                 <a:spcPct val="100000"/>
               </a:lnSpc>
               <a:buNone/>
+              <a:tabLst>
+                <a:tab algn="l" pos="0"/>
+              </a:tabLst>
               <a:defRPr b="0" lang="en-US" sz="1800" spc="-1" strike="noStrike">
                 <a:solidFill>
                   <a:schemeClr val="dk1"/>
@@ -1731,13 +1783,16 @@
             </a:lvl1pPr>
           </a:lstStyle>
           <a:p>
-            <a:pPr indent="0" defTabSz="914400">
+            <a:pPr indent="0" algn="r" defTabSz="914400">
               <a:lnSpc>
                 <a:spcPct val="100000"/>
               </a:lnSpc>
               <a:buNone/>
+              <a:tabLst>
+                <a:tab algn="l" pos="0"/>
+              </a:tabLst>
             </a:pPr>
-            <a:fld id="{23294747-809B-4AAD-BF70-A35568AB33DB}" type="slidenum">
+            <a:fld id="{CC70CBBD-7871-4D17-BE81-3AA59FDF1571}" type="slidenum">
               <a:rPr b="0" lang="en-US" sz="1800" spc="-1" strike="noStrike">
                 <a:solidFill>
                   <a:schemeClr val="dk1"/>
@@ -1869,11 +1924,14 @@
             <a:noAutofit/>
           </a:bodyPr>
           <a:lstStyle>
-            <a:lvl1pPr indent="0" defTabSz="914400">
+            <a:lvl1pPr indent="0" algn="r" defTabSz="914400">
               <a:lnSpc>
                 <a:spcPct val="100000"/>
               </a:lnSpc>
               <a:buNone/>
+              <a:tabLst>
+                <a:tab algn="l" pos="0"/>
+              </a:tabLst>
               <a:defRPr b="0" lang="en-US" sz="1800" spc="-1" strike="noStrike">
                 <a:solidFill>
                   <a:schemeClr val="dk1"/>
@@ -1884,13 +1942,16 @@
             </a:lvl1pPr>
           </a:lstStyle>
           <a:p>
-            <a:pPr indent="0" defTabSz="914400">
+            <a:pPr indent="0" algn="r" defTabSz="914400">
               <a:lnSpc>
                 <a:spcPct val="100000"/>
               </a:lnSpc>
               <a:buNone/>
+              <a:tabLst>
+                <a:tab algn="l" pos="0"/>
+              </a:tabLst>
             </a:pPr>
-            <a:fld id="{59B71031-3563-42B6-BC7C-8EAFC9B69D68}" type="slidenum">
+            <a:fld id="{47525CF6-2A36-4871-B126-BAF725EC7CAD}" type="slidenum">
               <a:rPr b="0" lang="en-US" sz="1800" spc="-1" strike="noStrike">
                 <a:solidFill>
                   <a:schemeClr val="dk1"/>
@@ -2022,11 +2083,14 @@
             <a:noAutofit/>
           </a:bodyPr>
           <a:lstStyle>
-            <a:lvl1pPr indent="0" defTabSz="914400">
+            <a:lvl1pPr indent="0" algn="r" defTabSz="914400">
               <a:lnSpc>
                 <a:spcPct val="100000"/>
               </a:lnSpc>
               <a:buNone/>
+              <a:tabLst>
+                <a:tab algn="l" pos="0"/>
+              </a:tabLst>
               <a:defRPr b="0" lang="en-US" sz="1800" spc="-1" strike="noStrike">
                 <a:solidFill>
                   <a:schemeClr val="dk1"/>
@@ -2037,13 +2101,16 @@
             </a:lvl1pPr>
           </a:lstStyle>
           <a:p>
-            <a:pPr indent="0" defTabSz="914400">
+            <a:pPr indent="0" algn="r" defTabSz="914400">
               <a:lnSpc>
                 <a:spcPct val="100000"/>
               </a:lnSpc>
               <a:buNone/>
+              <a:tabLst>
+                <a:tab algn="l" pos="0"/>
+              </a:tabLst>
             </a:pPr>
-            <a:fld id="{C8BAA3D4-330F-4D3E-83FD-05A9B9AD1354}" type="slidenum">
+            <a:fld id="{58D749C5-B8C6-47C3-821D-7857710BF36D}" type="slidenum">
               <a:rPr b="0" lang="en-US" sz="1800" spc="-1" strike="noStrike">
                 <a:solidFill>
                   <a:schemeClr val="dk1"/>
@@ -2397,7 +2464,7 @@
         <p:spPr>
           <a:xfrm>
             <a:off x="0" y="0"/>
-            <a:ext cx="14630040" cy="8229240"/>
+            <a:ext cx="14629680" cy="8228880"/>
           </a:xfrm>
           <a:prstGeom prst="rect">
             <a:avLst/>
@@ -2443,7 +2510,7 @@
         <p:spPr>
           <a:xfrm>
             <a:off x="0" y="0"/>
-            <a:ext cx="14630040" cy="8229240"/>
+            <a:ext cx="14629680" cy="8228880"/>
           </a:xfrm>
           <a:prstGeom prst="rect">
             <a:avLst/>
@@ -2508,23 +2575,23 @@
             <a:noAutofit/>
           </a:bodyPr>
           <a:p>
-            <a:pPr indent="0">
+            <a:pPr indent="0" algn="ctr">
               <a:buNone/>
             </a:pPr>
             <a:r>
-              <a:rPr b="0" lang="en-US" sz="1800" spc="-1" strike="noStrike">
-                <a:solidFill>
-                  <a:schemeClr val="dk1"/>
-                </a:solidFill>
-                <a:latin typeface="Calibri"/>
+              <a:rPr b="0" lang="en-US" sz="4400" spc="-1" strike="noStrike">
+                <a:solidFill>
+                  <a:srgbClr val="000000"/>
+                </a:solidFill>
+                <a:latin typeface="Arial"/>
               </a:rPr>
               <a:t>Click to edit the title text format</a:t>
             </a:r>
-            <a:endParaRPr b="0" lang="en-US" sz="1800" spc="-1" strike="noStrike">
+            <a:endParaRPr b="0" lang="en-US" sz="4400" spc="-1" strike="noStrike">
               <a:solidFill>
-                <a:schemeClr val="dk1"/>
+                <a:srgbClr val="000000"/>
               </a:solidFill>
-              <a:latin typeface="Calibri"/>
+              <a:latin typeface="Arial"/>
             </a:endParaRPr>
           </a:p>
         </p:txBody>
@@ -2571,17 +2638,17 @@
             <a:r>
               <a:rPr b="0" lang="en-US" sz="3200" spc="-1" strike="noStrike">
                 <a:solidFill>
-                  <a:schemeClr val="dk1"/>
-                </a:solidFill>
-                <a:latin typeface="Calibri"/>
+                  <a:srgbClr val="000000"/>
+                </a:solidFill>
+                <a:latin typeface="Arial"/>
               </a:rPr>
               <a:t>Click to edit the outline text format</a:t>
             </a:r>
             <a:endParaRPr b="0" lang="en-US" sz="3200" spc="-1" strike="noStrike">
               <a:solidFill>
-                <a:schemeClr val="dk1"/>
+                <a:srgbClr val="000000"/>
               </a:solidFill>
-              <a:latin typeface="Calibri"/>
+              <a:latin typeface="Arial"/>
             </a:endParaRPr>
           </a:p>
           <a:p>
@@ -2597,19 +2664,19 @@
               <a:buChar char=""/>
             </a:pPr>
             <a:r>
-              <a:rPr b="0" lang="en-US" sz="2400" spc="-1" strike="noStrike">
-                <a:solidFill>
-                  <a:schemeClr val="dk1"/>
-                </a:solidFill>
-                <a:latin typeface="Calibri"/>
+              <a:rPr b="0" lang="en-US" sz="2800" spc="-1" strike="noStrike">
+                <a:solidFill>
+                  <a:srgbClr val="000000"/>
+                </a:solidFill>
+                <a:latin typeface="Arial"/>
               </a:rPr>
               <a:t>Second Outline Level</a:t>
             </a:r>
-            <a:endParaRPr b="0" lang="en-US" sz="2400" spc="-1" strike="noStrike">
+            <a:endParaRPr b="0" lang="en-US" sz="2800" spc="-1" strike="noStrike">
               <a:solidFill>
-                <a:schemeClr val="dk1"/>
+                <a:srgbClr val="000000"/>
               </a:solidFill>
-              <a:latin typeface="Calibri"/>
+              <a:latin typeface="Arial"/>
             </a:endParaRPr>
           </a:p>
           <a:p>
@@ -2625,19 +2692,19 @@
               <a:buChar char=""/>
             </a:pPr>
             <a:r>
-              <a:rPr b="0" lang="en-US" sz="2000" spc="-1" strike="noStrike">
-                <a:solidFill>
-                  <a:schemeClr val="dk1"/>
-                </a:solidFill>
-                <a:latin typeface="Calibri"/>
+              <a:rPr b="0" lang="en-US" sz="2400" spc="-1" strike="noStrike">
+                <a:solidFill>
+                  <a:srgbClr val="000000"/>
+                </a:solidFill>
+                <a:latin typeface="Arial"/>
               </a:rPr>
               <a:t>Third Outline Level</a:t>
             </a:r>
-            <a:endParaRPr b="0" lang="en-US" sz="2000" spc="-1" strike="noStrike">
+            <a:endParaRPr b="0" lang="en-US" sz="2400" spc="-1" strike="noStrike">
               <a:solidFill>
-                <a:schemeClr val="dk1"/>
+                <a:srgbClr val="000000"/>
               </a:solidFill>
-              <a:latin typeface="Calibri"/>
+              <a:latin typeface="Arial"/>
             </a:endParaRPr>
           </a:p>
           <a:p>
@@ -2655,17 +2722,17 @@
             <a:r>
               <a:rPr b="0" lang="en-US" sz="2000" spc="-1" strike="noStrike">
                 <a:solidFill>
-                  <a:schemeClr val="dk1"/>
-                </a:solidFill>
-                <a:latin typeface="Calibri"/>
+                  <a:srgbClr val="000000"/>
+                </a:solidFill>
+                <a:latin typeface="Arial"/>
               </a:rPr>
               <a:t>Fourth Outline Level</a:t>
             </a:r>
             <a:endParaRPr b="0" lang="en-US" sz="2000" spc="-1" strike="noStrike">
               <a:solidFill>
-                <a:schemeClr val="dk1"/>
+                <a:srgbClr val="000000"/>
               </a:solidFill>
-              <a:latin typeface="Calibri"/>
+              <a:latin typeface="Arial"/>
             </a:endParaRPr>
           </a:p>
           <a:p>
@@ -2683,17 +2750,17 @@
             <a:r>
               <a:rPr b="0" lang="en-US" sz="2000" spc="-1" strike="noStrike">
                 <a:solidFill>
-                  <a:schemeClr val="dk1"/>
-                </a:solidFill>
-                <a:latin typeface="Calibri"/>
+                  <a:srgbClr val="000000"/>
+                </a:solidFill>
+                <a:latin typeface="Arial"/>
               </a:rPr>
               <a:t>Fifth Outline Level</a:t>
             </a:r>
             <a:endParaRPr b="0" lang="en-US" sz="2000" spc="-1" strike="noStrike">
               <a:solidFill>
-                <a:schemeClr val="dk1"/>
+                <a:srgbClr val="000000"/>
               </a:solidFill>
-              <a:latin typeface="Calibri"/>
+              <a:latin typeface="Arial"/>
             </a:endParaRPr>
           </a:p>
           <a:p>
@@ -2711,17 +2778,17 @@
             <a:r>
               <a:rPr b="0" lang="en-US" sz="2000" spc="-1" strike="noStrike">
                 <a:solidFill>
-                  <a:schemeClr val="dk1"/>
-                </a:solidFill>
-                <a:latin typeface="Calibri"/>
+                  <a:srgbClr val="000000"/>
+                </a:solidFill>
+                <a:latin typeface="Arial"/>
               </a:rPr>
               <a:t>Sixth Outline Level</a:t>
             </a:r>
             <a:endParaRPr b="0" lang="en-US" sz="2000" spc="-1" strike="noStrike">
               <a:solidFill>
-                <a:schemeClr val="dk1"/>
+                <a:srgbClr val="000000"/>
               </a:solidFill>
-              <a:latin typeface="Calibri"/>
+              <a:latin typeface="Arial"/>
             </a:endParaRPr>
           </a:p>
           <a:p>
@@ -2739,17 +2806,17 @@
             <a:r>
               <a:rPr b="0" lang="en-US" sz="2000" spc="-1" strike="noStrike">
                 <a:solidFill>
-                  <a:schemeClr val="dk1"/>
-                </a:solidFill>
-                <a:latin typeface="Calibri"/>
+                  <a:srgbClr val="000000"/>
+                </a:solidFill>
+                <a:latin typeface="Arial"/>
               </a:rPr>
               <a:t>Seventh Outline Level</a:t>
             </a:r>
             <a:endParaRPr b="0" lang="en-US" sz="2000" spc="-1" strike="noStrike">
               <a:solidFill>
-                <a:schemeClr val="dk1"/>
+                <a:srgbClr val="000000"/>
               </a:solidFill>
-              <a:latin typeface="Calibri"/>
+              <a:latin typeface="Arial"/>
             </a:endParaRPr>
           </a:p>
         </p:txBody>
@@ -2796,7 +2863,7 @@
         <p:spPr>
           <a:xfrm>
             <a:off x="0" y="0"/>
-            <a:ext cx="14630040" cy="8229240"/>
+            <a:ext cx="14629680" cy="8228880"/>
           </a:xfrm>
           <a:prstGeom prst="rect">
             <a:avLst/>
@@ -2842,7 +2909,7 @@
         <p:spPr>
           <a:xfrm>
             <a:off x="0" y="0"/>
-            <a:ext cx="14630040" cy="8229240"/>
+            <a:ext cx="14629680" cy="8228880"/>
           </a:xfrm>
           <a:prstGeom prst="rect">
             <a:avLst/>
@@ -2907,23 +2974,23 @@
             <a:noAutofit/>
           </a:bodyPr>
           <a:p>
-            <a:pPr indent="0">
+            <a:pPr indent="0" algn="ctr">
               <a:buNone/>
             </a:pPr>
             <a:r>
-              <a:rPr b="0" lang="en-US" sz="1800" spc="-1" strike="noStrike">
-                <a:solidFill>
-                  <a:schemeClr val="dk1"/>
-                </a:solidFill>
-                <a:latin typeface="Calibri"/>
+              <a:rPr b="0" lang="en-US" sz="4400" spc="-1" strike="noStrike">
+                <a:solidFill>
+                  <a:srgbClr val="000000"/>
+                </a:solidFill>
+                <a:latin typeface="Arial"/>
               </a:rPr>
               <a:t>Click to edit the title text format</a:t>
             </a:r>
-            <a:endParaRPr b="0" lang="en-US" sz="1800" spc="-1" strike="noStrike">
+            <a:endParaRPr b="0" lang="en-US" sz="4400" spc="-1" strike="noStrike">
               <a:solidFill>
-                <a:schemeClr val="dk1"/>
+                <a:srgbClr val="000000"/>
               </a:solidFill>
-              <a:latin typeface="Calibri"/>
+              <a:latin typeface="Arial"/>
             </a:endParaRPr>
           </a:p>
         </p:txBody>
@@ -2970,17 +3037,17 @@
             <a:r>
               <a:rPr b="0" lang="en-US" sz="3200" spc="-1" strike="noStrike">
                 <a:solidFill>
-                  <a:schemeClr val="dk1"/>
-                </a:solidFill>
-                <a:latin typeface="Calibri"/>
+                  <a:srgbClr val="000000"/>
+                </a:solidFill>
+                <a:latin typeface="Arial"/>
               </a:rPr>
               <a:t>Click to edit the outline text format</a:t>
             </a:r>
             <a:endParaRPr b="0" lang="en-US" sz="3200" spc="-1" strike="noStrike">
               <a:solidFill>
-                <a:schemeClr val="dk1"/>
+                <a:srgbClr val="000000"/>
               </a:solidFill>
-              <a:latin typeface="Calibri"/>
+              <a:latin typeface="Arial"/>
             </a:endParaRPr>
           </a:p>
           <a:p>
@@ -2996,19 +3063,19 @@
               <a:buChar char=""/>
             </a:pPr>
             <a:r>
-              <a:rPr b="0" lang="en-US" sz="2400" spc="-1" strike="noStrike">
-                <a:solidFill>
-                  <a:schemeClr val="dk1"/>
-                </a:solidFill>
-                <a:latin typeface="Calibri"/>
+              <a:rPr b="0" lang="en-US" sz="2800" spc="-1" strike="noStrike">
+                <a:solidFill>
+                  <a:srgbClr val="000000"/>
+                </a:solidFill>
+                <a:latin typeface="Arial"/>
               </a:rPr>
               <a:t>Second Outline Level</a:t>
             </a:r>
-            <a:endParaRPr b="0" lang="en-US" sz="2400" spc="-1" strike="noStrike">
+            <a:endParaRPr b="0" lang="en-US" sz="2800" spc="-1" strike="noStrike">
               <a:solidFill>
-                <a:schemeClr val="dk1"/>
+                <a:srgbClr val="000000"/>
               </a:solidFill>
-              <a:latin typeface="Calibri"/>
+              <a:latin typeface="Arial"/>
             </a:endParaRPr>
           </a:p>
           <a:p>
@@ -3024,19 +3091,19 @@
               <a:buChar char=""/>
             </a:pPr>
             <a:r>
-              <a:rPr b="0" lang="en-US" sz="2000" spc="-1" strike="noStrike">
-                <a:solidFill>
-                  <a:schemeClr val="dk1"/>
-                </a:solidFill>
-                <a:latin typeface="Calibri"/>
+              <a:rPr b="0" lang="en-US" sz="2400" spc="-1" strike="noStrike">
+                <a:solidFill>
+                  <a:srgbClr val="000000"/>
+                </a:solidFill>
+                <a:latin typeface="Arial"/>
               </a:rPr>
               <a:t>Third Outline Level</a:t>
             </a:r>
-            <a:endParaRPr b="0" lang="en-US" sz="2000" spc="-1" strike="noStrike">
+            <a:endParaRPr b="0" lang="en-US" sz="2400" spc="-1" strike="noStrike">
               <a:solidFill>
-                <a:schemeClr val="dk1"/>
+                <a:srgbClr val="000000"/>
               </a:solidFill>
-              <a:latin typeface="Calibri"/>
+              <a:latin typeface="Arial"/>
             </a:endParaRPr>
           </a:p>
           <a:p>
@@ -3054,17 +3121,17 @@
             <a:r>
               <a:rPr b="0" lang="en-US" sz="2000" spc="-1" strike="noStrike">
                 <a:solidFill>
-                  <a:schemeClr val="dk1"/>
-                </a:solidFill>
-                <a:latin typeface="Calibri"/>
+                  <a:srgbClr val="000000"/>
+                </a:solidFill>
+                <a:latin typeface="Arial"/>
               </a:rPr>
               <a:t>Fourth Outline Level</a:t>
             </a:r>
             <a:endParaRPr b="0" lang="en-US" sz="2000" spc="-1" strike="noStrike">
               <a:solidFill>
-                <a:schemeClr val="dk1"/>
+                <a:srgbClr val="000000"/>
               </a:solidFill>
-              <a:latin typeface="Calibri"/>
+              <a:latin typeface="Arial"/>
             </a:endParaRPr>
           </a:p>
           <a:p>
@@ -3082,17 +3149,17 @@
             <a:r>
               <a:rPr b="0" lang="en-US" sz="2000" spc="-1" strike="noStrike">
                 <a:solidFill>
-                  <a:schemeClr val="dk1"/>
-                </a:solidFill>
-                <a:latin typeface="Calibri"/>
+                  <a:srgbClr val="000000"/>
+                </a:solidFill>
+                <a:latin typeface="Arial"/>
               </a:rPr>
               <a:t>Fifth Outline Level</a:t>
             </a:r>
             <a:endParaRPr b="0" lang="en-US" sz="2000" spc="-1" strike="noStrike">
               <a:solidFill>
-                <a:schemeClr val="dk1"/>
+                <a:srgbClr val="000000"/>
               </a:solidFill>
-              <a:latin typeface="Calibri"/>
+              <a:latin typeface="Arial"/>
             </a:endParaRPr>
           </a:p>
           <a:p>
@@ -3110,17 +3177,17 @@
             <a:r>
               <a:rPr b="0" lang="en-US" sz="2000" spc="-1" strike="noStrike">
                 <a:solidFill>
-                  <a:schemeClr val="dk1"/>
-                </a:solidFill>
-                <a:latin typeface="Calibri"/>
+                  <a:srgbClr val="000000"/>
+                </a:solidFill>
+                <a:latin typeface="Arial"/>
               </a:rPr>
               <a:t>Sixth Outline Level</a:t>
             </a:r>
             <a:endParaRPr b="0" lang="en-US" sz="2000" spc="-1" strike="noStrike">
               <a:solidFill>
-                <a:schemeClr val="dk1"/>
+                <a:srgbClr val="000000"/>
               </a:solidFill>
-              <a:latin typeface="Calibri"/>
+              <a:latin typeface="Arial"/>
             </a:endParaRPr>
           </a:p>
           <a:p>
@@ -3138,17 +3205,17 @@
             <a:r>
               <a:rPr b="0" lang="en-US" sz="2000" spc="-1" strike="noStrike">
                 <a:solidFill>
-                  <a:schemeClr val="dk1"/>
-                </a:solidFill>
-                <a:latin typeface="Calibri"/>
+                  <a:srgbClr val="000000"/>
+                </a:solidFill>
+                <a:latin typeface="Arial"/>
               </a:rPr>
               <a:t>Seventh Outline Level</a:t>
             </a:r>
             <a:endParaRPr b="0" lang="en-US" sz="2000" spc="-1" strike="noStrike">
               <a:solidFill>
-                <a:schemeClr val="dk1"/>
+                <a:srgbClr val="000000"/>
               </a:solidFill>
-              <a:latin typeface="Calibri"/>
+              <a:latin typeface="Arial"/>
             </a:endParaRPr>
           </a:p>
         </p:txBody>
@@ -3195,7 +3262,7 @@
         <p:spPr>
           <a:xfrm>
             <a:off x="0" y="0"/>
-            <a:ext cx="14630040" cy="8229240"/>
+            <a:ext cx="14629680" cy="8228880"/>
           </a:xfrm>
           <a:prstGeom prst="rect">
             <a:avLst/>
@@ -3241,7 +3308,7 @@
         <p:spPr>
           <a:xfrm>
             <a:off x="0" y="0"/>
-            <a:ext cx="14630040" cy="8229240"/>
+            <a:ext cx="14629680" cy="8228880"/>
           </a:xfrm>
           <a:prstGeom prst="rect">
             <a:avLst/>
@@ -3306,23 +3373,23 @@
             <a:noAutofit/>
           </a:bodyPr>
           <a:p>
-            <a:pPr indent="0">
+            <a:pPr indent="0" algn="ctr">
               <a:buNone/>
             </a:pPr>
             <a:r>
-              <a:rPr b="0" lang="en-US" sz="1800" spc="-1" strike="noStrike">
-                <a:solidFill>
-                  <a:schemeClr val="dk1"/>
-                </a:solidFill>
-                <a:latin typeface="Calibri"/>
+              <a:rPr b="0" lang="en-US" sz="4400" spc="-1" strike="noStrike">
+                <a:solidFill>
+                  <a:srgbClr val="000000"/>
+                </a:solidFill>
+                <a:latin typeface="Arial"/>
               </a:rPr>
               <a:t>Click to edit the title text format</a:t>
             </a:r>
-            <a:endParaRPr b="0" lang="en-US" sz="1800" spc="-1" strike="noStrike">
+            <a:endParaRPr b="0" lang="en-US" sz="4400" spc="-1" strike="noStrike">
               <a:solidFill>
-                <a:schemeClr val="dk1"/>
+                <a:srgbClr val="000000"/>
               </a:solidFill>
-              <a:latin typeface="Calibri"/>
+              <a:latin typeface="Arial"/>
             </a:endParaRPr>
           </a:p>
         </p:txBody>
@@ -3369,17 +3436,17 @@
             <a:r>
               <a:rPr b="0" lang="en-US" sz="3200" spc="-1" strike="noStrike">
                 <a:solidFill>
-                  <a:schemeClr val="dk1"/>
-                </a:solidFill>
-                <a:latin typeface="Calibri"/>
+                  <a:srgbClr val="000000"/>
+                </a:solidFill>
+                <a:latin typeface="Arial"/>
               </a:rPr>
               <a:t>Click to edit the outline text format</a:t>
             </a:r>
             <a:endParaRPr b="0" lang="en-US" sz="3200" spc="-1" strike="noStrike">
               <a:solidFill>
-                <a:schemeClr val="dk1"/>
+                <a:srgbClr val="000000"/>
               </a:solidFill>
-              <a:latin typeface="Calibri"/>
+              <a:latin typeface="Arial"/>
             </a:endParaRPr>
           </a:p>
           <a:p>
@@ -3395,19 +3462,19 @@
               <a:buChar char=""/>
             </a:pPr>
             <a:r>
-              <a:rPr b="0" lang="en-US" sz="2400" spc="-1" strike="noStrike">
-                <a:solidFill>
-                  <a:schemeClr val="dk1"/>
-                </a:solidFill>
-                <a:latin typeface="Calibri"/>
+              <a:rPr b="0" lang="en-US" sz="2800" spc="-1" strike="noStrike">
+                <a:solidFill>
+                  <a:srgbClr val="000000"/>
+                </a:solidFill>
+                <a:latin typeface="Arial"/>
               </a:rPr>
               <a:t>Second Outline Level</a:t>
             </a:r>
-            <a:endParaRPr b="0" lang="en-US" sz="2400" spc="-1" strike="noStrike">
+            <a:endParaRPr b="0" lang="en-US" sz="2800" spc="-1" strike="noStrike">
               <a:solidFill>
-                <a:schemeClr val="dk1"/>
+                <a:srgbClr val="000000"/>
               </a:solidFill>
-              <a:latin typeface="Calibri"/>
+              <a:latin typeface="Arial"/>
             </a:endParaRPr>
           </a:p>
           <a:p>
@@ -3423,19 +3490,19 @@
               <a:buChar char=""/>
             </a:pPr>
             <a:r>
-              <a:rPr b="0" lang="en-US" sz="2000" spc="-1" strike="noStrike">
-                <a:solidFill>
-                  <a:schemeClr val="dk1"/>
-                </a:solidFill>
-                <a:latin typeface="Calibri"/>
+              <a:rPr b="0" lang="en-US" sz="2400" spc="-1" strike="noStrike">
+                <a:solidFill>
+                  <a:srgbClr val="000000"/>
+                </a:solidFill>
+                <a:latin typeface="Arial"/>
               </a:rPr>
               <a:t>Third Outline Level</a:t>
             </a:r>
-            <a:endParaRPr b="0" lang="en-US" sz="2000" spc="-1" strike="noStrike">
+            <a:endParaRPr b="0" lang="en-US" sz="2400" spc="-1" strike="noStrike">
               <a:solidFill>
-                <a:schemeClr val="dk1"/>
+                <a:srgbClr val="000000"/>
               </a:solidFill>
-              <a:latin typeface="Calibri"/>
+              <a:latin typeface="Arial"/>
             </a:endParaRPr>
           </a:p>
           <a:p>
@@ -3453,17 +3520,17 @@
             <a:r>
               <a:rPr b="0" lang="en-US" sz="2000" spc="-1" strike="noStrike">
                 <a:solidFill>
-                  <a:schemeClr val="dk1"/>
-                </a:solidFill>
-                <a:latin typeface="Calibri"/>
+                  <a:srgbClr val="000000"/>
+                </a:solidFill>
+                <a:latin typeface="Arial"/>
               </a:rPr>
               <a:t>Fourth Outline Level</a:t>
             </a:r>
             <a:endParaRPr b="0" lang="en-US" sz="2000" spc="-1" strike="noStrike">
               <a:solidFill>
-                <a:schemeClr val="dk1"/>
+                <a:srgbClr val="000000"/>
               </a:solidFill>
-              <a:latin typeface="Calibri"/>
+              <a:latin typeface="Arial"/>
             </a:endParaRPr>
           </a:p>
           <a:p>
@@ -3481,17 +3548,17 @@
             <a:r>
               <a:rPr b="0" lang="en-US" sz="2000" spc="-1" strike="noStrike">
                 <a:solidFill>
-                  <a:schemeClr val="dk1"/>
-                </a:solidFill>
-                <a:latin typeface="Calibri"/>
+                  <a:srgbClr val="000000"/>
+                </a:solidFill>
+                <a:latin typeface="Arial"/>
               </a:rPr>
               <a:t>Fifth Outline Level</a:t>
             </a:r>
             <a:endParaRPr b="0" lang="en-US" sz="2000" spc="-1" strike="noStrike">
               <a:solidFill>
-                <a:schemeClr val="dk1"/>
+                <a:srgbClr val="000000"/>
               </a:solidFill>
-              <a:latin typeface="Calibri"/>
+              <a:latin typeface="Arial"/>
             </a:endParaRPr>
           </a:p>
           <a:p>
@@ -3509,17 +3576,17 @@
             <a:r>
               <a:rPr b="0" lang="en-US" sz="2000" spc="-1" strike="noStrike">
                 <a:solidFill>
-                  <a:schemeClr val="dk1"/>
-                </a:solidFill>
-                <a:latin typeface="Calibri"/>
+                  <a:srgbClr val="000000"/>
+                </a:solidFill>
+                <a:latin typeface="Arial"/>
               </a:rPr>
               <a:t>Sixth Outline Level</a:t>
             </a:r>
             <a:endParaRPr b="0" lang="en-US" sz="2000" spc="-1" strike="noStrike">
               <a:solidFill>
-                <a:schemeClr val="dk1"/>
+                <a:srgbClr val="000000"/>
               </a:solidFill>
-              <a:latin typeface="Calibri"/>
+              <a:latin typeface="Arial"/>
             </a:endParaRPr>
           </a:p>
           <a:p>
@@ -3537,17 +3604,17 @@
             <a:r>
               <a:rPr b="0" lang="en-US" sz="2000" spc="-1" strike="noStrike">
                 <a:solidFill>
-                  <a:schemeClr val="dk1"/>
-                </a:solidFill>
-                <a:latin typeface="Calibri"/>
+                  <a:srgbClr val="000000"/>
+                </a:solidFill>
+                <a:latin typeface="Arial"/>
               </a:rPr>
               <a:t>Seventh Outline Level</a:t>
             </a:r>
             <a:endParaRPr b="0" lang="en-US" sz="2000" spc="-1" strike="noStrike">
               <a:solidFill>
-                <a:schemeClr val="dk1"/>
+                <a:srgbClr val="000000"/>
               </a:solidFill>
-              <a:latin typeface="Calibri"/>
+              <a:latin typeface="Arial"/>
             </a:endParaRPr>
           </a:p>
         </p:txBody>
@@ -3594,7 +3661,7 @@
         <p:spPr>
           <a:xfrm>
             <a:off x="0" y="0"/>
-            <a:ext cx="14630040" cy="8229240"/>
+            <a:ext cx="14629680" cy="8228880"/>
           </a:xfrm>
           <a:prstGeom prst="rect">
             <a:avLst/>
@@ -3640,7 +3707,7 @@
         <p:spPr>
           <a:xfrm>
             <a:off x="0" y="0"/>
-            <a:ext cx="14630040" cy="8229240"/>
+            <a:ext cx="14629680" cy="8228880"/>
           </a:xfrm>
           <a:prstGeom prst="rect">
             <a:avLst/>
@@ -3705,23 +3772,23 @@
             <a:noAutofit/>
           </a:bodyPr>
           <a:p>
-            <a:pPr indent="0">
+            <a:pPr indent="0" algn="ctr">
               <a:buNone/>
             </a:pPr>
             <a:r>
-              <a:rPr b="0" lang="en-US" sz="1800" spc="-1" strike="noStrike">
-                <a:solidFill>
-                  <a:schemeClr val="dk1"/>
-                </a:solidFill>
-                <a:latin typeface="Calibri"/>
+              <a:rPr b="0" lang="en-US" sz="4400" spc="-1" strike="noStrike">
+                <a:solidFill>
+                  <a:srgbClr val="000000"/>
+                </a:solidFill>
+                <a:latin typeface="Arial"/>
               </a:rPr>
               <a:t>Click to edit the title text format</a:t>
             </a:r>
-            <a:endParaRPr b="0" lang="en-US" sz="1800" spc="-1" strike="noStrike">
+            <a:endParaRPr b="0" lang="en-US" sz="4400" spc="-1" strike="noStrike">
               <a:solidFill>
-                <a:schemeClr val="dk1"/>
+                <a:srgbClr val="000000"/>
               </a:solidFill>
-              <a:latin typeface="Calibri"/>
+              <a:latin typeface="Arial"/>
             </a:endParaRPr>
           </a:p>
         </p:txBody>
@@ -3768,17 +3835,17 @@
             <a:r>
               <a:rPr b="0" lang="en-US" sz="3200" spc="-1" strike="noStrike">
                 <a:solidFill>
-                  <a:schemeClr val="dk1"/>
-                </a:solidFill>
-                <a:latin typeface="Calibri"/>
+                  <a:srgbClr val="000000"/>
+                </a:solidFill>
+                <a:latin typeface="Arial"/>
               </a:rPr>
               <a:t>Click to edit the outline text format</a:t>
             </a:r>
             <a:endParaRPr b="0" lang="en-US" sz="3200" spc="-1" strike="noStrike">
               <a:solidFill>
-                <a:schemeClr val="dk1"/>
+                <a:srgbClr val="000000"/>
               </a:solidFill>
-              <a:latin typeface="Calibri"/>
+              <a:latin typeface="Arial"/>
             </a:endParaRPr>
           </a:p>
           <a:p>
@@ -3794,19 +3861,19 @@
               <a:buChar char=""/>
             </a:pPr>
             <a:r>
-              <a:rPr b="0" lang="en-US" sz="2400" spc="-1" strike="noStrike">
-                <a:solidFill>
-                  <a:schemeClr val="dk1"/>
-                </a:solidFill>
-                <a:latin typeface="Calibri"/>
+              <a:rPr b="0" lang="en-US" sz="2800" spc="-1" strike="noStrike">
+                <a:solidFill>
+                  <a:srgbClr val="000000"/>
+                </a:solidFill>
+                <a:latin typeface="Arial"/>
               </a:rPr>
               <a:t>Second Outline Level</a:t>
             </a:r>
-            <a:endParaRPr b="0" lang="en-US" sz="2400" spc="-1" strike="noStrike">
+            <a:endParaRPr b="0" lang="en-US" sz="2800" spc="-1" strike="noStrike">
               <a:solidFill>
-                <a:schemeClr val="dk1"/>
+                <a:srgbClr val="000000"/>
               </a:solidFill>
-              <a:latin typeface="Calibri"/>
+              <a:latin typeface="Arial"/>
             </a:endParaRPr>
           </a:p>
           <a:p>
@@ -3822,19 +3889,19 @@
               <a:buChar char=""/>
             </a:pPr>
             <a:r>
-              <a:rPr b="0" lang="en-US" sz="2000" spc="-1" strike="noStrike">
-                <a:solidFill>
-                  <a:schemeClr val="dk1"/>
-                </a:solidFill>
-                <a:latin typeface="Calibri"/>
+              <a:rPr b="0" lang="en-US" sz="2400" spc="-1" strike="noStrike">
+                <a:solidFill>
+                  <a:srgbClr val="000000"/>
+                </a:solidFill>
+                <a:latin typeface="Arial"/>
               </a:rPr>
               <a:t>Third Outline Level</a:t>
             </a:r>
-            <a:endParaRPr b="0" lang="en-US" sz="2000" spc="-1" strike="noStrike">
+            <a:endParaRPr b="0" lang="en-US" sz="2400" spc="-1" strike="noStrike">
               <a:solidFill>
-                <a:schemeClr val="dk1"/>
+                <a:srgbClr val="000000"/>
               </a:solidFill>
-              <a:latin typeface="Calibri"/>
+              <a:latin typeface="Arial"/>
             </a:endParaRPr>
           </a:p>
           <a:p>
@@ -3852,17 +3919,17 @@
             <a:r>
               <a:rPr b="0" lang="en-US" sz="2000" spc="-1" strike="noStrike">
                 <a:solidFill>
-                  <a:schemeClr val="dk1"/>
-                </a:solidFill>
-                <a:latin typeface="Calibri"/>
+                  <a:srgbClr val="000000"/>
+                </a:solidFill>
+                <a:latin typeface="Arial"/>
               </a:rPr>
               <a:t>Fourth Outline Level</a:t>
             </a:r>
             <a:endParaRPr b="0" lang="en-US" sz="2000" spc="-1" strike="noStrike">
               <a:solidFill>
-                <a:schemeClr val="dk1"/>
+                <a:srgbClr val="000000"/>
               </a:solidFill>
-              <a:latin typeface="Calibri"/>
+              <a:latin typeface="Arial"/>
             </a:endParaRPr>
           </a:p>
           <a:p>
@@ -3880,17 +3947,17 @@
             <a:r>
               <a:rPr b="0" lang="en-US" sz="2000" spc="-1" strike="noStrike">
                 <a:solidFill>
-                  <a:schemeClr val="dk1"/>
-                </a:solidFill>
-                <a:latin typeface="Calibri"/>
+                  <a:srgbClr val="000000"/>
+                </a:solidFill>
+                <a:latin typeface="Arial"/>
               </a:rPr>
               <a:t>Fifth Outline Level</a:t>
             </a:r>
             <a:endParaRPr b="0" lang="en-US" sz="2000" spc="-1" strike="noStrike">
               <a:solidFill>
-                <a:schemeClr val="dk1"/>
+                <a:srgbClr val="000000"/>
               </a:solidFill>
-              <a:latin typeface="Calibri"/>
+              <a:latin typeface="Arial"/>
             </a:endParaRPr>
           </a:p>
           <a:p>
@@ -3908,17 +3975,17 @@
             <a:r>
               <a:rPr b="0" lang="en-US" sz="2000" spc="-1" strike="noStrike">
                 <a:solidFill>
-                  <a:schemeClr val="dk1"/>
-                </a:solidFill>
-                <a:latin typeface="Calibri"/>
+                  <a:srgbClr val="000000"/>
+                </a:solidFill>
+                <a:latin typeface="Arial"/>
               </a:rPr>
               <a:t>Sixth Outline Level</a:t>
             </a:r>
             <a:endParaRPr b="0" lang="en-US" sz="2000" spc="-1" strike="noStrike">
               <a:solidFill>
-                <a:schemeClr val="dk1"/>
+                <a:srgbClr val="000000"/>
               </a:solidFill>
-              <a:latin typeface="Calibri"/>
+              <a:latin typeface="Arial"/>
             </a:endParaRPr>
           </a:p>
           <a:p>
@@ -3936,17 +4003,17 @@
             <a:r>
               <a:rPr b="0" lang="en-US" sz="2000" spc="-1" strike="noStrike">
                 <a:solidFill>
-                  <a:schemeClr val="dk1"/>
-                </a:solidFill>
-                <a:latin typeface="Calibri"/>
+                  <a:srgbClr val="000000"/>
+                </a:solidFill>
+                <a:latin typeface="Arial"/>
               </a:rPr>
               <a:t>Seventh Outline Level</a:t>
             </a:r>
             <a:endParaRPr b="0" lang="en-US" sz="2000" spc="-1" strike="noStrike">
               <a:solidFill>
-                <a:schemeClr val="dk1"/>
+                <a:srgbClr val="000000"/>
               </a:solidFill>
-              <a:latin typeface="Calibri"/>
+              <a:latin typeface="Arial"/>
             </a:endParaRPr>
           </a:p>
         </p:txBody>
@@ -3993,7 +4060,7 @@
         <p:spPr>
           <a:xfrm>
             <a:off x="0" y="0"/>
-            <a:ext cx="14630040" cy="8229240"/>
+            <a:ext cx="14629680" cy="8228880"/>
           </a:xfrm>
           <a:prstGeom prst="rect">
             <a:avLst/>
@@ -4039,7 +4106,7 @@
         <p:spPr>
           <a:xfrm>
             <a:off x="0" y="0"/>
-            <a:ext cx="14630040" cy="8229240"/>
+            <a:ext cx="14629680" cy="8228880"/>
           </a:xfrm>
           <a:prstGeom prst="rect">
             <a:avLst/>
@@ -4104,23 +4171,23 @@
             <a:noAutofit/>
           </a:bodyPr>
           <a:p>
-            <a:pPr indent="0">
+            <a:pPr indent="0" algn="ctr">
               <a:buNone/>
             </a:pPr>
             <a:r>
-              <a:rPr b="0" lang="en-US" sz="1800" spc="-1" strike="noStrike">
-                <a:solidFill>
-                  <a:schemeClr val="dk1"/>
-                </a:solidFill>
-                <a:latin typeface="Calibri"/>
+              <a:rPr b="0" lang="en-US" sz="4400" spc="-1" strike="noStrike">
+                <a:solidFill>
+                  <a:srgbClr val="000000"/>
+                </a:solidFill>
+                <a:latin typeface="Arial"/>
               </a:rPr>
               <a:t>Click to edit the title text format</a:t>
             </a:r>
-            <a:endParaRPr b="0" lang="en-US" sz="1800" spc="-1" strike="noStrike">
+            <a:endParaRPr b="0" lang="en-US" sz="4400" spc="-1" strike="noStrike">
               <a:solidFill>
-                <a:schemeClr val="dk1"/>
+                <a:srgbClr val="000000"/>
               </a:solidFill>
-              <a:latin typeface="Calibri"/>
+              <a:latin typeface="Arial"/>
             </a:endParaRPr>
           </a:p>
         </p:txBody>
@@ -4167,17 +4234,17 @@
             <a:r>
               <a:rPr b="0" lang="en-US" sz="3200" spc="-1" strike="noStrike">
                 <a:solidFill>
-                  <a:schemeClr val="dk1"/>
-                </a:solidFill>
-                <a:latin typeface="Calibri"/>
+                  <a:srgbClr val="000000"/>
+                </a:solidFill>
+                <a:latin typeface="Arial"/>
               </a:rPr>
               <a:t>Click to edit the outline text format</a:t>
             </a:r>
             <a:endParaRPr b="0" lang="en-US" sz="3200" spc="-1" strike="noStrike">
               <a:solidFill>
-                <a:schemeClr val="dk1"/>
+                <a:srgbClr val="000000"/>
               </a:solidFill>
-              <a:latin typeface="Calibri"/>
+              <a:latin typeface="Arial"/>
             </a:endParaRPr>
           </a:p>
           <a:p>
@@ -4193,19 +4260,19 @@
               <a:buChar char=""/>
             </a:pPr>
             <a:r>
-              <a:rPr b="0" lang="en-US" sz="2400" spc="-1" strike="noStrike">
-                <a:solidFill>
-                  <a:schemeClr val="dk1"/>
-                </a:solidFill>
-                <a:latin typeface="Calibri"/>
+              <a:rPr b="0" lang="en-US" sz="2800" spc="-1" strike="noStrike">
+                <a:solidFill>
+                  <a:srgbClr val="000000"/>
+                </a:solidFill>
+                <a:latin typeface="Arial"/>
               </a:rPr>
               <a:t>Second Outline Level</a:t>
             </a:r>
-            <a:endParaRPr b="0" lang="en-US" sz="2400" spc="-1" strike="noStrike">
+            <a:endParaRPr b="0" lang="en-US" sz="2800" spc="-1" strike="noStrike">
               <a:solidFill>
-                <a:schemeClr val="dk1"/>
+                <a:srgbClr val="000000"/>
               </a:solidFill>
-              <a:latin typeface="Calibri"/>
+              <a:latin typeface="Arial"/>
             </a:endParaRPr>
           </a:p>
           <a:p>
@@ -4221,19 +4288,19 @@
               <a:buChar char=""/>
             </a:pPr>
             <a:r>
-              <a:rPr b="0" lang="en-US" sz="2000" spc="-1" strike="noStrike">
-                <a:solidFill>
-                  <a:schemeClr val="dk1"/>
-                </a:solidFill>
-                <a:latin typeface="Calibri"/>
+              <a:rPr b="0" lang="en-US" sz="2400" spc="-1" strike="noStrike">
+                <a:solidFill>
+                  <a:srgbClr val="000000"/>
+                </a:solidFill>
+                <a:latin typeface="Arial"/>
               </a:rPr>
               <a:t>Third Outline Level</a:t>
             </a:r>
-            <a:endParaRPr b="0" lang="en-US" sz="2000" spc="-1" strike="noStrike">
+            <a:endParaRPr b="0" lang="en-US" sz="2400" spc="-1" strike="noStrike">
               <a:solidFill>
-                <a:schemeClr val="dk1"/>
+                <a:srgbClr val="000000"/>
               </a:solidFill>
-              <a:latin typeface="Calibri"/>
+              <a:latin typeface="Arial"/>
             </a:endParaRPr>
           </a:p>
           <a:p>
@@ -4251,17 +4318,17 @@
             <a:r>
               <a:rPr b="0" lang="en-US" sz="2000" spc="-1" strike="noStrike">
                 <a:solidFill>
-                  <a:schemeClr val="dk1"/>
-                </a:solidFill>
-                <a:latin typeface="Calibri"/>
+                  <a:srgbClr val="000000"/>
+                </a:solidFill>
+                <a:latin typeface="Arial"/>
               </a:rPr>
               <a:t>Fourth Outline Level</a:t>
             </a:r>
             <a:endParaRPr b="0" lang="en-US" sz="2000" spc="-1" strike="noStrike">
               <a:solidFill>
-                <a:schemeClr val="dk1"/>
+                <a:srgbClr val="000000"/>
               </a:solidFill>
-              <a:latin typeface="Calibri"/>
+              <a:latin typeface="Arial"/>
             </a:endParaRPr>
           </a:p>
           <a:p>
@@ -4279,17 +4346,17 @@
             <a:r>
               <a:rPr b="0" lang="en-US" sz="2000" spc="-1" strike="noStrike">
                 <a:solidFill>
-                  <a:schemeClr val="dk1"/>
-                </a:solidFill>
-                <a:latin typeface="Calibri"/>
+                  <a:srgbClr val="000000"/>
+                </a:solidFill>
+                <a:latin typeface="Arial"/>
               </a:rPr>
               <a:t>Fifth Outline Level</a:t>
             </a:r>
             <a:endParaRPr b="0" lang="en-US" sz="2000" spc="-1" strike="noStrike">
               <a:solidFill>
-                <a:schemeClr val="dk1"/>
+                <a:srgbClr val="000000"/>
               </a:solidFill>
-              <a:latin typeface="Calibri"/>
+              <a:latin typeface="Arial"/>
             </a:endParaRPr>
           </a:p>
           <a:p>
@@ -4307,17 +4374,17 @@
             <a:r>
               <a:rPr b="0" lang="en-US" sz="2000" spc="-1" strike="noStrike">
                 <a:solidFill>
-                  <a:schemeClr val="dk1"/>
-                </a:solidFill>
-                <a:latin typeface="Calibri"/>
+                  <a:srgbClr val="000000"/>
+                </a:solidFill>
+                <a:latin typeface="Arial"/>
               </a:rPr>
               <a:t>Sixth Outline Level</a:t>
             </a:r>
             <a:endParaRPr b="0" lang="en-US" sz="2000" spc="-1" strike="noStrike">
               <a:solidFill>
-                <a:schemeClr val="dk1"/>
+                <a:srgbClr val="000000"/>
               </a:solidFill>
-              <a:latin typeface="Calibri"/>
+              <a:latin typeface="Arial"/>
             </a:endParaRPr>
           </a:p>
           <a:p>
@@ -4335,17 +4402,17 @@
             <a:r>
               <a:rPr b="0" lang="en-US" sz="2000" spc="-1" strike="noStrike">
                 <a:solidFill>
-                  <a:schemeClr val="dk1"/>
-                </a:solidFill>
-                <a:latin typeface="Calibri"/>
+                  <a:srgbClr val="000000"/>
+                </a:solidFill>
+                <a:latin typeface="Arial"/>
               </a:rPr>
               <a:t>Seventh Outline Level</a:t>
             </a:r>
             <a:endParaRPr b="0" lang="en-US" sz="2000" spc="-1" strike="noStrike">
               <a:solidFill>
-                <a:schemeClr val="dk1"/>
+                <a:srgbClr val="000000"/>
               </a:solidFill>
-              <a:latin typeface="Calibri"/>
+              <a:latin typeface="Arial"/>
             </a:endParaRPr>
           </a:p>
         </p:txBody>
@@ -4392,7 +4459,7 @@
         <p:spPr>
           <a:xfrm>
             <a:off x="0" y="0"/>
-            <a:ext cx="14630040" cy="8229240"/>
+            <a:ext cx="14629680" cy="8228880"/>
           </a:xfrm>
           <a:prstGeom prst="rect">
             <a:avLst/>
@@ -4438,7 +4505,7 @@
         <p:spPr>
           <a:xfrm>
             <a:off x="0" y="0"/>
-            <a:ext cx="14630040" cy="8229240"/>
+            <a:ext cx="14629680" cy="8228880"/>
           </a:xfrm>
           <a:prstGeom prst="rect">
             <a:avLst/>
@@ -4503,23 +4570,23 @@
             <a:noAutofit/>
           </a:bodyPr>
           <a:p>
-            <a:pPr indent="0">
+            <a:pPr indent="0" algn="ctr">
               <a:buNone/>
             </a:pPr>
             <a:r>
-              <a:rPr b="0" lang="en-US" sz="1800" spc="-1" strike="noStrike">
-                <a:solidFill>
-                  <a:schemeClr val="dk1"/>
-                </a:solidFill>
-                <a:latin typeface="Calibri"/>
+              <a:rPr b="0" lang="en-US" sz="4400" spc="-1" strike="noStrike">
+                <a:solidFill>
+                  <a:srgbClr val="000000"/>
+                </a:solidFill>
+                <a:latin typeface="Arial"/>
               </a:rPr>
               <a:t>Click to edit the title text format</a:t>
             </a:r>
-            <a:endParaRPr b="0" lang="en-US" sz="1800" spc="-1" strike="noStrike">
+            <a:endParaRPr b="0" lang="en-US" sz="4400" spc="-1" strike="noStrike">
               <a:solidFill>
-                <a:schemeClr val="dk1"/>
+                <a:srgbClr val="000000"/>
               </a:solidFill>
-              <a:latin typeface="Calibri"/>
+              <a:latin typeface="Arial"/>
             </a:endParaRPr>
           </a:p>
         </p:txBody>
@@ -4566,17 +4633,17 @@
             <a:r>
               <a:rPr b="0" lang="en-US" sz="3200" spc="-1" strike="noStrike">
                 <a:solidFill>
-                  <a:schemeClr val="dk1"/>
-                </a:solidFill>
-                <a:latin typeface="Calibri"/>
+                  <a:srgbClr val="000000"/>
+                </a:solidFill>
+                <a:latin typeface="Arial"/>
               </a:rPr>
               <a:t>Click to edit the outline text format</a:t>
             </a:r>
             <a:endParaRPr b="0" lang="en-US" sz="3200" spc="-1" strike="noStrike">
               <a:solidFill>
-                <a:schemeClr val="dk1"/>
+                <a:srgbClr val="000000"/>
               </a:solidFill>
-              <a:latin typeface="Calibri"/>
+              <a:latin typeface="Arial"/>
             </a:endParaRPr>
           </a:p>
           <a:p>
@@ -4592,19 +4659,19 @@
               <a:buChar char=""/>
             </a:pPr>
             <a:r>
-              <a:rPr b="0" lang="en-US" sz="2400" spc="-1" strike="noStrike">
-                <a:solidFill>
-                  <a:schemeClr val="dk1"/>
-                </a:solidFill>
-                <a:latin typeface="Calibri"/>
+              <a:rPr b="0" lang="en-US" sz="2800" spc="-1" strike="noStrike">
+                <a:solidFill>
+                  <a:srgbClr val="000000"/>
+                </a:solidFill>
+                <a:latin typeface="Arial"/>
               </a:rPr>
               <a:t>Second Outline Level</a:t>
             </a:r>
-            <a:endParaRPr b="0" lang="en-US" sz="2400" spc="-1" strike="noStrike">
+            <a:endParaRPr b="0" lang="en-US" sz="2800" spc="-1" strike="noStrike">
               <a:solidFill>
-                <a:schemeClr val="dk1"/>
+                <a:srgbClr val="000000"/>
               </a:solidFill>
-              <a:latin typeface="Calibri"/>
+              <a:latin typeface="Arial"/>
             </a:endParaRPr>
           </a:p>
           <a:p>
@@ -4620,19 +4687,19 @@
               <a:buChar char=""/>
             </a:pPr>
             <a:r>
-              <a:rPr b="0" lang="en-US" sz="2000" spc="-1" strike="noStrike">
-                <a:solidFill>
-                  <a:schemeClr val="dk1"/>
-                </a:solidFill>
-                <a:latin typeface="Calibri"/>
+              <a:rPr b="0" lang="en-US" sz="2400" spc="-1" strike="noStrike">
+                <a:solidFill>
+                  <a:srgbClr val="000000"/>
+                </a:solidFill>
+                <a:latin typeface="Arial"/>
               </a:rPr>
               <a:t>Third Outline Level</a:t>
             </a:r>
-            <a:endParaRPr b="0" lang="en-US" sz="2000" spc="-1" strike="noStrike">
+            <a:endParaRPr b="0" lang="en-US" sz="2400" spc="-1" strike="noStrike">
               <a:solidFill>
-                <a:schemeClr val="dk1"/>
+                <a:srgbClr val="000000"/>
               </a:solidFill>
-              <a:latin typeface="Calibri"/>
+              <a:latin typeface="Arial"/>
             </a:endParaRPr>
           </a:p>
           <a:p>
@@ -4650,17 +4717,17 @@
             <a:r>
               <a:rPr b="0" lang="en-US" sz="2000" spc="-1" strike="noStrike">
                 <a:solidFill>
-                  <a:schemeClr val="dk1"/>
-                </a:solidFill>
-                <a:latin typeface="Calibri"/>
+                  <a:srgbClr val="000000"/>
+                </a:solidFill>
+                <a:latin typeface="Arial"/>
               </a:rPr>
               <a:t>Fourth Outline Level</a:t>
             </a:r>
             <a:endParaRPr b="0" lang="en-US" sz="2000" spc="-1" strike="noStrike">
               <a:solidFill>
-                <a:schemeClr val="dk1"/>
+                <a:srgbClr val="000000"/>
               </a:solidFill>
-              <a:latin typeface="Calibri"/>
+              <a:latin typeface="Arial"/>
             </a:endParaRPr>
           </a:p>
           <a:p>
@@ -4678,17 +4745,17 @@
             <a:r>
               <a:rPr b="0" lang="en-US" sz="2000" spc="-1" strike="noStrike">
                 <a:solidFill>
-                  <a:schemeClr val="dk1"/>
-                </a:solidFill>
-                <a:latin typeface="Calibri"/>
+                  <a:srgbClr val="000000"/>
+                </a:solidFill>
+                <a:latin typeface="Arial"/>
               </a:rPr>
               <a:t>Fifth Outline Level</a:t>
             </a:r>
             <a:endParaRPr b="0" lang="en-US" sz="2000" spc="-1" strike="noStrike">
               <a:solidFill>
-                <a:schemeClr val="dk1"/>
+                <a:srgbClr val="000000"/>
               </a:solidFill>
-              <a:latin typeface="Calibri"/>
+              <a:latin typeface="Arial"/>
             </a:endParaRPr>
           </a:p>
           <a:p>
@@ -4706,17 +4773,17 @@
             <a:r>
               <a:rPr b="0" lang="en-US" sz="2000" spc="-1" strike="noStrike">
                 <a:solidFill>
-                  <a:schemeClr val="dk1"/>
-                </a:solidFill>
-                <a:latin typeface="Calibri"/>
+                  <a:srgbClr val="000000"/>
+                </a:solidFill>
+                <a:latin typeface="Arial"/>
               </a:rPr>
               <a:t>Sixth Outline Level</a:t>
             </a:r>
             <a:endParaRPr b="0" lang="en-US" sz="2000" spc="-1" strike="noStrike">
               <a:solidFill>
-                <a:schemeClr val="dk1"/>
+                <a:srgbClr val="000000"/>
               </a:solidFill>
-              <a:latin typeface="Calibri"/>
+              <a:latin typeface="Arial"/>
             </a:endParaRPr>
           </a:p>
           <a:p>
@@ -4734,17 +4801,17 @@
             <a:r>
               <a:rPr b="0" lang="en-US" sz="2000" spc="-1" strike="noStrike">
                 <a:solidFill>
-                  <a:schemeClr val="dk1"/>
-                </a:solidFill>
-                <a:latin typeface="Calibri"/>
+                  <a:srgbClr val="000000"/>
+                </a:solidFill>
+                <a:latin typeface="Arial"/>
               </a:rPr>
               <a:t>Seventh Outline Level</a:t>
             </a:r>
             <a:endParaRPr b="0" lang="en-US" sz="2000" spc="-1" strike="noStrike">
               <a:solidFill>
-                <a:schemeClr val="dk1"/>
+                <a:srgbClr val="000000"/>
               </a:solidFill>
-              <a:latin typeface="Calibri"/>
+              <a:latin typeface="Arial"/>
             </a:endParaRPr>
           </a:p>
         </p:txBody>
@@ -4791,7 +4858,7 @@
         <p:spPr>
           <a:xfrm>
             <a:off x="0" y="0"/>
-            <a:ext cx="14630040" cy="8229240"/>
+            <a:ext cx="14629680" cy="8228880"/>
           </a:xfrm>
           <a:prstGeom prst="rect">
             <a:avLst/>
@@ -4837,7 +4904,7 @@
         <p:spPr>
           <a:xfrm>
             <a:off x="0" y="0"/>
-            <a:ext cx="14630040" cy="8229240"/>
+            <a:ext cx="14629680" cy="8228880"/>
           </a:xfrm>
           <a:prstGeom prst="rect">
             <a:avLst/>
@@ -4902,23 +4969,23 @@
             <a:noAutofit/>
           </a:bodyPr>
           <a:p>
-            <a:pPr indent="0">
+            <a:pPr indent="0" algn="ctr">
               <a:buNone/>
             </a:pPr>
             <a:r>
-              <a:rPr b="0" lang="en-US" sz="1800" spc="-1" strike="noStrike">
-                <a:solidFill>
-                  <a:schemeClr val="dk1"/>
-                </a:solidFill>
-                <a:latin typeface="Calibri"/>
+              <a:rPr b="0" lang="en-US" sz="4400" spc="-1" strike="noStrike">
+                <a:solidFill>
+                  <a:srgbClr val="000000"/>
+                </a:solidFill>
+                <a:latin typeface="Arial"/>
               </a:rPr>
               <a:t>Click to edit the title text format</a:t>
             </a:r>
-            <a:endParaRPr b="0" lang="en-US" sz="1800" spc="-1" strike="noStrike">
+            <a:endParaRPr b="0" lang="en-US" sz="4400" spc="-1" strike="noStrike">
               <a:solidFill>
-                <a:schemeClr val="dk1"/>
+                <a:srgbClr val="000000"/>
               </a:solidFill>
-              <a:latin typeface="Calibri"/>
+              <a:latin typeface="Arial"/>
             </a:endParaRPr>
           </a:p>
         </p:txBody>
@@ -4965,17 +5032,17 @@
             <a:r>
               <a:rPr b="0" lang="en-US" sz="3200" spc="-1" strike="noStrike">
                 <a:solidFill>
-                  <a:schemeClr val="dk1"/>
-                </a:solidFill>
-                <a:latin typeface="Calibri"/>
+                  <a:srgbClr val="000000"/>
+                </a:solidFill>
+                <a:latin typeface="Arial"/>
               </a:rPr>
               <a:t>Click to edit the outline text format</a:t>
             </a:r>
             <a:endParaRPr b="0" lang="en-US" sz="3200" spc="-1" strike="noStrike">
               <a:solidFill>
-                <a:schemeClr val="dk1"/>
+                <a:srgbClr val="000000"/>
               </a:solidFill>
-              <a:latin typeface="Calibri"/>
+              <a:latin typeface="Arial"/>
             </a:endParaRPr>
           </a:p>
           <a:p>
@@ -4991,19 +5058,19 @@
               <a:buChar char=""/>
             </a:pPr>
             <a:r>
-              <a:rPr b="0" lang="en-US" sz="2400" spc="-1" strike="noStrike">
-                <a:solidFill>
-                  <a:schemeClr val="dk1"/>
-                </a:solidFill>
-                <a:latin typeface="Calibri"/>
+              <a:rPr b="0" lang="en-US" sz="2800" spc="-1" strike="noStrike">
+                <a:solidFill>
+                  <a:srgbClr val="000000"/>
+                </a:solidFill>
+                <a:latin typeface="Arial"/>
               </a:rPr>
               <a:t>Second Outline Level</a:t>
             </a:r>
-            <a:endParaRPr b="0" lang="en-US" sz="2400" spc="-1" strike="noStrike">
+            <a:endParaRPr b="0" lang="en-US" sz="2800" spc="-1" strike="noStrike">
               <a:solidFill>
-                <a:schemeClr val="dk1"/>
+                <a:srgbClr val="000000"/>
               </a:solidFill>
-              <a:latin typeface="Calibri"/>
+              <a:latin typeface="Arial"/>
             </a:endParaRPr>
           </a:p>
           <a:p>
@@ -5019,19 +5086,19 @@
               <a:buChar char=""/>
             </a:pPr>
             <a:r>
-              <a:rPr b="0" lang="en-US" sz="2000" spc="-1" strike="noStrike">
-                <a:solidFill>
-                  <a:schemeClr val="dk1"/>
-                </a:solidFill>
-                <a:latin typeface="Calibri"/>
+              <a:rPr b="0" lang="en-US" sz="2400" spc="-1" strike="noStrike">
+                <a:solidFill>
+                  <a:srgbClr val="000000"/>
+                </a:solidFill>
+                <a:latin typeface="Arial"/>
               </a:rPr>
               <a:t>Third Outline Level</a:t>
             </a:r>
-            <a:endParaRPr b="0" lang="en-US" sz="2000" spc="-1" strike="noStrike">
+            <a:endParaRPr b="0" lang="en-US" sz="2400" spc="-1" strike="noStrike">
               <a:solidFill>
-                <a:schemeClr val="dk1"/>
+                <a:srgbClr val="000000"/>
               </a:solidFill>
-              <a:latin typeface="Calibri"/>
+              <a:latin typeface="Arial"/>
             </a:endParaRPr>
           </a:p>
           <a:p>
@@ -5049,17 +5116,17 @@
             <a:r>
               <a:rPr b="0" lang="en-US" sz="2000" spc="-1" strike="noStrike">
                 <a:solidFill>
-                  <a:schemeClr val="dk1"/>
-                </a:solidFill>
-                <a:latin typeface="Calibri"/>
+                  <a:srgbClr val="000000"/>
+                </a:solidFill>
+                <a:latin typeface="Arial"/>
               </a:rPr>
               <a:t>Fourth Outline Level</a:t>
             </a:r>
             <a:endParaRPr b="0" lang="en-US" sz="2000" spc="-1" strike="noStrike">
               <a:solidFill>
-                <a:schemeClr val="dk1"/>
+                <a:srgbClr val="000000"/>
               </a:solidFill>
-              <a:latin typeface="Calibri"/>
+              <a:latin typeface="Arial"/>
             </a:endParaRPr>
           </a:p>
           <a:p>
@@ -5077,17 +5144,17 @@
             <a:r>
               <a:rPr b="0" lang="en-US" sz="2000" spc="-1" strike="noStrike">
                 <a:solidFill>
-                  <a:schemeClr val="dk1"/>
-                </a:solidFill>
-                <a:latin typeface="Calibri"/>
+                  <a:srgbClr val="000000"/>
+                </a:solidFill>
+                <a:latin typeface="Arial"/>
               </a:rPr>
               <a:t>Fifth Outline Level</a:t>
             </a:r>
             <a:endParaRPr b="0" lang="en-US" sz="2000" spc="-1" strike="noStrike">
               <a:solidFill>
-                <a:schemeClr val="dk1"/>
+                <a:srgbClr val="000000"/>
               </a:solidFill>
-              <a:latin typeface="Calibri"/>
+              <a:latin typeface="Arial"/>
             </a:endParaRPr>
           </a:p>
           <a:p>
@@ -5105,17 +5172,17 @@
             <a:r>
               <a:rPr b="0" lang="en-US" sz="2000" spc="-1" strike="noStrike">
                 <a:solidFill>
-                  <a:schemeClr val="dk1"/>
-                </a:solidFill>
-                <a:latin typeface="Calibri"/>
+                  <a:srgbClr val="000000"/>
+                </a:solidFill>
+                <a:latin typeface="Arial"/>
               </a:rPr>
               <a:t>Sixth Outline Level</a:t>
             </a:r>
             <a:endParaRPr b="0" lang="en-US" sz="2000" spc="-1" strike="noStrike">
               <a:solidFill>
-                <a:schemeClr val="dk1"/>
+                <a:srgbClr val="000000"/>
               </a:solidFill>
-              <a:latin typeface="Calibri"/>
+              <a:latin typeface="Arial"/>
             </a:endParaRPr>
           </a:p>
           <a:p>
@@ -5133,17 +5200,17 @@
             <a:r>
               <a:rPr b="0" lang="en-US" sz="2000" spc="-1" strike="noStrike">
                 <a:solidFill>
-                  <a:schemeClr val="dk1"/>
-                </a:solidFill>
-                <a:latin typeface="Calibri"/>
+                  <a:srgbClr val="000000"/>
+                </a:solidFill>
+                <a:latin typeface="Arial"/>
               </a:rPr>
               <a:t>Seventh Outline Level</a:t>
             </a:r>
             <a:endParaRPr b="0" lang="en-US" sz="2000" spc="-1" strike="noStrike">
               <a:solidFill>
-                <a:schemeClr val="dk1"/>
+                <a:srgbClr val="000000"/>
               </a:solidFill>
-              <a:latin typeface="Calibri"/>
+              <a:latin typeface="Arial"/>
             </a:endParaRPr>
           </a:p>
         </p:txBody>
@@ -5190,7 +5257,7 @@
         <p:spPr>
           <a:xfrm>
             <a:off x="0" y="0"/>
-            <a:ext cx="14630040" cy="8229240"/>
+            <a:ext cx="14629680" cy="8228880"/>
           </a:xfrm>
           <a:prstGeom prst="rect">
             <a:avLst/>
@@ -5236,7 +5303,7 @@
         <p:spPr>
           <a:xfrm>
             <a:off x="0" y="0"/>
-            <a:ext cx="14630040" cy="8229240"/>
+            <a:ext cx="14629680" cy="8228880"/>
           </a:xfrm>
           <a:prstGeom prst="rect">
             <a:avLst/>
@@ -5301,23 +5368,23 @@
             <a:noAutofit/>
           </a:bodyPr>
           <a:p>
-            <a:pPr indent="0">
+            <a:pPr indent="0" algn="ctr">
               <a:buNone/>
             </a:pPr>
             <a:r>
-              <a:rPr b="0" lang="en-US" sz="1800" spc="-1" strike="noStrike">
-                <a:solidFill>
-                  <a:schemeClr val="dk1"/>
-                </a:solidFill>
-                <a:latin typeface="Calibri"/>
+              <a:rPr b="0" lang="en-US" sz="4400" spc="-1" strike="noStrike">
+                <a:solidFill>
+                  <a:srgbClr val="000000"/>
+                </a:solidFill>
+                <a:latin typeface="Arial"/>
               </a:rPr>
               <a:t>Click to edit the title text format</a:t>
             </a:r>
-            <a:endParaRPr b="0" lang="en-US" sz="1800" spc="-1" strike="noStrike">
+            <a:endParaRPr b="0" lang="en-US" sz="4400" spc="-1" strike="noStrike">
               <a:solidFill>
-                <a:schemeClr val="dk1"/>
+                <a:srgbClr val="000000"/>
               </a:solidFill>
-              <a:latin typeface="Calibri"/>
+              <a:latin typeface="Arial"/>
             </a:endParaRPr>
           </a:p>
         </p:txBody>
@@ -5364,17 +5431,17 @@
             <a:r>
               <a:rPr b="0" lang="en-US" sz="3200" spc="-1" strike="noStrike">
                 <a:solidFill>
-                  <a:schemeClr val="dk1"/>
-                </a:solidFill>
-                <a:latin typeface="Calibri"/>
+                  <a:srgbClr val="000000"/>
+                </a:solidFill>
+                <a:latin typeface="Arial"/>
               </a:rPr>
               <a:t>Click to edit the outline text format</a:t>
             </a:r>
             <a:endParaRPr b="0" lang="en-US" sz="3200" spc="-1" strike="noStrike">
               <a:solidFill>
-                <a:schemeClr val="dk1"/>
+                <a:srgbClr val="000000"/>
               </a:solidFill>
-              <a:latin typeface="Calibri"/>
+              <a:latin typeface="Arial"/>
             </a:endParaRPr>
           </a:p>
           <a:p>
@@ -5390,19 +5457,19 @@
               <a:buChar char=""/>
             </a:pPr>
             <a:r>
-              <a:rPr b="0" lang="en-US" sz="2400" spc="-1" strike="noStrike">
-                <a:solidFill>
-                  <a:schemeClr val="dk1"/>
-                </a:solidFill>
-                <a:latin typeface="Calibri"/>
+              <a:rPr b="0" lang="en-US" sz="2800" spc="-1" strike="noStrike">
+                <a:solidFill>
+                  <a:srgbClr val="000000"/>
+                </a:solidFill>
+                <a:latin typeface="Arial"/>
               </a:rPr>
               <a:t>Second Outline Level</a:t>
             </a:r>
-            <a:endParaRPr b="0" lang="en-US" sz="2400" spc="-1" strike="noStrike">
+            <a:endParaRPr b="0" lang="en-US" sz="2800" spc="-1" strike="noStrike">
               <a:solidFill>
-                <a:schemeClr val="dk1"/>
+                <a:srgbClr val="000000"/>
               </a:solidFill>
-              <a:latin typeface="Calibri"/>
+              <a:latin typeface="Arial"/>
             </a:endParaRPr>
           </a:p>
           <a:p>
@@ -5418,19 +5485,19 @@
               <a:buChar char=""/>
             </a:pPr>
             <a:r>
-              <a:rPr b="0" lang="en-US" sz="2000" spc="-1" strike="noStrike">
-                <a:solidFill>
-                  <a:schemeClr val="dk1"/>
-                </a:solidFill>
-                <a:latin typeface="Calibri"/>
+              <a:rPr b="0" lang="en-US" sz="2400" spc="-1" strike="noStrike">
+                <a:solidFill>
+                  <a:srgbClr val="000000"/>
+                </a:solidFill>
+                <a:latin typeface="Arial"/>
               </a:rPr>
               <a:t>Third Outline Level</a:t>
             </a:r>
-            <a:endParaRPr b="0" lang="en-US" sz="2000" spc="-1" strike="noStrike">
+            <a:endParaRPr b="0" lang="en-US" sz="2400" spc="-1" strike="noStrike">
               <a:solidFill>
-                <a:schemeClr val="dk1"/>
+                <a:srgbClr val="000000"/>
               </a:solidFill>
-              <a:latin typeface="Calibri"/>
+              <a:latin typeface="Arial"/>
             </a:endParaRPr>
           </a:p>
           <a:p>
@@ -5448,17 +5515,17 @@
             <a:r>
               <a:rPr b="0" lang="en-US" sz="2000" spc="-1" strike="noStrike">
                 <a:solidFill>
-                  <a:schemeClr val="dk1"/>
-                </a:solidFill>
-                <a:latin typeface="Calibri"/>
+                  <a:srgbClr val="000000"/>
+                </a:solidFill>
+                <a:latin typeface="Arial"/>
               </a:rPr>
               <a:t>Fourth Outline Level</a:t>
             </a:r>
             <a:endParaRPr b="0" lang="en-US" sz="2000" spc="-1" strike="noStrike">
               <a:solidFill>
-                <a:schemeClr val="dk1"/>
+                <a:srgbClr val="000000"/>
               </a:solidFill>
-              <a:latin typeface="Calibri"/>
+              <a:latin typeface="Arial"/>
             </a:endParaRPr>
           </a:p>
           <a:p>
@@ -5476,17 +5543,17 @@
             <a:r>
               <a:rPr b="0" lang="en-US" sz="2000" spc="-1" strike="noStrike">
                 <a:solidFill>
-                  <a:schemeClr val="dk1"/>
-                </a:solidFill>
-                <a:latin typeface="Calibri"/>
+                  <a:srgbClr val="000000"/>
+                </a:solidFill>
+                <a:latin typeface="Arial"/>
               </a:rPr>
               <a:t>Fifth Outline Level</a:t>
             </a:r>
             <a:endParaRPr b="0" lang="en-US" sz="2000" spc="-1" strike="noStrike">
               <a:solidFill>
-                <a:schemeClr val="dk1"/>
+                <a:srgbClr val="000000"/>
               </a:solidFill>
-              <a:latin typeface="Calibri"/>
+              <a:latin typeface="Arial"/>
             </a:endParaRPr>
           </a:p>
           <a:p>
@@ -5504,17 +5571,17 @@
             <a:r>
               <a:rPr b="0" lang="en-US" sz="2000" spc="-1" strike="noStrike">
                 <a:solidFill>
-                  <a:schemeClr val="dk1"/>
-                </a:solidFill>
-                <a:latin typeface="Calibri"/>
+                  <a:srgbClr val="000000"/>
+                </a:solidFill>
+                <a:latin typeface="Arial"/>
               </a:rPr>
               <a:t>Sixth Outline Level</a:t>
             </a:r>
             <a:endParaRPr b="0" lang="en-US" sz="2000" spc="-1" strike="noStrike">
               <a:solidFill>
-                <a:schemeClr val="dk1"/>
+                <a:srgbClr val="000000"/>
               </a:solidFill>
-              <a:latin typeface="Calibri"/>
+              <a:latin typeface="Arial"/>
             </a:endParaRPr>
           </a:p>
           <a:p>
@@ -5532,17 +5599,17 @@
             <a:r>
               <a:rPr b="0" lang="en-US" sz="2000" spc="-1" strike="noStrike">
                 <a:solidFill>
-                  <a:schemeClr val="dk1"/>
-                </a:solidFill>
-                <a:latin typeface="Calibri"/>
+                  <a:srgbClr val="000000"/>
+                </a:solidFill>
+                <a:latin typeface="Arial"/>
               </a:rPr>
               <a:t>Seventh Outline Level</a:t>
             </a:r>
             <a:endParaRPr b="0" lang="en-US" sz="2000" spc="-1" strike="noStrike">
               <a:solidFill>
-                <a:schemeClr val="dk1"/>
+                <a:srgbClr val="000000"/>
               </a:solidFill>
-              <a:latin typeface="Calibri"/>
+              <a:latin typeface="Arial"/>
             </a:endParaRPr>
           </a:p>
         </p:txBody>
@@ -5589,7 +5656,7 @@
         <p:spPr>
           <a:xfrm>
             <a:off x="0" y="0"/>
-            <a:ext cx="14630040" cy="8229240"/>
+            <a:ext cx="14629680" cy="8228880"/>
           </a:xfrm>
           <a:prstGeom prst="rect">
             <a:avLst/>
@@ -5635,7 +5702,7 @@
         <p:spPr>
           <a:xfrm>
             <a:off x="0" y="0"/>
-            <a:ext cx="14630040" cy="8229240"/>
+            <a:ext cx="14629680" cy="8228880"/>
           </a:xfrm>
           <a:prstGeom prst="rect">
             <a:avLst/>
@@ -5700,23 +5767,23 @@
             <a:noAutofit/>
           </a:bodyPr>
           <a:p>
-            <a:pPr indent="0">
+            <a:pPr indent="0" algn="ctr">
               <a:buNone/>
             </a:pPr>
             <a:r>
-              <a:rPr b="0" lang="en-US" sz="1800" spc="-1" strike="noStrike">
-                <a:solidFill>
-                  <a:schemeClr val="dk1"/>
-                </a:solidFill>
-                <a:latin typeface="Calibri"/>
+              <a:rPr b="0" lang="en-US" sz="4400" spc="-1" strike="noStrike">
+                <a:solidFill>
+                  <a:srgbClr val="000000"/>
+                </a:solidFill>
+                <a:latin typeface="Arial"/>
               </a:rPr>
               <a:t>Click to edit the title text format</a:t>
             </a:r>
-            <a:endParaRPr b="0" lang="en-US" sz="1800" spc="-1" strike="noStrike">
+            <a:endParaRPr b="0" lang="en-US" sz="4400" spc="-1" strike="noStrike">
               <a:solidFill>
-                <a:schemeClr val="dk1"/>
+                <a:srgbClr val="000000"/>
               </a:solidFill>
-              <a:latin typeface="Calibri"/>
+              <a:latin typeface="Arial"/>
             </a:endParaRPr>
           </a:p>
         </p:txBody>
@@ -5763,17 +5830,17 @@
             <a:r>
               <a:rPr b="0" lang="en-US" sz="3200" spc="-1" strike="noStrike">
                 <a:solidFill>
-                  <a:schemeClr val="dk1"/>
-                </a:solidFill>
-                <a:latin typeface="Calibri"/>
+                  <a:srgbClr val="000000"/>
+                </a:solidFill>
+                <a:latin typeface="Arial"/>
               </a:rPr>
               <a:t>Click to edit the outline text format</a:t>
             </a:r>
             <a:endParaRPr b="0" lang="en-US" sz="3200" spc="-1" strike="noStrike">
               <a:solidFill>
-                <a:schemeClr val="dk1"/>
+                <a:srgbClr val="000000"/>
               </a:solidFill>
-              <a:latin typeface="Calibri"/>
+              <a:latin typeface="Arial"/>
             </a:endParaRPr>
           </a:p>
           <a:p>
@@ -5789,19 +5856,19 @@
               <a:buChar char=""/>
             </a:pPr>
             <a:r>
-              <a:rPr b="0" lang="en-US" sz="2400" spc="-1" strike="noStrike">
-                <a:solidFill>
-                  <a:schemeClr val="dk1"/>
-                </a:solidFill>
-                <a:latin typeface="Calibri"/>
+              <a:rPr b="0" lang="en-US" sz="2800" spc="-1" strike="noStrike">
+                <a:solidFill>
+                  <a:srgbClr val="000000"/>
+                </a:solidFill>
+                <a:latin typeface="Arial"/>
               </a:rPr>
               <a:t>Second Outline Level</a:t>
             </a:r>
-            <a:endParaRPr b="0" lang="en-US" sz="2400" spc="-1" strike="noStrike">
+            <a:endParaRPr b="0" lang="en-US" sz="2800" spc="-1" strike="noStrike">
               <a:solidFill>
-                <a:schemeClr val="dk1"/>
+                <a:srgbClr val="000000"/>
               </a:solidFill>
-              <a:latin typeface="Calibri"/>
+              <a:latin typeface="Arial"/>
             </a:endParaRPr>
           </a:p>
           <a:p>
@@ -5817,19 +5884,19 @@
               <a:buChar char=""/>
             </a:pPr>
             <a:r>
-              <a:rPr b="0" lang="en-US" sz="2000" spc="-1" strike="noStrike">
-                <a:solidFill>
-                  <a:schemeClr val="dk1"/>
-                </a:solidFill>
-                <a:latin typeface="Calibri"/>
+              <a:rPr b="0" lang="en-US" sz="2400" spc="-1" strike="noStrike">
+                <a:solidFill>
+                  <a:srgbClr val="000000"/>
+                </a:solidFill>
+                <a:latin typeface="Arial"/>
               </a:rPr>
               <a:t>Third Outline Level</a:t>
             </a:r>
-            <a:endParaRPr b="0" lang="en-US" sz="2000" spc="-1" strike="noStrike">
+            <a:endParaRPr b="0" lang="en-US" sz="2400" spc="-1" strike="noStrike">
               <a:solidFill>
-                <a:schemeClr val="dk1"/>
+                <a:srgbClr val="000000"/>
               </a:solidFill>
-              <a:latin typeface="Calibri"/>
+              <a:latin typeface="Arial"/>
             </a:endParaRPr>
           </a:p>
           <a:p>
@@ -5847,17 +5914,17 @@
             <a:r>
               <a:rPr b="0" lang="en-US" sz="2000" spc="-1" strike="noStrike">
                 <a:solidFill>
-                  <a:schemeClr val="dk1"/>
-                </a:solidFill>
-                <a:latin typeface="Calibri"/>
+                  <a:srgbClr val="000000"/>
+                </a:solidFill>
+                <a:latin typeface="Arial"/>
               </a:rPr>
               <a:t>Fourth Outline Level</a:t>
             </a:r>
             <a:endParaRPr b="0" lang="en-US" sz="2000" spc="-1" strike="noStrike">
               <a:solidFill>
-                <a:schemeClr val="dk1"/>
+                <a:srgbClr val="000000"/>
               </a:solidFill>
-              <a:latin typeface="Calibri"/>
+              <a:latin typeface="Arial"/>
             </a:endParaRPr>
           </a:p>
           <a:p>
@@ -5875,17 +5942,17 @@
             <a:r>
               <a:rPr b="0" lang="en-US" sz="2000" spc="-1" strike="noStrike">
                 <a:solidFill>
-                  <a:schemeClr val="dk1"/>
-                </a:solidFill>
-                <a:latin typeface="Calibri"/>
+                  <a:srgbClr val="000000"/>
+                </a:solidFill>
+                <a:latin typeface="Arial"/>
               </a:rPr>
               <a:t>Fifth Outline Level</a:t>
             </a:r>
             <a:endParaRPr b="0" lang="en-US" sz="2000" spc="-1" strike="noStrike">
               <a:solidFill>
-                <a:schemeClr val="dk1"/>
+                <a:srgbClr val="000000"/>
               </a:solidFill>
-              <a:latin typeface="Calibri"/>
+              <a:latin typeface="Arial"/>
             </a:endParaRPr>
           </a:p>
           <a:p>
@@ -5903,17 +5970,17 @@
             <a:r>
               <a:rPr b="0" lang="en-US" sz="2000" spc="-1" strike="noStrike">
                 <a:solidFill>
-                  <a:schemeClr val="dk1"/>
-                </a:solidFill>
-                <a:latin typeface="Calibri"/>
+                  <a:srgbClr val="000000"/>
+                </a:solidFill>
+                <a:latin typeface="Arial"/>
               </a:rPr>
               <a:t>Sixth Outline Level</a:t>
             </a:r>
             <a:endParaRPr b="0" lang="en-US" sz="2000" spc="-1" strike="noStrike">
               <a:solidFill>
-                <a:schemeClr val="dk1"/>
+                <a:srgbClr val="000000"/>
               </a:solidFill>
-              <a:latin typeface="Calibri"/>
+              <a:latin typeface="Arial"/>
             </a:endParaRPr>
           </a:p>
           <a:p>
@@ -5931,17 +5998,17 @@
             <a:r>
               <a:rPr b="0" lang="en-US" sz="2000" spc="-1" strike="noStrike">
                 <a:solidFill>
-                  <a:schemeClr val="dk1"/>
-                </a:solidFill>
-                <a:latin typeface="Calibri"/>
+                  <a:srgbClr val="000000"/>
+                </a:solidFill>
+                <a:latin typeface="Arial"/>
               </a:rPr>
               <a:t>Seventh Outline Level</a:t>
             </a:r>
             <a:endParaRPr b="0" lang="en-US" sz="2000" spc="-1" strike="noStrike">
               <a:solidFill>
-                <a:schemeClr val="dk1"/>
+                <a:srgbClr val="000000"/>
               </a:solidFill>
-              <a:latin typeface="Calibri"/>
+              <a:latin typeface="Arial"/>
             </a:endParaRPr>
           </a:p>
         </p:txBody>
@@ -5988,7 +6055,7 @@
         <p:spPr>
           <a:xfrm>
             <a:off x="0" y="0"/>
-            <a:ext cx="14630040" cy="8229240"/>
+            <a:ext cx="14629680" cy="8228880"/>
           </a:xfrm>
           <a:prstGeom prst="rect">
             <a:avLst/>
@@ -6034,7 +6101,7 @@
         <p:spPr>
           <a:xfrm>
             <a:off x="0" y="0"/>
-            <a:ext cx="14630040" cy="8229240"/>
+            <a:ext cx="14629680" cy="8228880"/>
           </a:xfrm>
           <a:prstGeom prst="rect">
             <a:avLst/>
@@ -6099,23 +6166,23 @@
             <a:noAutofit/>
           </a:bodyPr>
           <a:p>
-            <a:pPr indent="0">
+            <a:pPr indent="0" algn="ctr">
               <a:buNone/>
             </a:pPr>
             <a:r>
-              <a:rPr b="0" lang="en-US" sz="1800" spc="-1" strike="noStrike">
-                <a:solidFill>
-                  <a:schemeClr val="dk1"/>
-                </a:solidFill>
-                <a:latin typeface="Calibri"/>
+              <a:rPr b="0" lang="en-US" sz="4400" spc="-1" strike="noStrike">
+                <a:solidFill>
+                  <a:srgbClr val="000000"/>
+                </a:solidFill>
+                <a:latin typeface="Arial"/>
               </a:rPr>
               <a:t>Click to edit the title text format</a:t>
             </a:r>
-            <a:endParaRPr b="0" lang="en-US" sz="1800" spc="-1" strike="noStrike">
+            <a:endParaRPr b="0" lang="en-US" sz="4400" spc="-1" strike="noStrike">
               <a:solidFill>
-                <a:schemeClr val="dk1"/>
+                <a:srgbClr val="000000"/>
               </a:solidFill>
-              <a:latin typeface="Calibri"/>
+              <a:latin typeface="Arial"/>
             </a:endParaRPr>
           </a:p>
         </p:txBody>
@@ -6162,17 +6229,17 @@
             <a:r>
               <a:rPr b="0" lang="en-US" sz="3200" spc="-1" strike="noStrike">
                 <a:solidFill>
-                  <a:schemeClr val="dk1"/>
-                </a:solidFill>
-                <a:latin typeface="Calibri"/>
+                  <a:srgbClr val="000000"/>
+                </a:solidFill>
+                <a:latin typeface="Arial"/>
               </a:rPr>
               <a:t>Click to edit the outline text format</a:t>
             </a:r>
             <a:endParaRPr b="0" lang="en-US" sz="3200" spc="-1" strike="noStrike">
               <a:solidFill>
-                <a:schemeClr val="dk1"/>
+                <a:srgbClr val="000000"/>
               </a:solidFill>
-              <a:latin typeface="Calibri"/>
+              <a:latin typeface="Arial"/>
             </a:endParaRPr>
           </a:p>
           <a:p>
@@ -6188,19 +6255,19 @@
               <a:buChar char=""/>
             </a:pPr>
             <a:r>
-              <a:rPr b="0" lang="en-US" sz="2400" spc="-1" strike="noStrike">
-                <a:solidFill>
-                  <a:schemeClr val="dk1"/>
-                </a:solidFill>
-                <a:latin typeface="Calibri"/>
+              <a:rPr b="0" lang="en-US" sz="2800" spc="-1" strike="noStrike">
+                <a:solidFill>
+                  <a:srgbClr val="000000"/>
+                </a:solidFill>
+                <a:latin typeface="Arial"/>
               </a:rPr>
               <a:t>Second Outline Level</a:t>
             </a:r>
-            <a:endParaRPr b="0" lang="en-US" sz="2400" spc="-1" strike="noStrike">
+            <a:endParaRPr b="0" lang="en-US" sz="2800" spc="-1" strike="noStrike">
               <a:solidFill>
-                <a:schemeClr val="dk1"/>
+                <a:srgbClr val="000000"/>
               </a:solidFill>
-              <a:latin typeface="Calibri"/>
+              <a:latin typeface="Arial"/>
             </a:endParaRPr>
           </a:p>
           <a:p>
@@ -6216,19 +6283,19 @@
               <a:buChar char=""/>
             </a:pPr>
             <a:r>
-              <a:rPr b="0" lang="en-US" sz="2000" spc="-1" strike="noStrike">
-                <a:solidFill>
-                  <a:schemeClr val="dk1"/>
-                </a:solidFill>
-                <a:latin typeface="Calibri"/>
+              <a:rPr b="0" lang="en-US" sz="2400" spc="-1" strike="noStrike">
+                <a:solidFill>
+                  <a:srgbClr val="000000"/>
+                </a:solidFill>
+                <a:latin typeface="Arial"/>
               </a:rPr>
               <a:t>Third Outline Level</a:t>
             </a:r>
-            <a:endParaRPr b="0" lang="en-US" sz="2000" spc="-1" strike="noStrike">
+            <a:endParaRPr b="0" lang="en-US" sz="2400" spc="-1" strike="noStrike">
               <a:solidFill>
-                <a:schemeClr val="dk1"/>
+                <a:srgbClr val="000000"/>
               </a:solidFill>
-              <a:latin typeface="Calibri"/>
+              <a:latin typeface="Arial"/>
             </a:endParaRPr>
           </a:p>
           <a:p>
@@ -6246,17 +6313,17 @@
             <a:r>
               <a:rPr b="0" lang="en-US" sz="2000" spc="-1" strike="noStrike">
                 <a:solidFill>
-                  <a:schemeClr val="dk1"/>
-                </a:solidFill>
-                <a:latin typeface="Calibri"/>
+                  <a:srgbClr val="000000"/>
+                </a:solidFill>
+                <a:latin typeface="Arial"/>
               </a:rPr>
               <a:t>Fourth Outline Level</a:t>
             </a:r>
             <a:endParaRPr b="0" lang="en-US" sz="2000" spc="-1" strike="noStrike">
               <a:solidFill>
-                <a:schemeClr val="dk1"/>
+                <a:srgbClr val="000000"/>
               </a:solidFill>
-              <a:latin typeface="Calibri"/>
+              <a:latin typeface="Arial"/>
             </a:endParaRPr>
           </a:p>
           <a:p>
@@ -6274,17 +6341,17 @@
             <a:r>
               <a:rPr b="0" lang="en-US" sz="2000" spc="-1" strike="noStrike">
                 <a:solidFill>
-                  <a:schemeClr val="dk1"/>
-                </a:solidFill>
-                <a:latin typeface="Calibri"/>
+                  <a:srgbClr val="000000"/>
+                </a:solidFill>
+                <a:latin typeface="Arial"/>
               </a:rPr>
               <a:t>Fifth Outline Level</a:t>
             </a:r>
             <a:endParaRPr b="0" lang="en-US" sz="2000" spc="-1" strike="noStrike">
               <a:solidFill>
-                <a:schemeClr val="dk1"/>
+                <a:srgbClr val="000000"/>
               </a:solidFill>
-              <a:latin typeface="Calibri"/>
+              <a:latin typeface="Arial"/>
             </a:endParaRPr>
           </a:p>
           <a:p>
@@ -6302,17 +6369,17 @@
             <a:r>
               <a:rPr b="0" lang="en-US" sz="2000" spc="-1" strike="noStrike">
                 <a:solidFill>
-                  <a:schemeClr val="dk1"/>
-                </a:solidFill>
-                <a:latin typeface="Calibri"/>
+                  <a:srgbClr val="000000"/>
+                </a:solidFill>
+                <a:latin typeface="Arial"/>
               </a:rPr>
               <a:t>Sixth Outline Level</a:t>
             </a:r>
             <a:endParaRPr b="0" lang="en-US" sz="2000" spc="-1" strike="noStrike">
               <a:solidFill>
-                <a:schemeClr val="dk1"/>
+                <a:srgbClr val="000000"/>
               </a:solidFill>
-              <a:latin typeface="Calibri"/>
+              <a:latin typeface="Arial"/>
             </a:endParaRPr>
           </a:p>
           <a:p>
@@ -6330,17 +6397,17 @@
             <a:r>
               <a:rPr b="0" lang="en-US" sz="2000" spc="-1" strike="noStrike">
                 <a:solidFill>
-                  <a:schemeClr val="dk1"/>
-                </a:solidFill>
-                <a:latin typeface="Calibri"/>
+                  <a:srgbClr val="000000"/>
+                </a:solidFill>
+                <a:latin typeface="Arial"/>
               </a:rPr>
               <a:t>Seventh Outline Level</a:t>
             </a:r>
             <a:endParaRPr b="0" lang="en-US" sz="2000" spc="-1" strike="noStrike">
               <a:solidFill>
-                <a:schemeClr val="dk1"/>
+                <a:srgbClr val="000000"/>
               </a:solidFill>
-              <a:latin typeface="Calibri"/>
+              <a:latin typeface="Arial"/>
             </a:endParaRPr>
           </a:p>
         </p:txBody>
@@ -6387,7 +6454,7 @@
         <p:spPr>
           <a:xfrm>
             <a:off x="0" y="0"/>
-            <a:ext cx="14630040" cy="8229240"/>
+            <a:ext cx="14629680" cy="8228880"/>
           </a:xfrm>
           <a:prstGeom prst="rect">
             <a:avLst/>
@@ -6433,7 +6500,7 @@
         <p:spPr>
           <a:xfrm>
             <a:off x="0" y="0"/>
-            <a:ext cx="14630040" cy="8229240"/>
+            <a:ext cx="14629680" cy="8228880"/>
           </a:xfrm>
           <a:prstGeom prst="rect">
             <a:avLst/>
@@ -6498,23 +6565,23 @@
             <a:noAutofit/>
           </a:bodyPr>
           <a:p>
-            <a:pPr indent="0">
+            <a:pPr indent="0" algn="ctr">
               <a:buNone/>
             </a:pPr>
             <a:r>
-              <a:rPr b="0" lang="en-US" sz="1800" spc="-1" strike="noStrike">
-                <a:solidFill>
-                  <a:schemeClr val="dk1"/>
-                </a:solidFill>
-                <a:latin typeface="Calibri"/>
+              <a:rPr b="0" lang="en-US" sz="4400" spc="-1" strike="noStrike">
+                <a:solidFill>
+                  <a:srgbClr val="000000"/>
+                </a:solidFill>
+                <a:latin typeface="Arial"/>
               </a:rPr>
               <a:t>Click to edit the title text format</a:t>
             </a:r>
-            <a:endParaRPr b="0" lang="en-US" sz="1800" spc="-1" strike="noStrike">
+            <a:endParaRPr b="0" lang="en-US" sz="4400" spc="-1" strike="noStrike">
               <a:solidFill>
-                <a:schemeClr val="dk1"/>
+                <a:srgbClr val="000000"/>
               </a:solidFill>
-              <a:latin typeface="Calibri"/>
+              <a:latin typeface="Arial"/>
             </a:endParaRPr>
           </a:p>
         </p:txBody>
@@ -6561,17 +6628,17 @@
             <a:r>
               <a:rPr b="0" lang="en-US" sz="3200" spc="-1" strike="noStrike">
                 <a:solidFill>
-                  <a:schemeClr val="dk1"/>
-                </a:solidFill>
-                <a:latin typeface="Calibri"/>
+                  <a:srgbClr val="000000"/>
+                </a:solidFill>
+                <a:latin typeface="Arial"/>
               </a:rPr>
               <a:t>Click to edit the outline text format</a:t>
             </a:r>
             <a:endParaRPr b="0" lang="en-US" sz="3200" spc="-1" strike="noStrike">
               <a:solidFill>
-                <a:schemeClr val="dk1"/>
+                <a:srgbClr val="000000"/>
               </a:solidFill>
-              <a:latin typeface="Calibri"/>
+              <a:latin typeface="Arial"/>
             </a:endParaRPr>
           </a:p>
           <a:p>
@@ -6587,19 +6654,19 @@
               <a:buChar char=""/>
             </a:pPr>
             <a:r>
-              <a:rPr b="0" lang="en-US" sz="2400" spc="-1" strike="noStrike">
-                <a:solidFill>
-                  <a:schemeClr val="dk1"/>
-                </a:solidFill>
-                <a:latin typeface="Calibri"/>
+              <a:rPr b="0" lang="en-US" sz="2800" spc="-1" strike="noStrike">
+                <a:solidFill>
+                  <a:srgbClr val="000000"/>
+                </a:solidFill>
+                <a:latin typeface="Arial"/>
               </a:rPr>
               <a:t>Second Outline Level</a:t>
             </a:r>
-            <a:endParaRPr b="0" lang="en-US" sz="2400" spc="-1" strike="noStrike">
+            <a:endParaRPr b="0" lang="en-US" sz="2800" spc="-1" strike="noStrike">
               <a:solidFill>
-                <a:schemeClr val="dk1"/>
+                <a:srgbClr val="000000"/>
               </a:solidFill>
-              <a:latin typeface="Calibri"/>
+              <a:latin typeface="Arial"/>
             </a:endParaRPr>
           </a:p>
           <a:p>
@@ -6615,19 +6682,19 @@
               <a:buChar char=""/>
             </a:pPr>
             <a:r>
-              <a:rPr b="0" lang="en-US" sz="2000" spc="-1" strike="noStrike">
-                <a:solidFill>
-                  <a:schemeClr val="dk1"/>
-                </a:solidFill>
-                <a:latin typeface="Calibri"/>
+              <a:rPr b="0" lang="en-US" sz="2400" spc="-1" strike="noStrike">
+                <a:solidFill>
+                  <a:srgbClr val="000000"/>
+                </a:solidFill>
+                <a:latin typeface="Arial"/>
               </a:rPr>
               <a:t>Third Outline Level</a:t>
             </a:r>
-            <a:endParaRPr b="0" lang="en-US" sz="2000" spc="-1" strike="noStrike">
+            <a:endParaRPr b="0" lang="en-US" sz="2400" spc="-1" strike="noStrike">
               <a:solidFill>
-                <a:schemeClr val="dk1"/>
+                <a:srgbClr val="000000"/>
               </a:solidFill>
-              <a:latin typeface="Calibri"/>
+              <a:latin typeface="Arial"/>
             </a:endParaRPr>
           </a:p>
           <a:p>
@@ -6645,17 +6712,17 @@
             <a:r>
               <a:rPr b="0" lang="en-US" sz="2000" spc="-1" strike="noStrike">
                 <a:solidFill>
-                  <a:schemeClr val="dk1"/>
-                </a:solidFill>
-                <a:latin typeface="Calibri"/>
+                  <a:srgbClr val="000000"/>
+                </a:solidFill>
+                <a:latin typeface="Arial"/>
               </a:rPr>
               <a:t>Fourth Outline Level</a:t>
             </a:r>
             <a:endParaRPr b="0" lang="en-US" sz="2000" spc="-1" strike="noStrike">
               <a:solidFill>
-                <a:schemeClr val="dk1"/>
+                <a:srgbClr val="000000"/>
               </a:solidFill>
-              <a:latin typeface="Calibri"/>
+              <a:latin typeface="Arial"/>
             </a:endParaRPr>
           </a:p>
           <a:p>
@@ -6673,17 +6740,17 @@
             <a:r>
               <a:rPr b="0" lang="en-US" sz="2000" spc="-1" strike="noStrike">
                 <a:solidFill>
-                  <a:schemeClr val="dk1"/>
-                </a:solidFill>
-                <a:latin typeface="Calibri"/>
+                  <a:srgbClr val="000000"/>
+                </a:solidFill>
+                <a:latin typeface="Arial"/>
               </a:rPr>
               <a:t>Fifth Outline Level</a:t>
             </a:r>
             <a:endParaRPr b="0" lang="en-US" sz="2000" spc="-1" strike="noStrike">
               <a:solidFill>
-                <a:schemeClr val="dk1"/>
+                <a:srgbClr val="000000"/>
               </a:solidFill>
-              <a:latin typeface="Calibri"/>
+              <a:latin typeface="Arial"/>
             </a:endParaRPr>
           </a:p>
           <a:p>
@@ -6701,17 +6768,17 @@
             <a:r>
               <a:rPr b="0" lang="en-US" sz="2000" spc="-1" strike="noStrike">
                 <a:solidFill>
-                  <a:schemeClr val="dk1"/>
-                </a:solidFill>
-                <a:latin typeface="Calibri"/>
+                  <a:srgbClr val="000000"/>
+                </a:solidFill>
+                <a:latin typeface="Arial"/>
               </a:rPr>
               <a:t>Sixth Outline Level</a:t>
             </a:r>
             <a:endParaRPr b="0" lang="en-US" sz="2000" spc="-1" strike="noStrike">
               <a:solidFill>
-                <a:schemeClr val="dk1"/>
+                <a:srgbClr val="000000"/>
               </a:solidFill>
-              <a:latin typeface="Calibri"/>
+              <a:latin typeface="Arial"/>
             </a:endParaRPr>
           </a:p>
           <a:p>
@@ -6729,17 +6796,17 @@
             <a:r>
               <a:rPr b="0" lang="en-US" sz="2000" spc="-1" strike="noStrike">
                 <a:solidFill>
-                  <a:schemeClr val="dk1"/>
-                </a:solidFill>
-                <a:latin typeface="Calibri"/>
+                  <a:srgbClr val="000000"/>
+                </a:solidFill>
+                <a:latin typeface="Arial"/>
               </a:rPr>
               <a:t>Seventh Outline Level</a:t>
             </a:r>
             <a:endParaRPr b="0" lang="en-US" sz="2000" spc="-1" strike="noStrike">
               <a:solidFill>
-                <a:schemeClr val="dk1"/>
+                <a:srgbClr val="000000"/>
               </a:solidFill>
-              <a:latin typeface="Calibri"/>
+              <a:latin typeface="Arial"/>
             </a:endParaRPr>
           </a:p>
         </p:txBody>
@@ -6783,7 +6850,7 @@
         <p:spPr>
           <a:xfrm>
             <a:off x="9144000" y="0"/>
-            <a:ext cx="5486040" cy="8229240"/>
+            <a:ext cx="5485680" cy="8228880"/>
           </a:xfrm>
           <a:prstGeom prst="rect">
             <a:avLst/>
@@ -6802,9 +6869,9 @@
         <p:grpSpPr>
           <a:xfrm>
             <a:off x="120240" y="2394360"/>
-            <a:ext cx="8939160" cy="4463280"/>
+            <a:ext cx="8938800" cy="4462920"/>
             <a:chOff x="120240" y="2394360"/>
-            <a:chExt cx="8939160" cy="4463280"/>
+            <a:chExt cx="8938800" cy="4462920"/>
           </a:xfrm>
         </p:grpSpPr>
         <p:sp>
@@ -6816,7 +6883,7 @@
           <p:spPr>
             <a:xfrm>
               <a:off x="120240" y="2394360"/>
-              <a:ext cx="8939160" cy="1335240"/>
+              <a:ext cx="8938800" cy="1334880"/>
             </a:xfrm>
             <a:prstGeom prst="rect">
               <a:avLst/>
@@ -6873,7 +6940,7 @@
           <p:spPr>
             <a:xfrm>
               <a:off x="120240" y="4068360"/>
-              <a:ext cx="8939160" cy="1674720"/>
+              <a:ext cx="8938800" cy="1674360"/>
             </a:xfrm>
             <a:prstGeom prst="rect">
               <a:avLst/>
@@ -6930,7 +6997,7 @@
           <p:spPr>
             <a:xfrm>
               <a:off x="120240" y="6175080"/>
-              <a:ext cx="1352880" cy="669240"/>
+              <a:ext cx="1352520" cy="668880"/>
             </a:xfrm>
             <a:prstGeom prst="roundRect">
               <a:avLst>
@@ -6978,7 +7045,7 @@
           <p:spPr>
             <a:xfrm>
               <a:off x="276480" y="6286680"/>
-              <a:ext cx="1040400" cy="446040"/>
+              <a:ext cx="1040040" cy="445680"/>
             </a:xfrm>
             <a:prstGeom prst="rect">
               <a:avLst/>
@@ -7035,7 +7102,7 @@
           <p:spPr>
             <a:xfrm>
               <a:off x="1603440" y="6162120"/>
-              <a:ext cx="3187080" cy="695520"/>
+              <a:ext cx="3186720" cy="695160"/>
             </a:xfrm>
             <a:prstGeom prst="roundRect">
               <a:avLst>
@@ -7084,7 +7151,7 @@
           <p:spPr>
             <a:xfrm>
               <a:off x="1768680" y="6286680"/>
-              <a:ext cx="2856240" cy="446040"/>
+              <a:ext cx="2855880" cy="445680"/>
             </a:xfrm>
             <a:prstGeom prst="rect">
               <a:avLst/>
@@ -7172,9 +7239,9 @@
         <p:grpSpPr>
           <a:xfrm>
             <a:off x="228600" y="228600"/>
-            <a:ext cx="14078520" cy="7699320"/>
+            <a:ext cx="14078160" cy="7698960"/>
             <a:chOff x="228600" y="228600"/>
-            <a:chExt cx="14078520" cy="7699320"/>
+            <a:chExt cx="14078160" cy="7698960"/>
           </a:xfrm>
         </p:grpSpPr>
         <p:sp>
@@ -7186,7 +7253,7 @@
           <p:spPr>
             <a:xfrm>
               <a:off x="228600" y="228600"/>
-              <a:ext cx="5681880" cy="496440"/>
+              <a:ext cx="5681520" cy="496080"/>
             </a:xfrm>
             <a:prstGeom prst="rect">
               <a:avLst/>
@@ -7243,7 +7310,7 @@
           <p:spPr>
             <a:xfrm>
               <a:off x="228600" y="939240"/>
-              <a:ext cx="14067720" cy="422280"/>
+              <a:ext cx="14067360" cy="421920"/>
             </a:xfrm>
             <a:prstGeom prst="rect">
               <a:avLst/>
@@ -7300,7 +7367,7 @@
           <p:spPr>
             <a:xfrm>
               <a:off x="228600" y="1482120"/>
-              <a:ext cx="4609080" cy="3195000"/>
+              <a:ext cx="4608720" cy="3194640"/>
             </a:xfrm>
             <a:prstGeom prst="roundRect">
               <a:avLst>
@@ -7348,7 +7415,7 @@
           <p:spPr>
             <a:xfrm>
               <a:off x="424440" y="1656720"/>
-              <a:ext cx="588600" cy="524160"/>
+              <a:ext cx="588240" cy="523800"/>
             </a:xfrm>
             <a:prstGeom prst="roundRect">
               <a:avLst>
@@ -7406,7 +7473,7 @@
           <p:spPr>
             <a:xfrm>
               <a:off x="586440" y="1801080"/>
-              <a:ext cx="264240" cy="235440"/>
+              <a:ext cx="263880" cy="235080"/>
             </a:xfrm>
             <a:prstGeom prst="rect">
               <a:avLst/>
@@ -7425,7 +7492,7 @@
           <p:spPr>
             <a:xfrm>
               <a:off x="424440" y="2288520"/>
-              <a:ext cx="2229840" cy="248040"/>
+              <a:ext cx="2229480" cy="247680"/>
             </a:xfrm>
             <a:prstGeom prst="rect">
               <a:avLst/>
@@ -7482,7 +7549,7 @@
           <p:spPr>
             <a:xfrm>
               <a:off x="424440" y="2601000"/>
-              <a:ext cx="4217040" cy="1267560"/>
+              <a:ext cx="4216680" cy="1267200"/>
             </a:xfrm>
             <a:prstGeom prst="rect">
               <a:avLst/>
@@ -7539,7 +7606,7 @@
           <p:spPr>
             <a:xfrm>
               <a:off x="4957920" y="1482120"/>
-              <a:ext cx="4609080" cy="3195000"/>
+              <a:ext cx="4608720" cy="3194640"/>
             </a:xfrm>
             <a:prstGeom prst="roundRect">
               <a:avLst>
@@ -7587,7 +7654,7 @@
           <p:spPr>
             <a:xfrm>
               <a:off x="5153760" y="1656720"/>
-              <a:ext cx="588600" cy="524160"/>
+              <a:ext cx="588240" cy="523800"/>
             </a:xfrm>
             <a:prstGeom prst="roundRect">
               <a:avLst>
@@ -7645,7 +7712,7 @@
           <p:spPr>
             <a:xfrm>
               <a:off x="5315760" y="1801080"/>
-              <a:ext cx="264240" cy="235440"/>
+              <a:ext cx="263880" cy="235080"/>
             </a:xfrm>
             <a:prstGeom prst="rect">
               <a:avLst/>
@@ -7664,7 +7731,7 @@
           <p:spPr>
             <a:xfrm>
               <a:off x="5153760" y="2288520"/>
-              <a:ext cx="2919960" cy="248040"/>
+              <a:ext cx="2919600" cy="247680"/>
             </a:xfrm>
             <a:prstGeom prst="rect">
               <a:avLst/>
@@ -7721,7 +7788,7 @@
           <p:spPr>
             <a:xfrm>
               <a:off x="5153760" y="2601000"/>
-              <a:ext cx="4217040" cy="1901160"/>
+              <a:ext cx="4216680" cy="1900800"/>
             </a:xfrm>
             <a:prstGeom prst="rect">
               <a:avLst/>
@@ -7778,7 +7845,7 @@
           <p:spPr>
             <a:xfrm>
               <a:off x="9687240" y="1482120"/>
-              <a:ext cx="4609080" cy="3195000"/>
+              <a:ext cx="4608720" cy="3194640"/>
             </a:xfrm>
             <a:prstGeom prst="roundRect">
               <a:avLst>
@@ -7826,7 +7893,7 @@
           <p:spPr>
             <a:xfrm>
               <a:off x="9883440" y="1656720"/>
-              <a:ext cx="588600" cy="524160"/>
+              <a:ext cx="588240" cy="523800"/>
             </a:xfrm>
             <a:prstGeom prst="roundRect">
               <a:avLst>
@@ -7884,7 +7951,7 @@
           <p:spPr>
             <a:xfrm>
               <a:off x="10045080" y="1801080"/>
-              <a:ext cx="264240" cy="235440"/>
+              <a:ext cx="263880" cy="235080"/>
             </a:xfrm>
             <a:prstGeom prst="rect">
               <a:avLst/>
@@ -7903,7 +7970,7 @@
           <p:spPr>
             <a:xfrm>
               <a:off x="9883440" y="2288520"/>
-              <a:ext cx="2229840" cy="248040"/>
+              <a:ext cx="2229480" cy="247680"/>
             </a:xfrm>
             <a:prstGeom prst="rect">
               <a:avLst/>
@@ -7960,7 +8027,7 @@
           <p:spPr>
             <a:xfrm>
               <a:off x="9883440" y="2601000"/>
-              <a:ext cx="4217040" cy="1267560"/>
+              <a:ext cx="4216680" cy="1267200"/>
             </a:xfrm>
             <a:prstGeom prst="rect">
               <a:avLst/>
@@ -8017,7 +8084,7 @@
           <p:spPr>
             <a:xfrm>
               <a:off x="228600" y="4904640"/>
-              <a:ext cx="3578040" cy="248040"/>
+              <a:ext cx="3577680" cy="247680"/>
             </a:xfrm>
             <a:prstGeom prst="rect">
               <a:avLst/>
@@ -8074,7 +8141,7 @@
           <p:spPr>
             <a:xfrm>
               <a:off x="228600" y="5259600"/>
-              <a:ext cx="9654480" cy="1118880"/>
+              <a:ext cx="9654120" cy="1118520"/>
             </a:xfrm>
             <a:prstGeom prst="rect">
               <a:avLst/>
@@ -8211,7 +8278,7 @@
           <p:spPr>
             <a:xfrm>
               <a:off x="8967600" y="5005080"/>
-              <a:ext cx="5339520" cy="576360"/>
+              <a:ext cx="5339160" cy="576000"/>
             </a:xfrm>
             <a:prstGeom prst="rect">
               <a:avLst/>
@@ -8268,7 +8335,7 @@
           <p:spPr>
             <a:xfrm>
               <a:off x="10503360" y="5749560"/>
-              <a:ext cx="2268360" cy="248040"/>
+              <a:ext cx="2268000" cy="247680"/>
             </a:xfrm>
             <a:prstGeom prst="rect">
               <a:avLst/>
@@ -8325,7 +8392,7 @@
           <p:spPr>
             <a:xfrm>
               <a:off x="8967600" y="6105240"/>
-              <a:ext cx="5339520" cy="210600"/>
+              <a:ext cx="5339160" cy="210240"/>
             </a:xfrm>
             <a:prstGeom prst="rect">
               <a:avLst/>
@@ -8382,7 +8449,7 @@
           <p:spPr>
             <a:xfrm>
               <a:off x="8967600" y="6617520"/>
-              <a:ext cx="5339520" cy="576360"/>
+              <a:ext cx="5339160" cy="576000"/>
             </a:xfrm>
             <a:prstGeom prst="rect">
               <a:avLst/>
@@ -8439,7 +8506,7 @@
           <p:spPr>
             <a:xfrm>
               <a:off x="10515600" y="7361640"/>
-              <a:ext cx="2243520" cy="248040"/>
+              <a:ext cx="2243160" cy="247680"/>
             </a:xfrm>
             <a:prstGeom prst="rect">
               <a:avLst/>
@@ -8496,7 +8563,7 @@
           <p:spPr>
             <a:xfrm>
               <a:off x="8967600" y="7716960"/>
-              <a:ext cx="5339520" cy="210960"/>
+              <a:ext cx="5339160" cy="210600"/>
             </a:xfrm>
             <a:prstGeom prst="rect">
               <a:avLst/>
@@ -8584,9 +8651,9 @@
         <p:grpSpPr>
           <a:xfrm>
             <a:off x="376200" y="387360"/>
-            <a:ext cx="13920480" cy="7615800"/>
+            <a:ext cx="13920120" cy="7615440"/>
             <a:chOff x="376200" y="387360"/>
-            <a:chExt cx="13920480" cy="7615800"/>
+            <a:chExt cx="13920120" cy="7615440"/>
           </a:xfrm>
         </p:grpSpPr>
         <p:sp>
@@ -8598,7 +8665,7 @@
           <p:spPr>
             <a:xfrm>
               <a:off x="376200" y="387360"/>
-              <a:ext cx="4408920" cy="473760"/>
+              <a:ext cx="4408560" cy="473400"/>
             </a:xfrm>
             <a:prstGeom prst="rect">
               <a:avLst/>
@@ -8655,7 +8722,7 @@
           <p:spPr>
             <a:xfrm>
               <a:off x="376200" y="1047600"/>
-              <a:ext cx="13908240" cy="194400"/>
+              <a:ext cx="13907880" cy="194040"/>
             </a:xfrm>
             <a:prstGeom prst="rect">
               <a:avLst/>
@@ -8712,7 +8779,7 @@
           <p:spPr>
             <a:xfrm>
               <a:off x="376200" y="1597680"/>
-              <a:ext cx="4563720" cy="1872000"/>
+              <a:ext cx="4563360" cy="1871640"/>
             </a:xfrm>
             <a:prstGeom prst="roundRect">
               <a:avLst>
@@ -8760,7 +8827,7 @@
           <p:spPr>
             <a:xfrm>
               <a:off x="376200" y="1576440"/>
-              <a:ext cx="4563720" cy="83880"/>
+              <a:ext cx="4563360" cy="83520"/>
             </a:xfrm>
             <a:prstGeom prst="roundRect">
               <a:avLst>
@@ -8808,7 +8875,7 @@
           <p:spPr>
             <a:xfrm>
               <a:off x="2367360" y="1347120"/>
-              <a:ext cx="581760" cy="500400"/>
+              <a:ext cx="581400" cy="500040"/>
             </a:xfrm>
             <a:prstGeom prst="roundRect">
               <a:avLst>
@@ -8856,7 +8923,7 @@
           <p:spPr>
             <a:xfrm>
               <a:off x="2541960" y="1472400"/>
-              <a:ext cx="232200" cy="249840"/>
+              <a:ext cx="231840" cy="249480"/>
             </a:xfrm>
             <a:prstGeom prst="rect">
               <a:avLst/>
@@ -8913,7 +8980,7 @@
           <p:spPr>
             <a:xfrm>
               <a:off x="594720" y="2014920"/>
-              <a:ext cx="3471840" cy="236880"/>
+              <a:ext cx="3471480" cy="236520"/>
             </a:xfrm>
             <a:prstGeom prst="rect">
               <a:avLst/>
@@ -8970,7 +9037,7 @@
           <p:spPr>
             <a:xfrm>
               <a:off x="594720" y="2307960"/>
-              <a:ext cx="4126680" cy="974160"/>
+              <a:ext cx="4126320" cy="973800"/>
             </a:xfrm>
             <a:prstGeom prst="rect">
               <a:avLst/>
@@ -9027,7 +9094,7 @@
           <p:spPr>
             <a:xfrm>
               <a:off x="5048640" y="1597680"/>
-              <a:ext cx="4563720" cy="1872000"/>
+              <a:ext cx="4563360" cy="1871640"/>
             </a:xfrm>
             <a:prstGeom prst="roundRect">
               <a:avLst>
@@ -9075,7 +9142,7 @@
           <p:spPr>
             <a:xfrm>
               <a:off x="5048640" y="1576440"/>
-              <a:ext cx="4563720" cy="83880"/>
+              <a:ext cx="4563360" cy="83520"/>
             </a:xfrm>
             <a:prstGeom prst="roundRect">
               <a:avLst>
@@ -9123,7 +9190,7 @@
           <p:spPr>
             <a:xfrm>
               <a:off x="7039440" y="1347120"/>
-              <a:ext cx="581760" cy="500400"/>
+              <a:ext cx="581400" cy="500040"/>
             </a:xfrm>
             <a:prstGeom prst="roundRect">
               <a:avLst>
@@ -9171,7 +9238,7 @@
           <p:spPr>
             <a:xfrm>
               <a:off x="7214040" y="1472400"/>
-              <a:ext cx="232200" cy="249840"/>
+              <a:ext cx="231840" cy="249480"/>
             </a:xfrm>
             <a:prstGeom prst="rect">
               <a:avLst/>
@@ -9228,7 +9295,7 @@
           <p:spPr>
             <a:xfrm>
               <a:off x="5267160" y="2014920"/>
-              <a:ext cx="3695400" cy="236880"/>
+              <a:ext cx="3695040" cy="236520"/>
             </a:xfrm>
             <a:prstGeom prst="rect">
               <a:avLst/>
@@ -9285,7 +9352,7 @@
           <p:spPr>
             <a:xfrm>
               <a:off x="5267160" y="2307960"/>
-              <a:ext cx="4126680" cy="779040"/>
+              <a:ext cx="4126320" cy="778680"/>
             </a:xfrm>
             <a:prstGeom prst="rect">
               <a:avLst/>
@@ -9342,7 +9409,7 @@
           <p:spPr>
             <a:xfrm>
               <a:off x="9720720" y="1597680"/>
-              <a:ext cx="4563720" cy="1872000"/>
+              <a:ext cx="4563360" cy="1871640"/>
             </a:xfrm>
             <a:prstGeom prst="roundRect">
               <a:avLst>
@@ -9390,7 +9457,7 @@
           <p:spPr>
             <a:xfrm>
               <a:off x="9720720" y="1576440"/>
-              <a:ext cx="4563720" cy="83880"/>
+              <a:ext cx="4563360" cy="83520"/>
             </a:xfrm>
             <a:prstGeom prst="roundRect">
               <a:avLst>
@@ -9438,7 +9505,7 @@
           <p:spPr>
             <a:xfrm>
               <a:off x="11711880" y="1347120"/>
-              <a:ext cx="581760" cy="500400"/>
+              <a:ext cx="581400" cy="500040"/>
             </a:xfrm>
             <a:prstGeom prst="roundRect">
               <a:avLst>
@@ -9486,7 +9553,7 @@
           <p:spPr>
             <a:xfrm>
               <a:off x="11886480" y="1472400"/>
-              <a:ext cx="232200" cy="249840"/>
+              <a:ext cx="231840" cy="249480"/>
             </a:xfrm>
             <a:prstGeom prst="rect">
               <a:avLst/>
@@ -9543,7 +9610,7 @@
           <p:spPr>
             <a:xfrm>
               <a:off x="9939240" y="2014920"/>
-              <a:ext cx="3180600" cy="236880"/>
+              <a:ext cx="3180240" cy="236520"/>
             </a:xfrm>
             <a:prstGeom prst="rect">
               <a:avLst/>
@@ -9600,7 +9667,7 @@
           <p:spPr>
             <a:xfrm>
               <a:off x="9939240" y="2307960"/>
-              <a:ext cx="4126680" cy="779040"/>
+              <a:ext cx="4126320" cy="778680"/>
             </a:xfrm>
             <a:prstGeom prst="rect">
               <a:avLst/>
@@ -9657,7 +9724,7 @@
           <p:spPr>
             <a:xfrm>
               <a:off x="568440" y="3990600"/>
-              <a:ext cx="6746400" cy="936720"/>
+              <a:ext cx="6746040" cy="936360"/>
             </a:xfrm>
             <a:prstGeom prst="roundRect">
               <a:avLst>
@@ -9705,7 +9772,7 @@
           <p:spPr>
             <a:xfrm>
               <a:off x="568440" y="3681360"/>
-              <a:ext cx="2442960" cy="236880"/>
+              <a:ext cx="2442600" cy="236520"/>
             </a:xfrm>
             <a:prstGeom prst="rect">
               <a:avLst/>
@@ -9782,7 +9849,7 @@
           <p:spPr>
             <a:xfrm>
               <a:off x="643680" y="4135320"/>
-              <a:ext cx="6608520" cy="1171800"/>
+              <a:ext cx="6608160" cy="1171440"/>
             </a:xfrm>
             <a:prstGeom prst="rect">
               <a:avLst/>
@@ -9953,7 +10020,7 @@
           <p:spPr>
             <a:xfrm>
               <a:off x="7579440" y="3668040"/>
-              <a:ext cx="3361680" cy="236880"/>
+              <a:ext cx="3361320" cy="236520"/>
             </a:xfrm>
             <a:prstGeom prst="rect">
               <a:avLst/>
@@ -10030,7 +10097,7 @@
           <p:spPr>
             <a:xfrm>
               <a:off x="7579440" y="4093200"/>
-              <a:ext cx="6050880" cy="208080"/>
+              <a:ext cx="6050520" cy="207720"/>
             </a:xfrm>
             <a:prstGeom prst="roundRect">
               <a:avLst>
@@ -10078,7 +10145,7 @@
           <p:spPr>
             <a:xfrm>
               <a:off x="7579440" y="4093200"/>
-              <a:ext cx="1814760" cy="208080"/>
+              <a:ext cx="1814400" cy="207720"/>
             </a:xfrm>
             <a:prstGeom prst="roundRect">
               <a:avLst>
@@ -10126,7 +10193,7 @@
           <p:spPr>
             <a:xfrm>
               <a:off x="13776120" y="4093200"/>
-              <a:ext cx="520560" cy="208080"/>
+              <a:ext cx="520200" cy="207720"/>
             </a:xfrm>
             <a:prstGeom prst="rect">
               <a:avLst/>
@@ -10183,7 +10250,7 @@
           <p:spPr>
             <a:xfrm>
               <a:off x="7579440" y="4454640"/>
-              <a:ext cx="2206080" cy="236880"/>
+              <a:ext cx="2205720" cy="236520"/>
             </a:xfrm>
             <a:prstGeom prst="rect">
               <a:avLst/>
@@ -10240,7 +10307,7 @@
           <p:spPr>
             <a:xfrm>
               <a:off x="7579440" y="4961520"/>
-              <a:ext cx="6050880" cy="208080"/>
+              <a:ext cx="6050520" cy="207720"/>
             </a:xfrm>
             <a:prstGeom prst="roundRect">
               <a:avLst>
@@ -10288,7 +10355,7 @@
           <p:spPr>
             <a:xfrm>
               <a:off x="7579440" y="4961520"/>
-              <a:ext cx="1814760" cy="208080"/>
+              <a:ext cx="1814400" cy="207720"/>
             </a:xfrm>
             <a:prstGeom prst="roundRect">
               <a:avLst>
@@ -10336,7 +10403,7 @@
           <p:spPr>
             <a:xfrm>
               <a:off x="13776120" y="4961520"/>
-              <a:ext cx="520560" cy="208080"/>
+              <a:ext cx="520200" cy="207720"/>
             </a:xfrm>
             <a:prstGeom prst="rect">
               <a:avLst/>
@@ -10393,7 +10460,7 @@
           <p:spPr>
             <a:xfrm>
               <a:off x="7579440" y="5323320"/>
-              <a:ext cx="3619440" cy="236880"/>
+              <a:ext cx="3619080" cy="236520"/>
             </a:xfrm>
             <a:prstGeom prst="rect">
               <a:avLst/>
@@ -10450,7 +10517,7 @@
           <p:spPr>
             <a:xfrm>
               <a:off x="7579440" y="5830200"/>
-              <a:ext cx="6074280" cy="208080"/>
+              <a:ext cx="6073920" cy="207720"/>
             </a:xfrm>
             <a:prstGeom prst="roundRect">
               <a:avLst>
@@ -10498,7 +10565,7 @@
           <p:spPr>
             <a:xfrm>
               <a:off x="7579440" y="5830200"/>
-              <a:ext cx="1518120" cy="208080"/>
+              <a:ext cx="1517760" cy="207720"/>
             </a:xfrm>
             <a:prstGeom prst="roundRect">
               <a:avLst>
@@ -10546,7 +10613,7 @@
           <p:spPr>
             <a:xfrm>
               <a:off x="13799520" y="5830200"/>
-              <a:ext cx="497160" cy="208080"/>
+              <a:ext cx="496800" cy="207720"/>
             </a:xfrm>
             <a:prstGeom prst="rect">
               <a:avLst/>
@@ -10603,7 +10670,7 @@
           <p:spPr>
             <a:xfrm>
               <a:off x="7579440" y="6192000"/>
-              <a:ext cx="3041280" cy="236880"/>
+              <a:ext cx="3040920" cy="236520"/>
             </a:xfrm>
             <a:prstGeom prst="rect">
               <a:avLst/>
@@ -10660,7 +10727,7 @@
           <p:spPr>
             <a:xfrm>
               <a:off x="7579440" y="6698520"/>
-              <a:ext cx="6122160" cy="208080"/>
+              <a:ext cx="6121800" cy="207720"/>
             </a:xfrm>
             <a:prstGeom prst="roundRect">
               <a:avLst>
@@ -10708,7 +10775,7 @@
           <p:spPr>
             <a:xfrm>
               <a:off x="7579440" y="6698520"/>
-              <a:ext cx="918000" cy="208080"/>
+              <a:ext cx="917640" cy="207720"/>
             </a:xfrm>
             <a:prstGeom prst="roundRect">
               <a:avLst>
@@ -10756,7 +10823,7 @@
           <p:spPr>
             <a:xfrm>
               <a:off x="13847400" y="6698520"/>
-              <a:ext cx="449280" cy="208080"/>
+              <a:ext cx="448920" cy="207720"/>
             </a:xfrm>
             <a:prstGeom prst="rect">
               <a:avLst/>
@@ -10813,7 +10880,7 @@
           <p:spPr>
             <a:xfrm>
               <a:off x="7579440" y="7060320"/>
-              <a:ext cx="2498760" cy="236880"/>
+              <a:ext cx="2498400" cy="236520"/>
             </a:xfrm>
             <a:prstGeom prst="rect">
               <a:avLst/>
@@ -10870,7 +10937,7 @@
           <p:spPr>
             <a:xfrm>
               <a:off x="376200" y="7506720"/>
-              <a:ext cx="13908240" cy="496440"/>
+              <a:ext cx="13907880" cy="496080"/>
             </a:xfrm>
             <a:prstGeom prst="roundRect">
               <a:avLst>
@@ -10922,7 +10989,7 @@
           <p:spPr>
             <a:xfrm>
               <a:off x="570240" y="7716960"/>
-              <a:ext cx="241920" cy="166320"/>
+              <a:ext cx="241560" cy="165960"/>
             </a:xfrm>
             <a:prstGeom prst="rect">
               <a:avLst/>
@@ -10941,7 +11008,7 @@
           <p:spPr>
             <a:xfrm>
               <a:off x="1006560" y="7641720"/>
-              <a:ext cx="13083840" cy="194400"/>
+              <a:ext cx="13083480" cy="194040"/>
             </a:xfrm>
             <a:prstGeom prst="rect">
               <a:avLst/>
@@ -11052,8 +11119,8 @@
         </p:blipFill>
         <p:spPr>
           <a:xfrm>
-            <a:off x="457200" y="5715000"/>
-            <a:ext cx="1600200" cy="1600200"/>
+            <a:off x="643680" y="5078160"/>
+            <a:ext cx="2237040" cy="2237040"/>
           </a:xfrm>
           <a:prstGeom prst="rect">
             <a:avLst/>
@@ -11093,9 +11160,63 @@
           <a:chExt cx="0" cy="0"/>
         </a:xfrm>
       </p:grpSpPr>
+      <p:sp>
+        <p:nvSpPr>
+          <p:cNvPr id="325" name=""/>
+          <p:cNvSpPr/>
+          <p:nvPr/>
+        </p:nvSpPr>
+        <p:spPr>
+          <a:xfrm>
+            <a:off x="4998600" y="228600"/>
+            <a:ext cx="3200040" cy="600840"/>
+          </a:xfrm>
+          <a:prstGeom prst="rect">
+            <a:avLst/>
+          </a:prstGeom>
+          <a:noFill/>
+          <a:ln w="0">
+            <a:noFill/>
+          </a:ln>
+        </p:spPr>
+        <p:style>
+          <a:lnRef idx="0"/>
+          <a:fillRef idx="0"/>
+          <a:effectRef idx="0"/>
+          <a:fontRef idx="minor"/>
+        </p:style>
+        <p:txBody>
+          <a:bodyPr lIns="90000" rIns="90000" tIns="45000" bIns="45000" anchor="t">
+            <a:noAutofit/>
+          </a:bodyPr>
+          <a:p>
+            <a:pPr>
+              <a:lnSpc>
+                <a:spcPct val="100000"/>
+              </a:lnSpc>
+            </a:pPr>
+            <a:r>
+              <a:rPr b="1" lang="en-US" sz="2950" spc="-1" strike="noStrike">
+                <a:solidFill>
+                  <a:srgbClr val="ffffff"/>
+                </a:solidFill>
+                <a:latin typeface="Montserrat Bold"/>
+                <a:ea typeface="Montserrat Bold"/>
+              </a:rPr>
+              <a:t>Test Tapşirigı L5</a:t>
+            </a:r>
+            <a:endParaRPr b="0" lang="en-US" sz="2950" spc="-1" strike="noStrike">
+              <a:solidFill>
+                <a:srgbClr val="000000"/>
+              </a:solidFill>
+              <a:latin typeface="Arial"/>
+            </a:endParaRPr>
+          </a:p>
+        </p:txBody>
+      </p:sp>
       <p:pic>
         <p:nvPicPr>
-          <p:cNvPr id="325" name="" descr=""/>
+          <p:cNvPr id="326" name="" descr=""/>
           <p:cNvPicPr/>
           <p:nvPr/>
         </p:nvPicPr>
@@ -11105,8 +11226,8 @@
         </p:blipFill>
         <p:spPr>
           <a:xfrm>
-            <a:off x="4050000" y="958680"/>
-            <a:ext cx="5486400" cy="7134840"/>
+            <a:off x="3657600" y="1143000"/>
+            <a:ext cx="5715000" cy="5715000"/>
           </a:xfrm>
           <a:prstGeom prst="rect">
             <a:avLst/>
@@ -11116,49 +11237,6 @@
           </a:ln>
         </p:spPr>
       </p:pic>
-      <p:sp>
-        <p:nvSpPr>
-          <p:cNvPr id="326" name=""/>
-          <p:cNvSpPr txBox="1"/>
-          <p:nvPr/>
-        </p:nvSpPr>
-        <p:spPr>
-          <a:xfrm>
-            <a:off x="4998600" y="228600"/>
-            <a:ext cx="3200400" cy="601200"/>
-          </a:xfrm>
-          <a:prstGeom prst="rect">
-            <a:avLst/>
-          </a:prstGeom>
-          <a:noFill/>
-          <a:ln w="0">
-            <a:noFill/>
-          </a:ln>
-        </p:spPr>
-        <p:txBody>
-          <a:bodyPr lIns="90000" rIns="90000" tIns="45000" bIns="45000" anchor="t">
-            <a:noAutofit/>
-          </a:bodyPr>
-          <a:p>
-            <a:r>
-              <a:rPr b="1" lang="en-US" sz="2950" spc="-1" strike="noStrike">
-                <a:solidFill>
-                  <a:srgbClr val="ffffff"/>
-                </a:solidFill>
-                <a:latin typeface="Montserrat Bold"/>
-                <a:ea typeface="Montserrat Bold"/>
-              </a:rPr>
-              <a:t>Test Tapşirigı L5</a:t>
-            </a:r>
-            <a:endParaRPr b="0" lang="en-US" sz="2950" spc="-1" strike="noStrike">
-              <a:solidFill>
-                <a:srgbClr val="000000"/>
-              </a:solidFill>
-              <a:latin typeface="Arial"/>
-            </a:endParaRPr>
-          </a:p>
-        </p:txBody>
-      </p:sp>
     </p:spTree>
   </p:cSld>
   <mc:AlternateContent>
@@ -11198,9 +11276,9 @@
         <p:grpSpPr>
           <a:xfrm>
             <a:off x="268920" y="247320"/>
-            <a:ext cx="14167440" cy="7820640"/>
+            <a:ext cx="14167080" cy="7820280"/>
             <a:chOff x="268920" y="247320"/>
-            <a:chExt cx="14167440" cy="7820640"/>
+            <a:chExt cx="14167080" cy="7820280"/>
           </a:xfrm>
         </p:grpSpPr>
         <p:sp>
@@ -11212,7 +11290,7 @@
           <p:spPr>
             <a:xfrm>
               <a:off x="268920" y="247320"/>
-              <a:ext cx="6690600" cy="660600"/>
+              <a:ext cx="6690240" cy="660240"/>
             </a:xfrm>
             <a:prstGeom prst="rect">
               <a:avLst/>
@@ -11269,7 +11347,7 @@
           <p:spPr>
             <a:xfrm>
               <a:off x="268920" y="1308240"/>
-              <a:ext cx="14167440" cy="648360"/>
+              <a:ext cx="14167080" cy="648000"/>
             </a:xfrm>
             <a:prstGeom prst="rect">
               <a:avLst/>
@@ -11326,7 +11404,7 @@
           <p:spPr>
             <a:xfrm>
               <a:off x="268920" y="2181600"/>
-              <a:ext cx="6997680" cy="2286360"/>
+              <a:ext cx="6997320" cy="2286000"/>
             </a:xfrm>
             <a:prstGeom prst="roundRect">
               <a:avLst>
@@ -11377,7 +11455,7 @@
           <p:spPr>
             <a:xfrm>
               <a:off x="293400" y="2210400"/>
-              <a:ext cx="6948360" cy="697680"/>
+              <a:ext cx="6948000" cy="697320"/>
             </a:xfrm>
             <a:prstGeom prst="roundRect">
               <a:avLst>
@@ -11425,7 +11503,7 @@
           <p:spPr>
             <a:xfrm>
               <a:off x="3618000" y="2341080"/>
-              <a:ext cx="299520" cy="435960"/>
+              <a:ext cx="299160" cy="435600"/>
             </a:xfrm>
             <a:prstGeom prst="rect">
               <a:avLst/>
@@ -11482,7 +11560,7 @@
           <p:spPr>
             <a:xfrm>
               <a:off x="493560" y="3108240"/>
-              <a:ext cx="2630160" cy="330120"/>
+              <a:ext cx="2629800" cy="329760"/>
             </a:xfrm>
             <a:prstGeom prst="rect">
               <a:avLst/>
@@ -11539,7 +11617,7 @@
           <p:spPr>
             <a:xfrm>
               <a:off x="493560" y="3558600"/>
-              <a:ext cx="6548400" cy="648360"/>
+              <a:ext cx="6548040" cy="648000"/>
             </a:xfrm>
             <a:prstGeom prst="rect">
               <a:avLst/>
@@ -11596,7 +11674,7 @@
           <p:spPr>
             <a:xfrm>
               <a:off x="7438680" y="2181600"/>
-              <a:ext cx="6997680" cy="2286360"/>
+              <a:ext cx="6997320" cy="2286000"/>
             </a:xfrm>
             <a:prstGeom prst="roundRect">
               <a:avLst>
@@ -11647,7 +11725,7 @@
           <p:spPr>
             <a:xfrm>
               <a:off x="7463160" y="2210400"/>
-              <a:ext cx="6948360" cy="697680"/>
+              <a:ext cx="6948000" cy="697320"/>
             </a:xfrm>
             <a:prstGeom prst="roundRect">
               <a:avLst>
@@ -11695,7 +11773,7 @@
           <p:spPr>
             <a:xfrm>
               <a:off x="10787760" y="2341080"/>
-              <a:ext cx="299520" cy="435960"/>
+              <a:ext cx="299160" cy="435600"/>
             </a:xfrm>
             <a:prstGeom prst="rect">
               <a:avLst/>
@@ -11752,7 +11830,7 @@
           <p:spPr>
             <a:xfrm>
               <a:off x="7663320" y="3108240"/>
-              <a:ext cx="3368160" cy="330120"/>
+              <a:ext cx="3367800" cy="329760"/>
             </a:xfrm>
             <a:prstGeom prst="rect">
               <a:avLst/>
@@ -11809,7 +11887,7 @@
           <p:spPr>
             <a:xfrm>
               <a:off x="7663320" y="3558600"/>
-              <a:ext cx="6548760" cy="648360"/>
+              <a:ext cx="6548400" cy="648000"/>
             </a:xfrm>
             <a:prstGeom prst="rect">
               <a:avLst/>
@@ -11866,7 +11944,7 @@
           <p:spPr>
             <a:xfrm>
               <a:off x="268920" y="4668480"/>
-              <a:ext cx="6997680" cy="2286360"/>
+              <a:ext cx="6997320" cy="2286000"/>
             </a:xfrm>
             <a:prstGeom prst="roundRect">
               <a:avLst>
@@ -11917,7 +11995,7 @@
           <p:spPr>
             <a:xfrm>
               <a:off x="293400" y="4697280"/>
-              <a:ext cx="6948360" cy="697680"/>
+              <a:ext cx="6948000" cy="697320"/>
             </a:xfrm>
             <a:prstGeom prst="roundRect">
               <a:avLst>
@@ -11965,7 +12043,7 @@
           <p:spPr>
             <a:xfrm>
               <a:off x="3618000" y="4827960"/>
-              <a:ext cx="299520" cy="435960"/>
+              <a:ext cx="299160" cy="435600"/>
             </a:xfrm>
             <a:prstGeom prst="rect">
               <a:avLst/>
@@ -12022,7 +12100,7 @@
           <p:spPr>
             <a:xfrm>
               <a:off x="493560" y="5595120"/>
-              <a:ext cx="3031200" cy="330120"/>
+              <a:ext cx="3030840" cy="329760"/>
             </a:xfrm>
             <a:prstGeom prst="rect">
               <a:avLst/>
@@ -12079,7 +12157,7 @@
           <p:spPr>
             <a:xfrm>
               <a:off x="493560" y="6045120"/>
-              <a:ext cx="6548400" cy="648360"/>
+              <a:ext cx="6548040" cy="648000"/>
             </a:xfrm>
             <a:prstGeom prst="rect">
               <a:avLst/>
@@ -12136,7 +12214,7 @@
           <p:spPr>
             <a:xfrm>
               <a:off x="7438680" y="4668480"/>
-              <a:ext cx="6997680" cy="2286360"/>
+              <a:ext cx="6997320" cy="2286000"/>
             </a:xfrm>
             <a:prstGeom prst="roundRect">
               <a:avLst>
@@ -12187,7 +12265,7 @@
           <p:spPr>
             <a:xfrm>
               <a:off x="7463160" y="4697280"/>
-              <a:ext cx="6948360" cy="697680"/>
+              <a:ext cx="6948000" cy="697320"/>
             </a:xfrm>
             <a:prstGeom prst="roundRect">
               <a:avLst>
@@ -12235,7 +12313,7 @@
           <p:spPr>
             <a:xfrm>
               <a:off x="10787760" y="4827960"/>
-              <a:ext cx="299520" cy="435960"/>
+              <a:ext cx="299160" cy="435600"/>
             </a:xfrm>
             <a:prstGeom prst="rect">
               <a:avLst/>
@@ -12292,7 +12370,7 @@
           <p:spPr>
             <a:xfrm>
               <a:off x="7663320" y="5595120"/>
-              <a:ext cx="3046320" cy="330120"/>
+              <a:ext cx="3045960" cy="329760"/>
             </a:xfrm>
             <a:prstGeom prst="rect">
               <a:avLst/>
@@ -12349,7 +12427,7 @@
           <p:spPr>
             <a:xfrm>
               <a:off x="7663320" y="6045120"/>
-              <a:ext cx="6548760" cy="648360"/>
+              <a:ext cx="6548400" cy="648000"/>
             </a:xfrm>
             <a:prstGeom prst="rect">
               <a:avLst/>
@@ -12406,7 +12484,7 @@
           <p:spPr>
             <a:xfrm>
               <a:off x="268920" y="7180200"/>
-              <a:ext cx="14167440" cy="887760"/>
+              <a:ext cx="14167080" cy="887400"/>
             </a:xfrm>
             <a:prstGeom prst="roundRect">
               <a:avLst>
@@ -12458,7 +12536,7 @@
           <p:spPr>
             <a:xfrm>
               <a:off x="468720" y="7496280"/>
-              <a:ext cx="249480" cy="232200"/>
+              <a:ext cx="249120" cy="231840"/>
             </a:xfrm>
             <a:prstGeom prst="rect">
               <a:avLst/>
@@ -12477,7 +12555,7 @@
           <p:spPr>
             <a:xfrm>
               <a:off x="918720" y="7437960"/>
-              <a:ext cx="13317840" cy="333720"/>
+              <a:ext cx="13317480" cy="333360"/>
             </a:xfrm>
             <a:prstGeom prst="rect">
               <a:avLst/>
@@ -12595,9 +12673,9 @@
         <p:grpSpPr>
           <a:xfrm>
             <a:off x="369720" y="359640"/>
-            <a:ext cx="13859280" cy="7499880"/>
+            <a:ext cx="13858920" cy="7499520"/>
             <a:chOff x="369720" y="359640"/>
-            <a:chExt cx="13859280" cy="7499880"/>
+            <a:chExt cx="13858920" cy="7499520"/>
           </a:xfrm>
         </p:grpSpPr>
         <p:sp>
@@ -12609,7 +12687,7 @@
           <p:spPr>
             <a:xfrm>
               <a:off x="369720" y="359640"/>
-              <a:ext cx="5206320" cy="687240"/>
+              <a:ext cx="5205960" cy="686880"/>
             </a:xfrm>
             <a:prstGeom prst="rect">
               <a:avLst/>
@@ -12666,7 +12744,7 @@
           <p:spPr>
             <a:xfrm>
               <a:off x="369720" y="1652400"/>
-              <a:ext cx="2603160" cy="343440"/>
+              <a:ext cx="2602800" cy="343080"/>
             </a:xfrm>
             <a:prstGeom prst="rect">
               <a:avLst/>
@@ -12723,7 +12801,7 @@
           <p:spPr>
             <a:xfrm>
               <a:off x="369720" y="2238120"/>
-              <a:ext cx="7275600" cy="1452240"/>
+              <a:ext cx="7275240" cy="1451880"/>
             </a:xfrm>
             <a:prstGeom prst="rect">
               <a:avLst/>
@@ -12860,7 +12938,7 @@
           <p:spPr>
             <a:xfrm>
               <a:off x="369720" y="3908880"/>
-              <a:ext cx="7275600" cy="1815480"/>
+              <a:ext cx="7275240" cy="1815120"/>
             </a:xfrm>
             <a:prstGeom prst="rect">
               <a:avLst/>
@@ -12917,7 +12995,7 @@
           <p:spPr>
             <a:xfrm>
               <a:off x="369720" y="5966640"/>
-              <a:ext cx="2603160" cy="343440"/>
+              <a:ext cx="2602800" cy="343080"/>
             </a:xfrm>
             <a:prstGeom prst="rect">
               <a:avLst/>
@@ -12974,7 +13052,7 @@
           <p:spPr>
             <a:xfrm>
               <a:off x="369720" y="6552360"/>
-              <a:ext cx="7275600" cy="1089000"/>
+              <a:ext cx="7275240" cy="1088640"/>
             </a:xfrm>
             <a:prstGeom prst="rect">
               <a:avLst/>
@@ -13031,7 +13109,7 @@
           <p:spPr>
             <a:xfrm>
               <a:off x="8047800" y="1410480"/>
-              <a:ext cx="6181200" cy="6449040"/>
+              <a:ext cx="6180840" cy="6448680"/>
             </a:xfrm>
             <a:prstGeom prst="roundRect">
               <a:avLst>
@@ -13079,7 +13157,7 @@
           <p:spPr>
             <a:xfrm>
               <a:off x="8277120" y="1652400"/>
-              <a:ext cx="2826000" cy="343440"/>
+              <a:ext cx="2825640" cy="343080"/>
             </a:xfrm>
             <a:prstGeom prst="rect">
               <a:avLst/>
@@ -13136,7 +13214,7 @@
           <p:spPr>
             <a:xfrm>
               <a:off x="8277120" y="2268360"/>
-              <a:ext cx="515160" cy="544320"/>
+              <a:ext cx="514800" cy="543960"/>
             </a:xfrm>
             <a:prstGeom prst="roundRect">
               <a:avLst>
@@ -13184,7 +13262,7 @@
           <p:spPr>
             <a:xfrm>
               <a:off x="8378280" y="2334600"/>
-              <a:ext cx="312120" cy="412200"/>
+              <a:ext cx="311760" cy="411840"/>
             </a:xfrm>
             <a:prstGeom prst="rect">
               <a:avLst/>
@@ -13241,7 +13319,7 @@
           <p:spPr>
             <a:xfrm>
               <a:off x="9021240" y="2351520"/>
-              <a:ext cx="2603160" cy="343440"/>
+              <a:ext cx="2602800" cy="343080"/>
             </a:xfrm>
             <a:prstGeom prst="rect">
               <a:avLst/>
@@ -13298,7 +13376,7 @@
           <p:spPr>
             <a:xfrm>
               <a:off x="9021240" y="2937600"/>
-              <a:ext cx="4979160" cy="726120"/>
+              <a:ext cx="4978800" cy="725760"/>
             </a:xfrm>
             <a:prstGeom prst="rect">
               <a:avLst/>
@@ -13355,7 +13433,7 @@
           <p:spPr>
             <a:xfrm>
               <a:off x="8277120" y="4147920"/>
-              <a:ext cx="515160" cy="544320"/>
+              <a:ext cx="514800" cy="543960"/>
             </a:xfrm>
             <a:prstGeom prst="roundRect">
               <a:avLst>
@@ -13403,7 +13481,7 @@
           <p:spPr>
             <a:xfrm>
               <a:off x="8378280" y="4213800"/>
-              <a:ext cx="312120" cy="412200"/>
+              <a:ext cx="311760" cy="411840"/>
             </a:xfrm>
             <a:prstGeom prst="rect">
               <a:avLst/>
@@ -13460,7 +13538,7 @@
           <p:spPr>
             <a:xfrm>
               <a:off x="9021240" y="4231080"/>
-              <a:ext cx="2603160" cy="343440"/>
+              <a:ext cx="2602800" cy="343080"/>
             </a:xfrm>
             <a:prstGeom prst="rect">
               <a:avLst/>
@@ -13517,7 +13595,7 @@
           <p:spPr>
             <a:xfrm>
               <a:off x="9021240" y="4816800"/>
-              <a:ext cx="4979160" cy="726120"/>
+              <a:ext cx="4978800" cy="725760"/>
             </a:xfrm>
             <a:prstGeom prst="rect">
               <a:avLst/>
@@ -13574,7 +13652,7 @@
           <p:spPr>
             <a:xfrm>
               <a:off x="8277120" y="6027480"/>
-              <a:ext cx="515160" cy="544320"/>
+              <a:ext cx="514800" cy="543960"/>
             </a:xfrm>
             <a:prstGeom prst="roundRect">
               <a:avLst>
@@ -13622,7 +13700,7 @@
           <p:spPr>
             <a:xfrm>
               <a:off x="8378280" y="6093360"/>
-              <a:ext cx="312120" cy="412200"/>
+              <a:ext cx="311760" cy="411840"/>
             </a:xfrm>
             <a:prstGeom prst="rect">
               <a:avLst/>
@@ -13679,7 +13757,7 @@
           <p:spPr>
             <a:xfrm>
               <a:off x="9021240" y="6110280"/>
-              <a:ext cx="2603160" cy="343440"/>
+              <a:ext cx="2602800" cy="343080"/>
             </a:xfrm>
             <a:prstGeom prst="rect">
               <a:avLst/>
@@ -13736,7 +13814,7 @@
           <p:spPr>
             <a:xfrm>
               <a:off x="9021240" y="6696360"/>
-              <a:ext cx="4979160" cy="362880"/>
+              <a:ext cx="4978800" cy="362520"/>
             </a:xfrm>
             <a:prstGeom prst="rect">
               <a:avLst/>
@@ -13824,7 +13902,7 @@
         <p:spPr>
           <a:xfrm>
             <a:off x="139680" y="172080"/>
-            <a:ext cx="5176800" cy="639720"/>
+            <a:ext cx="5176440" cy="639360"/>
           </a:xfrm>
           <a:prstGeom prst="rect">
             <a:avLst/>
@@ -13881,7 +13959,7 @@
         <p:spPr>
           <a:xfrm>
             <a:off x="139680" y="1203480"/>
-            <a:ext cx="14178240" cy="630720"/>
+            <a:ext cx="14177880" cy="630360"/>
           </a:xfrm>
           <a:prstGeom prst="rect">
             <a:avLst/>
@@ -13942,7 +14020,7 @@
         <p:spPr>
           <a:xfrm>
             <a:off x="139680" y="2054520"/>
-            <a:ext cx="2655720" cy="1824480"/>
+            <a:ext cx="2655360" cy="1824120"/>
           </a:xfrm>
           <a:prstGeom prst="rect">
             <a:avLst/>
@@ -13961,7 +14039,7 @@
         <p:spPr>
           <a:xfrm>
             <a:off x="139680" y="4123800"/>
-            <a:ext cx="2827800" cy="319680"/>
+            <a:ext cx="2827440" cy="319320"/>
           </a:xfrm>
           <a:prstGeom prst="rect">
             <a:avLst/>
@@ -14018,7 +14096,7 @@
         <p:spPr>
           <a:xfrm>
             <a:off x="139680" y="4561200"/>
-            <a:ext cx="4579200" cy="2208960"/>
+            <a:ext cx="4578840" cy="2208600"/>
           </a:xfrm>
           <a:prstGeom prst="rect">
             <a:avLst/>
@@ -14085,7 +14163,7 @@
         <p:spPr>
           <a:xfrm>
             <a:off x="139680" y="6518880"/>
-            <a:ext cx="4579200" cy="1083240"/>
+            <a:ext cx="4578840" cy="1082880"/>
           </a:xfrm>
           <a:prstGeom prst="rect">
             <a:avLst/>
@@ -14204,7 +14282,7 @@
         <p:spPr>
           <a:xfrm>
             <a:off x="4939200" y="2054520"/>
-            <a:ext cx="2655720" cy="1824480"/>
+            <a:ext cx="2655360" cy="1824120"/>
           </a:xfrm>
           <a:prstGeom prst="rect">
             <a:avLst/>
@@ -14223,7 +14301,7 @@
         <p:spPr>
           <a:xfrm>
             <a:off x="4939200" y="4123800"/>
-            <a:ext cx="2302560" cy="319680"/>
+            <a:ext cx="2302200" cy="319320"/>
           </a:xfrm>
           <a:prstGeom prst="rect">
             <a:avLst/>
@@ -14280,7 +14358,7 @@
         <p:spPr>
           <a:xfrm>
             <a:off x="4939200" y="4561200"/>
-            <a:ext cx="4579200" cy="1577520"/>
+            <a:ext cx="4578840" cy="1577160"/>
           </a:xfrm>
           <a:prstGeom prst="rect">
             <a:avLst/>
@@ -14347,7 +14425,7 @@
         <p:spPr>
           <a:xfrm>
             <a:off x="4917600" y="6504840"/>
-            <a:ext cx="4579200" cy="1083240"/>
+            <a:ext cx="4578840" cy="1082880"/>
           </a:xfrm>
           <a:prstGeom prst="rect">
             <a:avLst/>
@@ -14466,7 +14544,7 @@
         <p:spPr>
           <a:xfrm>
             <a:off x="9738720" y="2054520"/>
-            <a:ext cx="2655720" cy="1824480"/>
+            <a:ext cx="2655360" cy="1824120"/>
           </a:xfrm>
           <a:prstGeom prst="rect">
             <a:avLst/>
@@ -14485,7 +14563,7 @@
         <p:spPr>
           <a:xfrm>
             <a:off x="9738720" y="4123800"/>
-            <a:ext cx="2451960" cy="319680"/>
+            <a:ext cx="2451600" cy="319320"/>
           </a:xfrm>
           <a:prstGeom prst="rect">
             <a:avLst/>
@@ -14542,7 +14620,7 @@
         <p:spPr>
           <a:xfrm>
             <a:off x="9738720" y="4561200"/>
-            <a:ext cx="4579200" cy="1893240"/>
+            <a:ext cx="4578840" cy="1892880"/>
           </a:xfrm>
           <a:prstGeom prst="rect">
             <a:avLst/>
@@ -14609,7 +14687,7 @@
         <p:spPr>
           <a:xfrm>
             <a:off x="9746280" y="6519240"/>
-            <a:ext cx="4579200" cy="1083240"/>
+            <a:ext cx="4578840" cy="1082880"/>
           </a:xfrm>
           <a:prstGeom prst="rect">
             <a:avLst/>
@@ -14754,7 +14832,7 @@
         <p:spPr>
           <a:xfrm>
             <a:off x="333360" y="322560"/>
-            <a:ext cx="8425080" cy="581040"/>
+            <a:ext cx="8424720" cy="580680"/>
           </a:xfrm>
           <a:prstGeom prst="rect">
             <a:avLst/>
@@ -14811,7 +14889,7 @@
         <p:spPr>
           <a:xfrm>
             <a:off x="333360" y="1229400"/>
-            <a:ext cx="14070600" cy="275040"/>
+            <a:ext cx="14070240" cy="274680"/>
           </a:xfrm>
           <a:prstGeom prst="rect">
             <a:avLst/>
@@ -14872,7 +14950,7 @@
         <p:spPr>
           <a:xfrm>
             <a:off x="1506240" y="1687680"/>
-            <a:ext cx="11981160" cy="3234600"/>
+            <a:ext cx="11980800" cy="3234240"/>
           </a:xfrm>
           <a:prstGeom prst="rect">
             <a:avLst/>
@@ -14891,7 +14969,7 @@
         <p:spPr>
           <a:xfrm>
             <a:off x="2410560" y="2781360"/>
-            <a:ext cx="1772280" cy="300240"/>
+            <a:ext cx="1771920" cy="299880"/>
           </a:xfrm>
           <a:prstGeom prst="rect">
             <a:avLst/>
@@ -14948,7 +15026,7 @@
         <p:spPr>
           <a:xfrm>
             <a:off x="2410560" y="3176280"/>
-            <a:ext cx="1772280" cy="712080"/>
+            <a:ext cx="1771920" cy="711720"/>
           </a:xfrm>
           <a:prstGeom prst="rect">
             <a:avLst/>
@@ -15005,7 +15083,7 @@
         <p:spPr>
           <a:xfrm>
             <a:off x="4441680" y="2958480"/>
-            <a:ext cx="1772280" cy="300240"/>
+            <a:ext cx="1771920" cy="299880"/>
           </a:xfrm>
           <a:prstGeom prst="rect">
             <a:avLst/>
@@ -15062,7 +15140,7 @@
         <p:spPr>
           <a:xfrm>
             <a:off x="4441680" y="3353400"/>
-            <a:ext cx="1772280" cy="474480"/>
+            <a:ext cx="1771920" cy="474120"/>
           </a:xfrm>
           <a:prstGeom prst="rect">
             <a:avLst/>
@@ -15119,7 +15197,7 @@
         <p:spPr>
           <a:xfrm>
             <a:off x="6580800" y="2781360"/>
-            <a:ext cx="1772280" cy="300240"/>
+            <a:ext cx="1771920" cy="299880"/>
           </a:xfrm>
           <a:prstGeom prst="rect">
             <a:avLst/>
@@ -15176,7 +15254,7 @@
         <p:spPr>
           <a:xfrm>
             <a:off x="6580800" y="3176280"/>
-            <a:ext cx="1772280" cy="474480"/>
+            <a:ext cx="1771920" cy="474120"/>
           </a:xfrm>
           <a:prstGeom prst="rect">
             <a:avLst/>
@@ -15233,7 +15311,7 @@
         <p:spPr>
           <a:xfrm>
             <a:off x="8611920" y="2720880"/>
-            <a:ext cx="1772280" cy="300240"/>
+            <a:ext cx="1771920" cy="299880"/>
           </a:xfrm>
           <a:prstGeom prst="rect">
             <a:avLst/>
@@ -15290,7 +15368,7 @@
         <p:spPr>
           <a:xfrm>
             <a:off x="8647920" y="3115800"/>
-            <a:ext cx="1772280" cy="712080"/>
+            <a:ext cx="1771920" cy="711720"/>
           </a:xfrm>
           <a:prstGeom prst="rect">
             <a:avLst/>
@@ -15347,7 +15425,7 @@
         <p:spPr>
           <a:xfrm>
             <a:off x="10744200" y="2889360"/>
-            <a:ext cx="1828800" cy="298440"/>
+            <a:ext cx="1828440" cy="298080"/>
           </a:xfrm>
           <a:prstGeom prst="rect">
             <a:avLst/>
@@ -15404,7 +15482,7 @@
         <p:spPr>
           <a:xfrm>
             <a:off x="10762200" y="3404880"/>
-            <a:ext cx="1772280" cy="474480"/>
+            <a:ext cx="1771920" cy="474120"/>
           </a:xfrm>
           <a:prstGeom prst="rect">
             <a:avLst/>
@@ -15441,17 +15519,7 @@
                 <a:latin typeface="Source Sans 3"/>
                 <a:ea typeface="Source Sans 3"/>
               </a:rPr>
-              <a:t>Bazara çıxış strategiyası, </a:t>
-            </a:r>
-            <a:r>
-              <a:rPr b="0" lang="en-US" sz="1350" spc="-1" strike="noStrike">
-                <a:solidFill>
-                  <a:srgbClr val="e2e6e9"/>
-                </a:solidFill>
-                <a:latin typeface="Source Sans 3"/>
-                <a:ea typeface="Source Sans 3"/>
-              </a:rPr>
-              <a:t>və gəlir əldə etmə</a:t>
+              <a:t>Bazara çıxış strategiyası, və gəlir əldə etmə</a:t>
             </a:r>
             <a:endParaRPr b="0" lang="en-US" sz="1350" spc="-1" strike="noStrike">
               <a:solidFill>
@@ -15471,7 +15539,7 @@
         <p:spPr>
           <a:xfrm>
             <a:off x="333360" y="5105520"/>
-            <a:ext cx="3400560" cy="1632240"/>
+            <a:ext cx="3400200" cy="1631880"/>
           </a:xfrm>
           <a:prstGeom prst="roundRect">
             <a:avLst>
@@ -15519,7 +15587,7 @@
         <p:spPr>
           <a:xfrm>
             <a:off x="529560" y="5310000"/>
-            <a:ext cx="2230200" cy="299160"/>
+            <a:ext cx="2229840" cy="298800"/>
           </a:xfrm>
           <a:prstGeom prst="rect">
             <a:avLst/>
@@ -15596,7 +15664,7 @@
         <p:spPr>
           <a:xfrm>
             <a:off x="529560" y="5707080"/>
-            <a:ext cx="3008160" cy="825840"/>
+            <a:ext cx="3007800" cy="825480"/>
           </a:xfrm>
           <a:prstGeom prst="rect">
             <a:avLst/>
@@ -15653,7 +15721,7 @@
         <p:spPr>
           <a:xfrm>
             <a:off x="3890160" y="5105520"/>
-            <a:ext cx="3400560" cy="1632240"/>
+            <a:ext cx="3400200" cy="1631880"/>
           </a:xfrm>
           <a:prstGeom prst="roundRect">
             <a:avLst>
@@ -15701,7 +15769,7 @@
         <p:spPr>
           <a:xfrm>
             <a:off x="4086360" y="5310000"/>
-            <a:ext cx="2230200" cy="299160"/>
+            <a:ext cx="2229840" cy="298800"/>
           </a:xfrm>
           <a:prstGeom prst="rect">
             <a:avLst/>
@@ -15778,7 +15846,7 @@
         <p:spPr>
           <a:xfrm>
             <a:off x="4086360" y="5707080"/>
-            <a:ext cx="3008160" cy="825840"/>
+            <a:ext cx="3007800" cy="825480"/>
           </a:xfrm>
           <a:prstGeom prst="rect">
             <a:avLst/>
@@ -15835,7 +15903,7 @@
         <p:spPr>
           <a:xfrm>
             <a:off x="7446960" y="5105520"/>
-            <a:ext cx="3400560" cy="1632240"/>
+            <a:ext cx="3400200" cy="1631880"/>
           </a:xfrm>
           <a:prstGeom prst="roundRect">
             <a:avLst>
@@ -15883,7 +15951,7 @@
         <p:spPr>
           <a:xfrm>
             <a:off x="7643160" y="5310000"/>
-            <a:ext cx="2230200" cy="299160"/>
+            <a:ext cx="2229840" cy="298800"/>
           </a:xfrm>
           <a:prstGeom prst="rect">
             <a:avLst/>
@@ -15960,7 +16028,7 @@
         <p:spPr>
           <a:xfrm>
             <a:off x="7643160" y="5707080"/>
-            <a:ext cx="3008160" cy="550440"/>
+            <a:ext cx="3007800" cy="550080"/>
           </a:xfrm>
           <a:prstGeom prst="rect">
             <a:avLst/>
@@ -16017,7 +16085,7 @@
         <p:spPr>
           <a:xfrm>
             <a:off x="11003400" y="5105520"/>
-            <a:ext cx="3400560" cy="1632240"/>
+            <a:ext cx="3400200" cy="1631880"/>
           </a:xfrm>
           <a:prstGeom prst="roundRect">
             <a:avLst>
@@ -16065,7 +16133,7 @@
         <p:spPr>
           <a:xfrm>
             <a:off x="11199600" y="5310000"/>
-            <a:ext cx="2230200" cy="299160"/>
+            <a:ext cx="2229840" cy="298800"/>
           </a:xfrm>
           <a:prstGeom prst="rect">
             <a:avLst/>
@@ -16142,7 +16210,7 @@
         <p:spPr>
           <a:xfrm>
             <a:off x="11199600" y="5707080"/>
-            <a:ext cx="3008160" cy="550440"/>
+            <a:ext cx="3007800" cy="550080"/>
           </a:xfrm>
           <a:prstGeom prst="rect">
             <a:avLst/>
@@ -16199,7 +16267,7 @@
         <p:spPr>
           <a:xfrm>
             <a:off x="333360" y="6900480"/>
-            <a:ext cx="14070600" cy="1081440"/>
+            <a:ext cx="14070240" cy="1081080"/>
           </a:xfrm>
           <a:prstGeom prst="roundRect">
             <a:avLst>
@@ -16247,7 +16315,7 @@
         <p:spPr>
           <a:xfrm>
             <a:off x="529560" y="7104960"/>
-            <a:ext cx="2813760" cy="299160"/>
+            <a:ext cx="2813400" cy="298800"/>
           </a:xfrm>
           <a:prstGeom prst="rect">
             <a:avLst/>
@@ -16324,7 +16392,7 @@
         <p:spPr>
           <a:xfrm>
             <a:off x="529560" y="7502040"/>
-            <a:ext cx="13678200" cy="275040"/>
+            <a:ext cx="13677840" cy="274680"/>
           </a:xfrm>
           <a:prstGeom prst="rect">
             <a:avLst/>
@@ -16411,9 +16479,9 @@
         <p:grpSpPr>
           <a:xfrm>
             <a:off x="226080" y="312120"/>
-            <a:ext cx="14189040" cy="7669800"/>
+            <a:ext cx="14188680" cy="7669440"/>
             <a:chOff x="226080" y="312120"/>
-            <a:chExt cx="14189040" cy="7669800"/>
+            <a:chExt cx="14188680" cy="7669440"/>
           </a:xfrm>
         </p:grpSpPr>
         <p:sp>
@@ -16425,7 +16493,7 @@
           <p:spPr>
             <a:xfrm>
               <a:off x="226080" y="312120"/>
-              <a:ext cx="8713440" cy="645480"/>
+              <a:ext cx="8713080" cy="645120"/>
             </a:xfrm>
             <a:prstGeom prst="rect">
               <a:avLst/>
@@ -16482,7 +16550,7 @@
           <p:spPr>
             <a:xfrm>
               <a:off x="226080" y="1315440"/>
-              <a:ext cx="14180040" cy="609120"/>
+              <a:ext cx="14179680" cy="608760"/>
             </a:xfrm>
             <a:prstGeom prst="rect">
               <a:avLst/>
@@ -16539,7 +16607,7 @@
           <p:spPr>
             <a:xfrm>
               <a:off x="226080" y="2305080"/>
-              <a:ext cx="3514320" cy="322560"/>
+              <a:ext cx="3513960" cy="322200"/>
             </a:xfrm>
             <a:prstGeom prst="rect">
               <a:avLst/>
@@ -16596,7 +16664,7 @@
           <p:spPr>
             <a:xfrm>
               <a:off x="226080" y="2806560"/>
-              <a:ext cx="6848640" cy="1218600"/>
+              <a:ext cx="6848280" cy="1218240"/>
             </a:xfrm>
             <a:prstGeom prst="rect">
               <a:avLst/>
@@ -16663,7 +16731,7 @@
           <p:spPr>
             <a:xfrm>
               <a:off x="300240" y="4233600"/>
-              <a:ext cx="296280" cy="340560"/>
+              <a:ext cx="295920" cy="340200"/>
             </a:xfrm>
             <a:prstGeom prst="rect">
               <a:avLst/>
@@ -16682,7 +16750,7 @@
           <p:spPr>
             <a:xfrm>
               <a:off x="868680" y="4226760"/>
-              <a:ext cx="2480040" cy="322560"/>
+              <a:ext cx="2479680" cy="322200"/>
             </a:xfrm>
             <a:prstGeom prst="rect">
               <a:avLst/>
@@ -16739,7 +16807,7 @@
           <p:spPr>
             <a:xfrm>
               <a:off x="868680" y="4728240"/>
-              <a:ext cx="6206040" cy="304200"/>
+              <a:ext cx="6205680" cy="303840"/>
             </a:xfrm>
             <a:prstGeom prst="rect">
               <a:avLst/>
@@ -16806,7 +16874,7 @@
           <p:spPr>
             <a:xfrm>
               <a:off x="300240" y="5397480"/>
-              <a:ext cx="296280" cy="340560"/>
+              <a:ext cx="295920" cy="340200"/>
             </a:xfrm>
             <a:prstGeom prst="rect">
               <a:avLst/>
@@ -16825,7 +16893,7 @@
           <p:spPr>
             <a:xfrm>
               <a:off x="868680" y="5390640"/>
-              <a:ext cx="3273120" cy="322560"/>
+              <a:ext cx="3272760" cy="322200"/>
             </a:xfrm>
             <a:prstGeom prst="rect">
               <a:avLst/>
@@ -16882,7 +16950,7 @@
           <p:spPr>
             <a:xfrm>
               <a:off x="868680" y="5892480"/>
-              <a:ext cx="6206040" cy="304200"/>
+              <a:ext cx="6205680" cy="303840"/>
             </a:xfrm>
             <a:prstGeom prst="rect">
               <a:avLst/>
@@ -16939,7 +17007,7 @@
           <p:spPr>
             <a:xfrm>
               <a:off x="7566120" y="2305080"/>
-              <a:ext cx="4095000" cy="322560"/>
+              <a:ext cx="4094640" cy="322200"/>
             </a:xfrm>
             <a:prstGeom prst="rect">
               <a:avLst/>
@@ -16996,7 +17064,7 @@
           <p:spPr>
             <a:xfrm>
               <a:off x="7566120" y="2806560"/>
-              <a:ext cx="6848640" cy="1218600"/>
+              <a:ext cx="6848280" cy="1218240"/>
             </a:xfrm>
             <a:prstGeom prst="rect">
               <a:avLst/>
@@ -17053,7 +17121,7 @@
           <p:spPr>
             <a:xfrm>
               <a:off x="7566120" y="4226760"/>
-              <a:ext cx="3346200" cy="1949400"/>
+              <a:ext cx="3345840" cy="1949040"/>
             </a:xfrm>
             <a:prstGeom prst="roundRect">
               <a:avLst>
@@ -17104,7 +17172,7 @@
           <p:spPr>
             <a:xfrm>
               <a:off x="7790400" y="4484520"/>
-              <a:ext cx="2247480" cy="322560"/>
+              <a:ext cx="2247120" cy="322200"/>
             </a:xfrm>
             <a:prstGeom prst="rect">
               <a:avLst/>
@@ -17161,7 +17229,7 @@
           <p:spPr>
             <a:xfrm>
               <a:off x="7790400" y="4986360"/>
-              <a:ext cx="2897640" cy="609120"/>
+              <a:ext cx="2897280" cy="608760"/>
             </a:xfrm>
             <a:prstGeom prst="rect">
               <a:avLst/>
@@ -17218,7 +17286,7 @@
           <p:spPr>
             <a:xfrm>
               <a:off x="11068560" y="4226760"/>
-              <a:ext cx="3346560" cy="1949400"/>
+              <a:ext cx="3346200" cy="1949040"/>
             </a:xfrm>
             <a:prstGeom prst="roundRect">
               <a:avLst>
@@ -17269,7 +17337,7 @@
           <p:spPr>
             <a:xfrm>
               <a:off x="11292840" y="4484520"/>
-              <a:ext cx="2898000" cy="645480"/>
+              <a:ext cx="2897640" cy="645120"/>
             </a:xfrm>
             <a:prstGeom prst="rect">
               <a:avLst/>
@@ -17326,7 +17394,7 @@
           <p:spPr>
             <a:xfrm>
               <a:off x="11292840" y="5309280"/>
-              <a:ext cx="2898000" cy="609120"/>
+              <a:ext cx="2897640" cy="608760"/>
             </a:xfrm>
             <a:prstGeom prst="rect">
               <a:avLst/>
@@ -17383,7 +17451,7 @@
           <p:spPr>
             <a:xfrm>
               <a:off x="7566120" y="6355440"/>
-              <a:ext cx="6848640" cy="1626480"/>
+              <a:ext cx="6848280" cy="1626120"/>
             </a:xfrm>
             <a:prstGeom prst="roundRect">
               <a:avLst>
@@ -17434,7 +17502,7 @@
           <p:spPr>
             <a:xfrm>
               <a:off x="7790400" y="6613200"/>
-              <a:ext cx="2247480" cy="322560"/>
+              <a:ext cx="2247120" cy="322200"/>
             </a:xfrm>
             <a:prstGeom prst="rect">
               <a:avLst/>
@@ -17491,7 +17559,7 @@
           <p:spPr>
             <a:xfrm>
               <a:off x="7790400" y="7114680"/>
-              <a:ext cx="6400080" cy="609120"/>
+              <a:ext cx="6399720" cy="608760"/>
             </a:xfrm>
             <a:prstGeom prst="rect">
               <a:avLst/>
@@ -17579,9 +17647,9 @@
         <p:grpSpPr>
           <a:xfrm>
             <a:off x="258120" y="312120"/>
-            <a:ext cx="14059800" cy="7626600"/>
+            <a:ext cx="14059440" cy="7626240"/>
             <a:chOff x="258120" y="312120"/>
-            <a:chExt cx="14059800" cy="7626600"/>
+            <a:chExt cx="14059440" cy="7626240"/>
           </a:xfrm>
         </p:grpSpPr>
         <p:sp>
@@ -17593,7 +17661,7 @@
           <p:spPr>
             <a:xfrm>
               <a:off x="258120" y="312120"/>
-              <a:ext cx="6771600" cy="531000"/>
+              <a:ext cx="6771240" cy="530640"/>
             </a:xfrm>
             <a:prstGeom prst="rect">
               <a:avLst/>
@@ -17650,7 +17718,7 @@
           <p:spPr>
             <a:xfrm>
               <a:off x="258120" y="1077840"/>
-              <a:ext cx="14049000" cy="456120"/>
+              <a:ext cx="14048640" cy="455760"/>
             </a:xfrm>
             <a:prstGeom prst="rect">
               <a:avLst/>
@@ -17707,7 +17775,7 @@
           <p:spPr>
             <a:xfrm>
               <a:off x="258120" y="1783440"/>
-              <a:ext cx="2226600" cy="265320"/>
+              <a:ext cx="2226240" cy="264960"/>
             </a:xfrm>
             <a:prstGeom prst="rect">
               <a:avLst/>
@@ -17764,7 +17832,7 @@
           <p:spPr>
             <a:xfrm>
               <a:off x="258120" y="2166480"/>
-              <a:ext cx="6058800" cy="684360"/>
+              <a:ext cx="6058440" cy="684000"/>
             </a:xfrm>
             <a:prstGeom prst="rect">
               <a:avLst/>
@@ -17821,7 +17889,7 @@
           <p:spPr>
             <a:xfrm>
               <a:off x="258120" y="2983320"/>
-              <a:ext cx="2967840" cy="1223640"/>
+              <a:ext cx="2967480" cy="1223280"/>
             </a:xfrm>
             <a:prstGeom prst="roundRect">
               <a:avLst>
@@ -17869,7 +17937,7 @@
           <p:spPr>
             <a:xfrm>
               <a:off x="453960" y="3170160"/>
-              <a:ext cx="2226600" cy="275760"/>
+              <a:ext cx="2226240" cy="275400"/>
             </a:xfrm>
             <a:prstGeom prst="rect">
               <a:avLst/>
@@ -17946,7 +18014,7 @@
           <p:spPr>
             <a:xfrm>
               <a:off x="453960" y="3563640"/>
-              <a:ext cx="2575800" cy="456120"/>
+              <a:ext cx="2575440" cy="455760"/>
             </a:xfrm>
             <a:prstGeom prst="rect">
               <a:avLst/>
@@ -18003,7 +18071,7 @@
           <p:spPr>
             <a:xfrm>
               <a:off x="3349080" y="2983320"/>
-              <a:ext cx="2967840" cy="1223640"/>
+              <a:ext cx="2967480" cy="1223280"/>
             </a:xfrm>
             <a:prstGeom prst="roundRect">
               <a:avLst>
@@ -18051,7 +18119,7 @@
           <p:spPr>
             <a:xfrm>
               <a:off x="3544920" y="3170160"/>
-              <a:ext cx="2226600" cy="275760"/>
+              <a:ext cx="2226240" cy="275400"/>
             </a:xfrm>
             <a:prstGeom prst="rect">
               <a:avLst/>
@@ -18128,7 +18196,7 @@
           <p:spPr>
             <a:xfrm>
               <a:off x="3544920" y="3563640"/>
-              <a:ext cx="2576160" cy="456120"/>
+              <a:ext cx="2575800" cy="455760"/>
             </a:xfrm>
             <a:prstGeom prst="rect">
               <a:avLst/>
@@ -18185,7 +18253,7 @@
           <p:spPr>
             <a:xfrm>
               <a:off x="258120" y="4324320"/>
-              <a:ext cx="2967840" cy="1451880"/>
+              <a:ext cx="2967480" cy="1451520"/>
             </a:xfrm>
             <a:prstGeom prst="roundRect">
               <a:avLst>
@@ -18233,7 +18301,7 @@
           <p:spPr>
             <a:xfrm>
               <a:off x="453960" y="4511520"/>
-              <a:ext cx="2226600" cy="275760"/>
+              <a:ext cx="2226240" cy="275400"/>
             </a:xfrm>
             <a:prstGeom prst="rect">
               <a:avLst/>
@@ -18310,7 +18378,7 @@
           <p:spPr>
             <a:xfrm>
               <a:off x="453960" y="4905000"/>
-              <a:ext cx="2575800" cy="456120"/>
+              <a:ext cx="2575440" cy="455760"/>
             </a:xfrm>
             <a:prstGeom prst="rect">
               <a:avLst/>
@@ -18367,7 +18435,7 @@
           <p:spPr>
             <a:xfrm>
               <a:off x="3349080" y="4324320"/>
-              <a:ext cx="2967840" cy="1451880"/>
+              <a:ext cx="2967480" cy="1451520"/>
             </a:xfrm>
             <a:prstGeom prst="roundRect">
               <a:avLst>
@@ -18415,7 +18483,7 @@
           <p:spPr>
             <a:xfrm>
               <a:off x="3544920" y="4511520"/>
-              <a:ext cx="2226600" cy="275760"/>
+              <a:ext cx="2226240" cy="275400"/>
             </a:xfrm>
             <a:prstGeom prst="rect">
               <a:avLst/>
@@ -18492,7 +18560,7 @@
           <p:spPr>
             <a:xfrm>
               <a:off x="3544920" y="4905000"/>
-              <a:ext cx="2576160" cy="684360"/>
+              <a:ext cx="2575800" cy="684000"/>
             </a:xfrm>
             <a:prstGeom prst="rect">
               <a:avLst/>
@@ -18549,7 +18617,7 @@
           <p:spPr>
             <a:xfrm>
               <a:off x="6806160" y="1783440"/>
-              <a:ext cx="4761360" cy="265320"/>
+              <a:ext cx="4761000" cy="264960"/>
             </a:xfrm>
             <a:prstGeom prst="rect">
               <a:avLst/>
@@ -18606,7 +18674,7 @@
           <p:spPr>
             <a:xfrm>
               <a:off x="6806160" y="2166480"/>
-              <a:ext cx="7511760" cy="227880"/>
+              <a:ext cx="7511400" cy="227520"/>
             </a:xfrm>
             <a:prstGeom prst="rect">
               <a:avLst/>
@@ -18663,7 +18731,7 @@
           <p:spPr>
             <a:xfrm>
               <a:off x="6806160" y="2526840"/>
-              <a:ext cx="7511760" cy="1027080"/>
+              <a:ext cx="7511400" cy="1026720"/>
             </a:xfrm>
             <a:prstGeom prst="roundRect">
               <a:avLst>
@@ -18714,7 +18782,7 @@
           <p:spPr>
             <a:xfrm>
               <a:off x="6784200" y="2526840"/>
-              <a:ext cx="87840" cy="1027080"/>
+              <a:ext cx="87480" cy="1026720"/>
             </a:xfrm>
             <a:prstGeom prst="roundRect">
               <a:avLst>
@@ -18762,7 +18830,7 @@
           <p:spPr>
             <a:xfrm>
               <a:off x="7090560" y="2734920"/>
-              <a:ext cx="3834360" cy="265320"/>
+              <a:ext cx="3834000" cy="264960"/>
             </a:xfrm>
             <a:prstGeom prst="rect">
               <a:avLst/>
@@ -18819,7 +18887,7 @@
           <p:spPr>
             <a:xfrm>
               <a:off x="7090560" y="3117600"/>
-              <a:ext cx="7009560" cy="227880"/>
+              <a:ext cx="7009200" cy="227520"/>
             </a:xfrm>
             <a:prstGeom prst="rect">
               <a:avLst/>
@@ -18876,7 +18944,7 @@
           <p:spPr>
             <a:xfrm>
               <a:off x="6806160" y="3671280"/>
-              <a:ext cx="7511760" cy="1027080"/>
+              <a:ext cx="7511400" cy="1026720"/>
             </a:xfrm>
             <a:prstGeom prst="roundRect">
               <a:avLst>
@@ -18927,7 +18995,7 @@
           <p:spPr>
             <a:xfrm>
               <a:off x="6784200" y="3671280"/>
-              <a:ext cx="87840" cy="1027080"/>
+              <a:ext cx="87480" cy="1026720"/>
             </a:xfrm>
             <a:prstGeom prst="roundRect">
               <a:avLst>
@@ -18975,7 +19043,7 @@
           <p:spPr>
             <a:xfrm>
               <a:off x="7090560" y="3879360"/>
-              <a:ext cx="3362040" cy="265320"/>
+              <a:ext cx="3361680" cy="264960"/>
             </a:xfrm>
             <a:prstGeom prst="rect">
               <a:avLst/>
@@ -19032,7 +19100,7 @@
           <p:spPr>
             <a:xfrm>
               <a:off x="7090560" y="4262400"/>
-              <a:ext cx="7009560" cy="227880"/>
+              <a:ext cx="7009200" cy="227520"/>
             </a:xfrm>
             <a:prstGeom prst="rect">
               <a:avLst/>
@@ -19089,7 +19157,7 @@
           <p:spPr>
             <a:xfrm>
               <a:off x="6806160" y="4816080"/>
-              <a:ext cx="7511760" cy="1027080"/>
+              <a:ext cx="7511400" cy="1026720"/>
             </a:xfrm>
             <a:prstGeom prst="roundRect">
               <a:avLst>
@@ -19140,7 +19208,7 @@
           <p:spPr>
             <a:xfrm>
               <a:off x="6784200" y="4816080"/>
-              <a:ext cx="87840" cy="1027080"/>
+              <a:ext cx="87480" cy="1026720"/>
             </a:xfrm>
             <a:prstGeom prst="roundRect">
               <a:avLst>
@@ -19188,7 +19256,7 @@
           <p:spPr>
             <a:xfrm>
               <a:off x="7090560" y="5023800"/>
-              <a:ext cx="2226600" cy="265320"/>
+              <a:ext cx="2226240" cy="264960"/>
             </a:xfrm>
             <a:prstGeom prst="rect">
               <a:avLst/>
@@ -19245,7 +19313,7 @@
           <p:spPr>
             <a:xfrm>
               <a:off x="7090560" y="5406840"/>
-              <a:ext cx="7009560" cy="227880"/>
+              <a:ext cx="7009200" cy="227520"/>
             </a:xfrm>
             <a:prstGeom prst="rect">
               <a:avLst/>
@@ -19302,7 +19370,7 @@
           <p:spPr>
             <a:xfrm>
               <a:off x="6806160" y="5960520"/>
-              <a:ext cx="7511760" cy="1027080"/>
+              <a:ext cx="7511400" cy="1026720"/>
             </a:xfrm>
             <a:prstGeom prst="roundRect">
               <a:avLst>
@@ -19353,7 +19421,7 @@
           <p:spPr>
             <a:xfrm>
               <a:off x="6784200" y="5960520"/>
-              <a:ext cx="87840" cy="1027080"/>
+              <a:ext cx="87480" cy="1026720"/>
             </a:xfrm>
             <a:prstGeom prst="roundRect">
               <a:avLst>
@@ -19401,7 +19469,7 @@
           <p:spPr>
             <a:xfrm>
               <a:off x="7090560" y="6168600"/>
-              <a:ext cx="2309040" cy="265320"/>
+              <a:ext cx="2308680" cy="264960"/>
             </a:xfrm>
             <a:prstGeom prst="rect">
               <a:avLst/>
@@ -19458,7 +19526,7 @@
           <p:spPr>
             <a:xfrm>
               <a:off x="7090560" y="6551640"/>
-              <a:ext cx="7009560" cy="227880"/>
+              <a:ext cx="7009200" cy="227520"/>
             </a:xfrm>
             <a:prstGeom prst="rect">
               <a:avLst/>
@@ -19515,7 +19583,7 @@
           <p:spPr>
             <a:xfrm>
               <a:off x="6806160" y="7119720"/>
-              <a:ext cx="7511760" cy="819000"/>
+              <a:ext cx="7511400" cy="818640"/>
             </a:xfrm>
             <a:prstGeom prst="roundRect">
               <a:avLst>
@@ -19567,7 +19635,7 @@
           <p:spPr>
             <a:xfrm>
               <a:off x="7002360" y="7358040"/>
-              <a:ext cx="244440" cy="186480"/>
+              <a:ext cx="244080" cy="186120"/>
             </a:xfrm>
             <a:prstGeom prst="rect">
               <a:avLst/>
@@ -19586,7 +19654,7 @@
           <p:spPr>
             <a:xfrm>
               <a:off x="7443000" y="7283880"/>
-              <a:ext cx="6679080" cy="456120"/>
+              <a:ext cx="6678720" cy="455760"/>
             </a:xfrm>
             <a:prstGeom prst="rect">
               <a:avLst/>
@@ -19704,9 +19772,9 @@
         <p:grpSpPr>
           <a:xfrm>
             <a:off x="139680" y="226080"/>
-            <a:ext cx="14275440" cy="7885080"/>
+            <a:ext cx="14275080" cy="7884720"/>
             <a:chOff x="139680" y="226080"/>
-            <a:chExt cx="14275440" cy="7885080"/>
+            <a:chExt cx="14275080" cy="7884720"/>
           </a:xfrm>
         </p:grpSpPr>
         <p:sp>
@@ -19718,7 +19786,7 @@
           <p:spPr>
             <a:xfrm>
               <a:off x="139680" y="226080"/>
-              <a:ext cx="8770320" cy="680760"/>
+              <a:ext cx="8769960" cy="680400"/>
             </a:xfrm>
             <a:prstGeom prst="rect">
               <a:avLst/>
@@ -19775,7 +19843,7 @@
           <p:spPr>
             <a:xfrm>
               <a:off x="139680" y="1380240"/>
-              <a:ext cx="14275080" cy="714240"/>
+              <a:ext cx="14274720" cy="713880"/>
             </a:xfrm>
             <a:prstGeom prst="rect">
               <a:avLst/>
@@ -19842,7 +19910,7 @@
           <p:spPr>
             <a:xfrm>
               <a:off x="252720" y="2361240"/>
-              <a:ext cx="588240" cy="599040"/>
+              <a:ext cx="587880" cy="598680"/>
             </a:xfrm>
             <a:prstGeom prst="rect">
               <a:avLst/>
@@ -19861,7 +19929,7 @@
           <p:spPr>
             <a:xfrm>
               <a:off x="252720" y="3256560"/>
-              <a:ext cx="3292560" cy="340200"/>
+              <a:ext cx="3292200" cy="339840"/>
             </a:xfrm>
             <a:prstGeom prst="rect">
               <a:avLst/>
@@ -19918,7 +19986,7 @@
           <p:spPr>
             <a:xfrm>
               <a:off x="252720" y="3738960"/>
-              <a:ext cx="4564440" cy="2858760"/>
+              <a:ext cx="4564080" cy="2858400"/>
             </a:xfrm>
             <a:prstGeom prst="rect">
               <a:avLst/>
@@ -19985,7 +20053,7 @@
           <p:spPr>
             <a:xfrm>
               <a:off x="4995000" y="2361240"/>
-              <a:ext cx="588240" cy="599040"/>
+              <a:ext cx="587880" cy="598680"/>
             </a:xfrm>
             <a:prstGeom prst="rect">
               <a:avLst/>
@@ -20004,7 +20072,7 @@
           <p:spPr>
             <a:xfrm>
               <a:off x="4995000" y="3256560"/>
-              <a:ext cx="4471200" cy="340200"/>
+              <a:ext cx="4470840" cy="339840"/>
             </a:xfrm>
             <a:prstGeom prst="rect">
               <a:avLst/>
@@ -20061,7 +20129,7 @@
           <p:spPr>
             <a:xfrm>
               <a:off x="4995000" y="3738960"/>
-              <a:ext cx="4564440" cy="3215880"/>
+              <a:ext cx="4564080" cy="3215520"/>
             </a:xfrm>
             <a:prstGeom prst="rect">
               <a:avLst/>
@@ -20128,7 +20196,7 @@
           <p:spPr>
             <a:xfrm>
               <a:off x="9850320" y="2361240"/>
-              <a:ext cx="588240" cy="599040"/>
+              <a:ext cx="587880" cy="598680"/>
             </a:xfrm>
             <a:prstGeom prst="rect">
               <a:avLst/>
@@ -20147,7 +20215,7 @@
           <p:spPr>
             <a:xfrm>
               <a:off x="9850320" y="3256560"/>
-              <a:ext cx="4167720" cy="340200"/>
+              <a:ext cx="4167360" cy="339840"/>
             </a:xfrm>
             <a:prstGeom prst="rect">
               <a:avLst/>
@@ -20204,7 +20272,7 @@
           <p:spPr>
             <a:xfrm>
               <a:off x="9850320" y="3738960"/>
-              <a:ext cx="4564440" cy="3215880"/>
+              <a:ext cx="4564080" cy="3215520"/>
             </a:xfrm>
             <a:prstGeom prst="rect">
               <a:avLst/>
@@ -20261,7 +20329,7 @@
           <p:spPr>
             <a:xfrm>
               <a:off x="493200" y="7487640"/>
-              <a:ext cx="13921920" cy="357120"/>
+              <a:ext cx="13921560" cy="356760"/>
             </a:xfrm>
             <a:prstGeom prst="rect">
               <a:avLst/>
@@ -20338,7 +20406,7 @@
           <p:spPr>
             <a:xfrm>
               <a:off x="139680" y="7221600"/>
-              <a:ext cx="24840" cy="889560"/>
+              <a:ext cx="24480" cy="889200"/>
             </a:xfrm>
             <a:prstGeom prst="rect">
               <a:avLst/>
@@ -20415,7 +20483,7 @@
         <p:spPr>
           <a:xfrm>
             <a:off x="218520" y="258120"/>
-            <a:ext cx="9392760" cy="562680"/>
+            <a:ext cx="9392400" cy="562320"/>
           </a:xfrm>
           <a:prstGeom prst="rect">
             <a:avLst/>
@@ -20472,7 +20540,7 @@
         <p:spPr>
           <a:xfrm>
             <a:off x="218520" y="1093320"/>
-            <a:ext cx="14240160" cy="500760"/>
+            <a:ext cx="14239800" cy="500400"/>
           </a:xfrm>
           <a:prstGeom prst="rect">
             <a:avLst/>
@@ -20529,7 +20597,7 @@
         <p:spPr>
           <a:xfrm>
             <a:off x="75240" y="1747800"/>
-            <a:ext cx="7163640" cy="6374160"/>
+            <a:ext cx="7163280" cy="6373800"/>
           </a:xfrm>
           <a:prstGeom prst="roundRect">
             <a:avLst>
@@ -20577,7 +20645,7 @@
         <p:spPr>
           <a:xfrm>
             <a:off x="1353960" y="2099880"/>
-            <a:ext cx="5480640" cy="281160"/>
+            <a:ext cx="5480280" cy="280800"/>
           </a:xfrm>
           <a:prstGeom prst="rect">
             <a:avLst/>
@@ -20634,7 +20702,7 @@
         <p:spPr>
           <a:xfrm>
             <a:off x="273960" y="2318400"/>
-            <a:ext cx="198360" cy="247320"/>
+            <a:ext cx="198000" cy="246960"/>
           </a:xfrm>
           <a:prstGeom prst="rect">
             <a:avLst/>
@@ -20681,7 +20749,7 @@
         <p:spPr>
           <a:xfrm>
             <a:off x="273960" y="2634840"/>
-            <a:ext cx="6766560" cy="20160"/>
+            <a:ext cx="6766200" cy="19800"/>
           </a:xfrm>
           <a:prstGeom prst="rect">
             <a:avLst/>
@@ -20727,7 +20795,7 @@
         <p:spPr>
           <a:xfrm>
             <a:off x="273960" y="2774520"/>
-            <a:ext cx="2256840" cy="281160"/>
+            <a:ext cx="2256480" cy="280800"/>
           </a:xfrm>
           <a:prstGeom prst="rect">
             <a:avLst/>
@@ -20784,7 +20852,7 @@
         <p:spPr>
           <a:xfrm>
             <a:off x="273960" y="3191760"/>
-            <a:ext cx="6766560" cy="250200"/>
+            <a:ext cx="6766200" cy="249840"/>
           </a:xfrm>
           <a:prstGeom prst="rect">
             <a:avLst/>
@@ -20841,7 +20909,7 @@
         <p:spPr>
           <a:xfrm>
             <a:off x="273960" y="4043520"/>
-            <a:ext cx="6766560" cy="20160"/>
+            <a:ext cx="6766200" cy="19800"/>
           </a:xfrm>
           <a:prstGeom prst="rect">
             <a:avLst/>
@@ -20887,7 +20955,7 @@
         <p:spPr>
           <a:xfrm>
             <a:off x="273960" y="4183200"/>
-            <a:ext cx="3170880" cy="281160"/>
+            <a:ext cx="3170520" cy="280800"/>
           </a:xfrm>
           <a:prstGeom prst="rect">
             <a:avLst/>
@@ -20944,7 +21012,7 @@
         <p:spPr>
           <a:xfrm>
             <a:off x="273960" y="4600800"/>
-            <a:ext cx="6766560" cy="250200"/>
+            <a:ext cx="6766200" cy="249840"/>
           </a:xfrm>
           <a:prstGeom prst="rect">
             <a:avLst/>
@@ -21001,7 +21069,7 @@
         <p:spPr>
           <a:xfrm>
             <a:off x="273960" y="5452560"/>
-            <a:ext cx="6766560" cy="20160"/>
+            <a:ext cx="6766200" cy="19800"/>
           </a:xfrm>
           <a:prstGeom prst="rect">
             <a:avLst/>
@@ -21047,7 +21115,7 @@
         <p:spPr>
           <a:xfrm>
             <a:off x="273960" y="5592240"/>
-            <a:ext cx="3161520" cy="281160"/>
+            <a:ext cx="3161160" cy="280800"/>
           </a:xfrm>
           <a:prstGeom prst="rect">
             <a:avLst/>
@@ -21104,7 +21172,7 @@
         <p:spPr>
           <a:xfrm>
             <a:off x="273960" y="6009840"/>
-            <a:ext cx="6766560" cy="250200"/>
+            <a:ext cx="6766200" cy="249840"/>
           </a:xfrm>
           <a:prstGeom prst="rect">
             <a:avLst/>
@@ -21161,7 +21229,7 @@
         <p:spPr>
           <a:xfrm>
             <a:off x="273960" y="6861600"/>
-            <a:ext cx="6766560" cy="20160"/>
+            <a:ext cx="6766200" cy="19800"/>
           </a:xfrm>
           <a:prstGeom prst="rect">
             <a:avLst/>
@@ -21207,7 +21275,7 @@
         <p:spPr>
           <a:xfrm>
             <a:off x="273960" y="7001280"/>
-            <a:ext cx="2256840" cy="281160"/>
+            <a:ext cx="2256480" cy="280800"/>
           </a:xfrm>
           <a:prstGeom prst="rect">
             <a:avLst/>
@@ -21264,7 +21332,7 @@
         <p:spPr>
           <a:xfrm>
             <a:off x="273960" y="7418520"/>
-            <a:ext cx="6766560" cy="250200"/>
+            <a:ext cx="6766200" cy="249840"/>
           </a:xfrm>
           <a:prstGeom prst="rect">
             <a:avLst/>
@@ -21321,7 +21389,7 @@
         <p:spPr>
           <a:xfrm>
             <a:off x="7590960" y="1883880"/>
-            <a:ext cx="5062680" cy="281160"/>
+            <a:ext cx="5062320" cy="280800"/>
           </a:xfrm>
           <a:prstGeom prst="rect">
             <a:avLst/>
@@ -21378,7 +21446,7 @@
         <p:spPr>
           <a:xfrm>
             <a:off x="7590960" y="2318400"/>
-            <a:ext cx="6877440" cy="1355400"/>
+            <a:ext cx="6877080" cy="1355040"/>
           </a:xfrm>
           <a:prstGeom prst="roundRect">
             <a:avLst>
@@ -21429,7 +21497,7 @@
         <p:spPr>
           <a:xfrm>
             <a:off x="7570800" y="2318400"/>
-            <a:ext cx="81360" cy="1355400"/>
+            <a:ext cx="81000" cy="1355040"/>
           </a:xfrm>
           <a:prstGeom prst="roundRect">
             <a:avLst>
@@ -21477,7 +21545,7 @@
         <p:spPr>
           <a:xfrm>
             <a:off x="7871400" y="2536920"/>
-            <a:ext cx="3625920" cy="281160"/>
+            <a:ext cx="3625560" cy="280800"/>
           </a:xfrm>
           <a:prstGeom prst="rect">
             <a:avLst/>
@@ -21534,7 +21602,7 @@
         <p:spPr>
           <a:xfrm>
             <a:off x="7871400" y="2954160"/>
-            <a:ext cx="6378480" cy="500760"/>
+            <a:ext cx="6378120" cy="500400"/>
           </a:xfrm>
           <a:prstGeom prst="rect">
             <a:avLst/>
@@ -21591,7 +21659,7 @@
         <p:spPr>
           <a:xfrm>
             <a:off x="7590960" y="3809880"/>
-            <a:ext cx="6877440" cy="1355400"/>
+            <a:ext cx="6877080" cy="1355040"/>
           </a:xfrm>
           <a:prstGeom prst="roundRect">
             <a:avLst>
@@ -21642,7 +21710,7 @@
         <p:spPr>
           <a:xfrm>
             <a:off x="7570800" y="3809880"/>
-            <a:ext cx="81360" cy="1355400"/>
+            <a:ext cx="81000" cy="1355040"/>
           </a:xfrm>
           <a:prstGeom prst="roundRect">
             <a:avLst>
@@ -21690,7 +21758,7 @@
         <p:spPr>
           <a:xfrm>
             <a:off x="7871400" y="4028400"/>
-            <a:ext cx="4078800" cy="281160"/>
+            <a:ext cx="4078440" cy="280800"/>
           </a:xfrm>
           <a:prstGeom prst="rect">
             <a:avLst/>
@@ -21747,7 +21815,7 @@
         <p:spPr>
           <a:xfrm>
             <a:off x="7871400" y="4446000"/>
-            <a:ext cx="6378480" cy="500760"/>
+            <a:ext cx="6378120" cy="500400"/>
           </a:xfrm>
           <a:prstGeom prst="rect">
             <a:avLst/>
@@ -21804,7 +21872,7 @@
         <p:spPr>
           <a:xfrm>
             <a:off x="7590960" y="5301720"/>
-            <a:ext cx="6877440" cy="1355400"/>
+            <a:ext cx="6877080" cy="1355040"/>
           </a:xfrm>
           <a:prstGeom prst="roundRect">
             <a:avLst>
@@ -21855,7 +21923,7 @@
         <p:spPr>
           <a:xfrm>
             <a:off x="7570800" y="5301720"/>
-            <a:ext cx="81360" cy="1355400"/>
+            <a:ext cx="81000" cy="1355040"/>
           </a:xfrm>
           <a:prstGeom prst="roundRect">
             <a:avLst>
@@ -21903,7 +21971,7 @@
         <p:spPr>
           <a:xfrm>
             <a:off x="7871400" y="5520240"/>
-            <a:ext cx="3633120" cy="281160"/>
+            <a:ext cx="3632760" cy="280800"/>
           </a:xfrm>
           <a:prstGeom prst="rect">
             <a:avLst/>
@@ -21960,7 +22028,7 @@
         <p:spPr>
           <a:xfrm>
             <a:off x="7871400" y="5937480"/>
-            <a:ext cx="6378480" cy="500760"/>
+            <a:ext cx="6378120" cy="500400"/>
           </a:xfrm>
           <a:prstGeom prst="rect">
             <a:avLst/>
@@ -22017,7 +22085,7 @@
         <p:spPr>
           <a:xfrm>
             <a:off x="7590960" y="6810480"/>
-            <a:ext cx="6877440" cy="1158120"/>
+            <a:ext cx="6877080" cy="1157760"/>
           </a:xfrm>
           <a:prstGeom prst="roundRect">
             <a:avLst>
@@ -22069,7 +22137,7 @@
         <p:spPr>
           <a:xfrm>
             <a:off x="7789680" y="7067880"/>
-            <a:ext cx="247680" cy="197640"/>
+            <a:ext cx="247320" cy="197280"/>
           </a:xfrm>
           <a:prstGeom prst="rect">
             <a:avLst/>
@@ -22088,7 +22156,7 @@
         <p:spPr>
           <a:xfrm>
             <a:off x="8236440" y="6995880"/>
-            <a:ext cx="6033600" cy="751320"/>
+            <a:ext cx="6033240" cy="750960"/>
           </a:xfrm>
           <a:prstGeom prst="rect">
             <a:avLst/>
